--- a/Task 1/Task 1 Mobile App Development.pptx
+++ b/Task 1/Task 1 Mobile App Development.pptx
@@ -5,23 +5,33 @@
     <p:sldMasterId id="2147483648" r:id="rId4"/>
   </p:sldMasterIdLst>
   <p:notesMasterIdLst>
-    <p:notesMasterId r:id="rId16"/>
+    <p:notesMasterId r:id="rId26"/>
   </p:notesMasterIdLst>
   <p:handoutMasterIdLst>
-    <p:handoutMasterId r:id="rId17"/>
+    <p:handoutMasterId r:id="rId27"/>
   </p:handoutMasterIdLst>
   <p:sldIdLst>
     <p:sldId id="266" r:id="rId5"/>
-    <p:sldId id="264" r:id="rId6"/>
-    <p:sldId id="265" r:id="rId7"/>
-    <p:sldId id="257" r:id="rId8"/>
-    <p:sldId id="256" r:id="rId9"/>
-    <p:sldId id="258" r:id="rId10"/>
-    <p:sldId id="261" r:id="rId11"/>
-    <p:sldId id="268" r:id="rId12"/>
-    <p:sldId id="263" r:id="rId13"/>
-    <p:sldId id="267" r:id="rId14"/>
-    <p:sldId id="269" r:id="rId15"/>
+    <p:sldId id="265" r:id="rId6"/>
+    <p:sldId id="257" r:id="rId7"/>
+    <p:sldId id="256" r:id="rId8"/>
+    <p:sldId id="279" r:id="rId9"/>
+    <p:sldId id="278" r:id="rId10"/>
+    <p:sldId id="280" r:id="rId11"/>
+    <p:sldId id="281" r:id="rId12"/>
+    <p:sldId id="282" r:id="rId13"/>
+    <p:sldId id="258" r:id="rId14"/>
+    <p:sldId id="261" r:id="rId15"/>
+    <p:sldId id="277" r:id="rId16"/>
+    <p:sldId id="270" r:id="rId17"/>
+    <p:sldId id="271" r:id="rId18"/>
+    <p:sldId id="268" r:id="rId19"/>
+    <p:sldId id="272" r:id="rId20"/>
+    <p:sldId id="273" r:id="rId21"/>
+    <p:sldId id="274" r:id="rId22"/>
+    <p:sldId id="263" r:id="rId23"/>
+    <p:sldId id="267" r:id="rId24"/>
+    <p:sldId id="269" r:id="rId25"/>
   </p:sldIdLst>
   <p:sldSz cx="12192000" cy="6858000"/>
   <p:notesSz cx="6858000" cy="9144000"/>
@@ -145,6 +155,8 @@
     <p1510:client id="" v="267" dt="2026-04-06T21:10:44.062"/>
     <p1510:client id="{268E14F3-B951-7C3E-1D88-AA782DFAB165}" v="38" dt="2026-04-06T19:51:21.212"/>
     <p1510:client id="{62CE872A-2D7F-F975-991C-E7FD09EDDB1E}" v="391" dt="2026-04-06T21:19:42.104"/>
+    <p1510:client id="{66E0B756-2851-7103-45BF-6795315BBB0E}" v="6" dt="2026-04-07T09:57:42.780"/>
+    <p1510:client id="{B2627871-A4ED-C176-B78F-5A532305EA41}" v="411" dt="2026-04-07T09:43:51.720"/>
     <p1510:client id="{B4C0864B-338B-7FB0-2D30-130E190A297D}" v="10" dt="2026-04-06T20:24:56.002"/>
     <p1510:client id="{E0D2D104-36B3-7447-8C8E-684C8FF10F7A}" v="1880" dt="2026-04-06T19:33:33.563"/>
   </p1510:revLst>
@@ -672,6 +684,52 @@
     </pc:docChg>
   </pc:docChgLst>
   <pc:docChgLst>
+    <pc:chgData name="Utilisateur invité" providerId="Windows Live" clId="Web-{66E0B756-2851-7103-45BF-6795315BBB0E}"/>
+    <pc:docChg chg="delSld modSld">
+      <pc:chgData name="Utilisateur invité" userId="" providerId="Windows Live" clId="Web-{66E0B756-2851-7103-45BF-6795315BBB0E}" dt="2026-04-07T09:57:42.780" v="5" actId="1076"/>
+      <pc:docMkLst>
+        <pc:docMk/>
+      </pc:docMkLst>
+      <pc:sldChg chg="modSp">
+        <pc:chgData name="Utilisateur invité" userId="" providerId="Windows Live" clId="Web-{66E0B756-2851-7103-45BF-6795315BBB0E}" dt="2026-04-07T09:57:42.780" v="5" actId="1076"/>
+        <pc:sldMkLst>
+          <pc:docMk/>
+          <pc:sldMk cId="3607270498" sldId="261"/>
+        </pc:sldMkLst>
+        <pc:spChg chg="mod">
+          <ac:chgData name="Utilisateur invité" userId="" providerId="Windows Live" clId="Web-{66E0B756-2851-7103-45BF-6795315BBB0E}" dt="2026-04-07T09:57:42.780" v="5" actId="1076"/>
+          <ac:spMkLst>
+            <pc:docMk/>
+            <pc:sldMk cId="3607270498" sldId="261"/>
+            <ac:spMk id="4" creationId="{315E3981-F0D7-482C-A8E0-6A57700BECA7}"/>
+          </ac:spMkLst>
+        </pc:spChg>
+      </pc:sldChg>
+      <pc:sldChg chg="delSp">
+        <pc:chgData name="Utilisateur invité" userId="" providerId="Windows Live" clId="Web-{66E0B756-2851-7103-45BF-6795315BBB0E}" dt="2026-04-07T09:56:04.139" v="3"/>
+        <pc:sldMkLst>
+          <pc:docMk/>
+          <pc:sldMk cId="3543692863" sldId="268"/>
+        </pc:sldMkLst>
+        <pc:spChg chg="del">
+          <ac:chgData name="Utilisateur invité" userId="" providerId="Windows Live" clId="Web-{66E0B756-2851-7103-45BF-6795315BBB0E}" dt="2026-04-07T09:56:04.139" v="3"/>
+          <ac:spMkLst>
+            <pc:docMk/>
+            <pc:sldMk cId="3543692863" sldId="268"/>
+            <ac:spMk id="7" creationId="{E6D86EC3-0D1A-539D-6CA0-23DBC948B536}"/>
+          </ac:spMkLst>
+        </pc:spChg>
+      </pc:sldChg>
+      <pc:sldChg chg="del">
+        <pc:chgData name="Utilisateur invité" userId="" providerId="Windows Live" clId="Web-{66E0B756-2851-7103-45BF-6795315BBB0E}" dt="2026-04-07T09:56:13.373" v="4"/>
+        <pc:sldMkLst>
+          <pc:docMk/>
+          <pc:sldMk cId="3486643960" sldId="275"/>
+        </pc:sldMkLst>
+      </pc:sldChg>
+    </pc:docChg>
+  </pc:docChgLst>
+  <pc:docChgLst>
     <pc:chgData name="Guest User" providerId="Windows Live" clId="Web-{268E14F3-B951-7C3E-1D88-AA782DFAB165}"/>
     <pc:docChg chg="delSld modSld">
       <pc:chgData name="Guest User" userId="" providerId="Windows Live" clId="Web-{268E14F3-B951-7C3E-1D88-AA782DFAB165}" dt="2026-04-06T19:51:21.212" v="42" actId="20577"/>
@@ -772,6 +830,417 @@
           <pc:docMk/>
           <pc:sldMk cId="59582380" sldId="285"/>
         </pc:sldMkLst>
+      </pc:sldChg>
+    </pc:docChg>
+  </pc:docChgLst>
+  <pc:docChgLst>
+    <pc:chgData name="Utilisateur invité" providerId="Windows Live" clId="Web-{B2627871-A4ED-C176-B78F-5A532305EA41}"/>
+    <pc:docChg chg="addSld delSld modSld sldOrd">
+      <pc:chgData name="Utilisateur invité" userId="" providerId="Windows Live" clId="Web-{B2627871-A4ED-C176-B78F-5A532305EA41}" dt="2026-04-07T09:43:51.720" v="291"/>
+      <pc:docMkLst>
+        <pc:docMk/>
+      </pc:docMkLst>
+      <pc:sldChg chg="modSp">
+        <pc:chgData name="Utilisateur invité" userId="" providerId="Windows Live" clId="Web-{B2627871-A4ED-C176-B78F-5A532305EA41}" dt="2026-04-07T09:32:29.361" v="160" actId="1076"/>
+        <pc:sldMkLst>
+          <pc:docMk/>
+          <pc:sldMk cId="3607270498" sldId="261"/>
+        </pc:sldMkLst>
+        <pc:spChg chg="mod">
+          <ac:chgData name="Utilisateur invité" userId="" providerId="Windows Live" clId="Web-{B2627871-A4ED-C176-B78F-5A532305EA41}" dt="2026-04-07T09:32:29.361" v="160" actId="1076"/>
+          <ac:spMkLst>
+            <pc:docMk/>
+            <pc:sldMk cId="3607270498" sldId="261"/>
+            <ac:spMk id="4" creationId="{315E3981-F0D7-482C-A8E0-6A57700BECA7}"/>
+          </ac:spMkLst>
+        </pc:spChg>
+        <pc:spChg chg="mod">
+          <ac:chgData name="Utilisateur invité" userId="" providerId="Windows Live" clId="Web-{B2627871-A4ED-C176-B78F-5A532305EA41}" dt="2026-04-07T08:57:55.872" v="5" actId="20577"/>
+          <ac:spMkLst>
+            <pc:docMk/>
+            <pc:sldMk cId="3607270498" sldId="261"/>
+            <ac:spMk id="10" creationId="{56DB35B2-9F41-CED6-7BFF-1F20B515D218}"/>
+          </ac:spMkLst>
+        </pc:spChg>
+      </pc:sldChg>
+      <pc:sldChg chg="ord">
+        <pc:chgData name="Utilisateur invité" userId="" providerId="Windows Live" clId="Web-{B2627871-A4ED-C176-B78F-5A532305EA41}" dt="2026-04-07T09:43:51.720" v="291"/>
+        <pc:sldMkLst>
+          <pc:docMk/>
+          <pc:sldMk cId="2834416146" sldId="264"/>
+        </pc:sldMkLst>
+      </pc:sldChg>
+      <pc:sldChg chg="ord">
+        <pc:chgData name="Utilisateur invité" userId="" providerId="Windows Live" clId="Web-{B2627871-A4ED-C176-B78F-5A532305EA41}" dt="2026-04-07T09:35:33.239" v="162"/>
+        <pc:sldMkLst>
+          <pc:docMk/>
+          <pc:sldMk cId="3112637108" sldId="265"/>
+        </pc:sldMkLst>
+      </pc:sldChg>
+      <pc:sldChg chg="addSp delSp modSp">
+        <pc:chgData name="Utilisateur invité" userId="" providerId="Windows Live" clId="Web-{B2627871-A4ED-C176-B78F-5A532305EA41}" dt="2026-04-07T09:43:32.969" v="290" actId="20577"/>
+        <pc:sldMkLst>
+          <pc:docMk/>
+          <pc:sldMk cId="4201922090" sldId="266"/>
+        </pc:sldMkLst>
+        <pc:spChg chg="mod">
+          <ac:chgData name="Utilisateur invité" userId="" providerId="Windows Live" clId="Web-{B2627871-A4ED-C176-B78F-5A532305EA41}" dt="2026-04-07T09:43:32.969" v="290" actId="20577"/>
+          <ac:spMkLst>
+            <pc:docMk/>
+            <pc:sldMk cId="4201922090" sldId="266"/>
+            <ac:spMk id="2" creationId="{77D0B7ED-DB48-3961-9A22-9285F55C5016}"/>
+          </ac:spMkLst>
+        </pc:spChg>
+        <pc:spChg chg="mod">
+          <ac:chgData name="Utilisateur invité" userId="" providerId="Windows Live" clId="Web-{B2627871-A4ED-C176-B78F-5A532305EA41}" dt="2026-04-07T09:39:58.117" v="205" actId="1076"/>
+          <ac:spMkLst>
+            <pc:docMk/>
+            <pc:sldMk cId="4201922090" sldId="266"/>
+            <ac:spMk id="4" creationId="{FB4C7486-EDF7-83FD-C539-F0567FA8EED4}"/>
+          </ac:spMkLst>
+        </pc:spChg>
+        <pc:spChg chg="add del mod">
+          <ac:chgData name="Utilisateur invité" userId="" providerId="Windows Live" clId="Web-{B2627871-A4ED-C176-B78F-5A532305EA41}" dt="2026-04-07T09:40:59.070" v="214"/>
+          <ac:spMkLst>
+            <pc:docMk/>
+            <pc:sldMk cId="4201922090" sldId="266"/>
+            <ac:spMk id="6" creationId="{A822AC34-1F59-AA8E-5771-8D4E37D17850}"/>
+          </ac:spMkLst>
+        </pc:spChg>
+        <pc:spChg chg="add mod">
+          <ac:chgData name="Utilisateur invité" userId="" providerId="Windows Live" clId="Web-{B2627871-A4ED-C176-B78F-5A532305EA41}" dt="2026-04-07T09:43:20.750" v="286" actId="1076"/>
+          <ac:spMkLst>
+            <pc:docMk/>
+            <pc:sldMk cId="4201922090" sldId="266"/>
+            <ac:spMk id="7" creationId="{AA70DF1F-4675-6104-6DEE-9812D06E0321}"/>
+          </ac:spMkLst>
+        </pc:spChg>
+        <pc:picChg chg="add mod">
+          <ac:chgData name="Utilisateur invité" userId="" providerId="Windows Live" clId="Web-{B2627871-A4ED-C176-B78F-5A532305EA41}" dt="2026-04-07T09:37:54.709" v="176" actId="14100"/>
+          <ac:picMkLst>
+            <pc:docMk/>
+            <pc:sldMk cId="4201922090" sldId="266"/>
+            <ac:picMk id="5" creationId="{0E0C91B6-D246-0F54-5DC3-1176C46DC59D}"/>
+          </ac:picMkLst>
+        </pc:picChg>
+      </pc:sldChg>
+      <pc:sldChg chg="addSp delSp modSp">
+        <pc:chgData name="Utilisateur invité" userId="" providerId="Windows Live" clId="Web-{B2627871-A4ED-C176-B78F-5A532305EA41}" dt="2026-04-07T09:30:55.437" v="155" actId="14100"/>
+        <pc:sldMkLst>
+          <pc:docMk/>
+          <pc:sldMk cId="3543692863" sldId="268"/>
+        </pc:sldMkLst>
+        <pc:spChg chg="del mod">
+          <ac:chgData name="Utilisateur invité" userId="" providerId="Windows Live" clId="Web-{B2627871-A4ED-C176-B78F-5A532305EA41}" dt="2026-04-07T09:27:41.089" v="140"/>
+          <ac:spMkLst>
+            <pc:docMk/>
+            <pc:sldMk cId="3543692863" sldId="268"/>
+            <ac:spMk id="2" creationId="{B3EA3691-21C2-7345-4D12-5EE8015B735F}"/>
+          </ac:spMkLst>
+        </pc:spChg>
+        <pc:spChg chg="mod">
+          <ac:chgData name="Utilisateur invité" userId="" providerId="Windows Live" clId="Web-{B2627871-A4ED-C176-B78F-5A532305EA41}" dt="2026-04-07T09:30:55.437" v="155" actId="14100"/>
+          <ac:spMkLst>
+            <pc:docMk/>
+            <pc:sldMk cId="3543692863" sldId="268"/>
+            <ac:spMk id="4" creationId="{BC3C7601-E598-D895-A67B-BCE070B77069}"/>
+          </ac:spMkLst>
+        </pc:spChg>
+        <pc:spChg chg="add mod">
+          <ac:chgData name="Utilisateur invité" userId="" providerId="Windows Live" clId="Web-{B2627871-A4ED-C176-B78F-5A532305EA41}" dt="2026-04-07T09:27:41.089" v="140"/>
+          <ac:spMkLst>
+            <pc:docMk/>
+            <pc:sldMk cId="3543692863" sldId="268"/>
+            <ac:spMk id="7" creationId="{E6D86EC3-0D1A-539D-6CA0-23DBC948B536}"/>
+          </ac:spMkLst>
+        </pc:spChg>
+        <pc:picChg chg="add mod">
+          <ac:chgData name="Utilisateur invité" userId="" providerId="Windows Live" clId="Web-{B2627871-A4ED-C176-B78F-5A532305EA41}" dt="2026-04-07T09:27:29.729" v="137" actId="14100"/>
+          <ac:picMkLst>
+            <pc:docMk/>
+            <pc:sldMk cId="3543692863" sldId="268"/>
+            <ac:picMk id="5" creationId="{4047D2BB-4002-B725-AB0A-9638AAB70935}"/>
+          </ac:picMkLst>
+        </pc:picChg>
+      </pc:sldChg>
+      <pc:sldChg chg="addSp delSp modSp new">
+        <pc:chgData name="Utilisateur invité" userId="" providerId="Windows Live" clId="Web-{B2627871-A4ED-C176-B78F-5A532305EA41}" dt="2026-04-07T09:09:43.303" v="43" actId="20577"/>
+        <pc:sldMkLst>
+          <pc:docMk/>
+          <pc:sldMk cId="1876291841" sldId="270"/>
+        </pc:sldMkLst>
+        <pc:spChg chg="mod">
+          <ac:chgData name="Utilisateur invité" userId="" providerId="Windows Live" clId="Web-{B2627871-A4ED-C176-B78F-5A532305EA41}" dt="2026-04-07T09:05:06.239" v="30" actId="20577"/>
+          <ac:spMkLst>
+            <pc:docMk/>
+            <pc:sldMk cId="1876291841" sldId="270"/>
+            <ac:spMk id="2" creationId="{63F874BF-273A-4A36-CFA6-33ABE4B75CFD}"/>
+          </ac:spMkLst>
+        </pc:spChg>
+        <pc:spChg chg="del">
+          <ac:chgData name="Utilisateur invité" userId="" providerId="Windows Live" clId="Web-{B2627871-A4ED-C176-B78F-5A532305EA41}" dt="2026-04-07T09:08:12.646" v="31"/>
+          <ac:spMkLst>
+            <pc:docMk/>
+            <pc:sldMk cId="1876291841" sldId="270"/>
+            <ac:spMk id="4" creationId="{87C29C6E-AA69-CE2C-D1A9-B50F681B7BF3}"/>
+          </ac:spMkLst>
+        </pc:spChg>
+        <pc:spChg chg="add mod">
+          <ac:chgData name="Utilisateur invité" userId="" providerId="Windows Live" clId="Web-{B2627871-A4ED-C176-B78F-5A532305EA41}" dt="2026-04-07T09:09:43.303" v="43" actId="20577"/>
+          <ac:spMkLst>
+            <pc:docMk/>
+            <pc:sldMk cId="1876291841" sldId="270"/>
+            <ac:spMk id="7" creationId="{4BEBD420-9D40-29EB-BD25-37EAC916600A}"/>
+          </ac:spMkLst>
+        </pc:spChg>
+        <pc:picChg chg="add mod ord">
+          <ac:chgData name="Utilisateur invité" userId="" providerId="Windows Live" clId="Web-{B2627871-A4ED-C176-B78F-5A532305EA41}" dt="2026-04-07T09:08:19.724" v="32" actId="1076"/>
+          <ac:picMkLst>
+            <pc:docMk/>
+            <pc:sldMk cId="1876291841" sldId="270"/>
+            <ac:picMk id="5" creationId="{F3FEC0B7-FEB8-929E-804D-7B834F474816}"/>
+          </ac:picMkLst>
+        </pc:picChg>
+        <pc:picChg chg="add mod modCrop">
+          <ac:chgData name="Utilisateur invité" userId="" providerId="Windows Live" clId="Web-{B2627871-A4ED-C176-B78F-5A532305EA41}" dt="2026-04-07T09:09:14.428" v="37" actId="1076"/>
+          <ac:picMkLst>
+            <pc:docMk/>
+            <pc:sldMk cId="1876291841" sldId="270"/>
+            <ac:picMk id="6" creationId="{B7F5B3CD-479F-A2C0-A008-7931B6181FF5}"/>
+          </ac:picMkLst>
+        </pc:picChg>
+      </pc:sldChg>
+      <pc:sldChg chg="addSp delSp modSp new">
+        <pc:chgData name="Utilisateur invité" userId="" providerId="Windows Live" clId="Web-{B2627871-A4ED-C176-B78F-5A532305EA41}" dt="2026-04-07T09:12:20.381" v="58"/>
+        <pc:sldMkLst>
+          <pc:docMk/>
+          <pc:sldMk cId="3105874620" sldId="271"/>
+        </pc:sldMkLst>
+        <pc:spChg chg="mod">
+          <ac:chgData name="Utilisateur invité" userId="" providerId="Windows Live" clId="Web-{B2627871-A4ED-C176-B78F-5A532305EA41}" dt="2026-04-07T09:12:13.866" v="57" actId="20577"/>
+          <ac:spMkLst>
+            <pc:docMk/>
+            <pc:sldMk cId="3105874620" sldId="271"/>
+            <ac:spMk id="2" creationId="{32F3C7B1-AFF6-428B-7AED-229463B314E0}"/>
+          </ac:spMkLst>
+        </pc:spChg>
+        <pc:spChg chg="del">
+          <ac:chgData name="Utilisateur invité" userId="" providerId="Windows Live" clId="Web-{B2627871-A4ED-C176-B78F-5A532305EA41}" dt="2026-04-07T09:12:20.381" v="58"/>
+          <ac:spMkLst>
+            <pc:docMk/>
+            <pc:sldMk cId="3105874620" sldId="271"/>
+            <ac:spMk id="4" creationId="{5AF1DB23-9751-4D91-7F4C-727699033A05}"/>
+          </ac:spMkLst>
+        </pc:spChg>
+        <pc:picChg chg="add mod ord">
+          <ac:chgData name="Utilisateur invité" userId="" providerId="Windows Live" clId="Web-{B2627871-A4ED-C176-B78F-5A532305EA41}" dt="2026-04-07T09:12:20.381" v="58"/>
+          <ac:picMkLst>
+            <pc:docMk/>
+            <pc:sldMk cId="3105874620" sldId="271"/>
+            <ac:picMk id="5" creationId="{419DDBE6-1030-BDC2-4518-573B4FB41FCB}"/>
+          </ac:picMkLst>
+        </pc:picChg>
+      </pc:sldChg>
+      <pc:sldChg chg="addSp delSp modSp new ord">
+        <pc:chgData name="Utilisateur invité" userId="" providerId="Windows Live" clId="Web-{B2627871-A4ED-C176-B78F-5A532305EA41}" dt="2026-04-07T09:23:31.843" v="130" actId="20577"/>
+        <pc:sldMkLst>
+          <pc:docMk/>
+          <pc:sldMk cId="2522936038" sldId="272"/>
+        </pc:sldMkLst>
+        <pc:spChg chg="mod">
+          <ac:chgData name="Utilisateur invité" userId="" providerId="Windows Live" clId="Web-{B2627871-A4ED-C176-B78F-5A532305EA41}" dt="2026-04-07T09:16:34.360" v="73" actId="20577"/>
+          <ac:spMkLst>
+            <pc:docMk/>
+            <pc:sldMk cId="2522936038" sldId="272"/>
+            <ac:spMk id="2" creationId="{76BD4846-8A4F-EA06-9D97-8BF7BCA44628}"/>
+          </ac:spMkLst>
+        </pc:spChg>
+        <pc:spChg chg="del">
+          <ac:chgData name="Utilisateur invité" userId="" providerId="Windows Live" clId="Web-{B2627871-A4ED-C176-B78F-5A532305EA41}" dt="2026-04-07T09:16:10.466" v="65"/>
+          <ac:spMkLst>
+            <pc:docMk/>
+            <pc:sldMk cId="2522936038" sldId="272"/>
+            <ac:spMk id="4" creationId="{41FB704B-5E3C-720D-FE5B-3647AB6D0E1E}"/>
+          </ac:spMkLst>
+        </pc:spChg>
+        <pc:spChg chg="add mod">
+          <ac:chgData name="Utilisateur invité" userId="" providerId="Windows Live" clId="Web-{B2627871-A4ED-C176-B78F-5A532305EA41}" dt="2026-04-07T09:23:31.843" v="130" actId="20577"/>
+          <ac:spMkLst>
+            <pc:docMk/>
+            <pc:sldMk cId="2522936038" sldId="272"/>
+            <ac:spMk id="6" creationId="{76AF7CE6-D64A-7AFA-A473-472F696E7482}"/>
+          </ac:spMkLst>
+        </pc:spChg>
+        <pc:picChg chg="add mod ord">
+          <ac:chgData name="Utilisateur invité" userId="" providerId="Windows Live" clId="Web-{B2627871-A4ED-C176-B78F-5A532305EA41}" dt="2026-04-07T09:22:59.265" v="127" actId="14100"/>
+          <ac:picMkLst>
+            <pc:docMk/>
+            <pc:sldMk cId="2522936038" sldId="272"/>
+            <ac:picMk id="5" creationId="{2C28933E-B9D1-9A73-2750-528E773C0242}"/>
+          </ac:picMkLst>
+        </pc:picChg>
+      </pc:sldChg>
+      <pc:sldChg chg="addSp delSp modSp new">
+        <pc:chgData name="Utilisateur invité" userId="" providerId="Windows Live" clId="Web-{B2627871-A4ED-C176-B78F-5A532305EA41}" dt="2026-04-07T09:22:37.890" v="125" actId="20577"/>
+        <pc:sldMkLst>
+          <pc:docMk/>
+          <pc:sldMk cId="1297010817" sldId="273"/>
+        </pc:sldMkLst>
+        <pc:spChg chg="mod">
+          <ac:chgData name="Utilisateur invité" userId="" providerId="Windows Live" clId="Web-{B2627871-A4ED-C176-B78F-5A532305EA41}" dt="2026-04-07T09:18:15.539" v="78" actId="20577"/>
+          <ac:spMkLst>
+            <pc:docMk/>
+            <pc:sldMk cId="1297010817" sldId="273"/>
+            <ac:spMk id="2" creationId="{C21CA040-88ED-BD3D-2682-A85A0BC5D025}"/>
+          </ac:spMkLst>
+        </pc:spChg>
+        <pc:spChg chg="del">
+          <ac:chgData name="Utilisateur invité" userId="" providerId="Windows Live" clId="Web-{B2627871-A4ED-C176-B78F-5A532305EA41}" dt="2026-04-07T09:17:56.288" v="74"/>
+          <ac:spMkLst>
+            <pc:docMk/>
+            <pc:sldMk cId="1297010817" sldId="273"/>
+            <ac:spMk id="4" creationId="{1DC6A98F-EAEE-8E6D-556E-DFE9164B2794}"/>
+          </ac:spMkLst>
+        </pc:spChg>
+        <pc:spChg chg="add mod">
+          <ac:chgData name="Utilisateur invité" userId="" providerId="Windows Live" clId="Web-{B2627871-A4ED-C176-B78F-5A532305EA41}" dt="2026-04-07T09:22:37.890" v="125" actId="20577"/>
+          <ac:spMkLst>
+            <pc:docMk/>
+            <pc:sldMk cId="1297010817" sldId="273"/>
+            <ac:spMk id="6" creationId="{01B9B5BD-620B-BF61-7C6E-D2CC74B17E3D}"/>
+          </ac:spMkLst>
+        </pc:spChg>
+        <pc:picChg chg="add mod ord">
+          <ac:chgData name="Utilisateur invité" userId="" providerId="Windows Live" clId="Web-{B2627871-A4ED-C176-B78F-5A532305EA41}" dt="2026-04-07T09:21:33.045" v="112" actId="14100"/>
+          <ac:picMkLst>
+            <pc:docMk/>
+            <pc:sldMk cId="1297010817" sldId="273"/>
+            <ac:picMk id="5" creationId="{CB212070-1593-2AD2-5F4B-A8B5B9E7D572}"/>
+          </ac:picMkLst>
+        </pc:picChg>
+      </pc:sldChg>
+      <pc:sldChg chg="addSp delSp modSp new">
+        <pc:chgData name="Utilisateur invité" userId="" providerId="Windows Live" clId="Web-{B2627871-A4ED-C176-B78F-5A532305EA41}" dt="2026-04-07T09:21:20.092" v="110" actId="14100"/>
+        <pc:sldMkLst>
+          <pc:docMk/>
+          <pc:sldMk cId="4081280683" sldId="274"/>
+        </pc:sldMkLst>
+        <pc:spChg chg="mod">
+          <ac:chgData name="Utilisateur invité" userId="" providerId="Windows Live" clId="Web-{B2627871-A4ED-C176-B78F-5A532305EA41}" dt="2026-04-07T09:18:30.774" v="83" actId="20577"/>
+          <ac:spMkLst>
+            <pc:docMk/>
+            <pc:sldMk cId="4081280683" sldId="274"/>
+            <ac:spMk id="2" creationId="{51FE138A-3225-5EB0-9DBE-0C35001FA5A0}"/>
+          </ac:spMkLst>
+        </pc:spChg>
+        <pc:spChg chg="del">
+          <ac:chgData name="Utilisateur invité" userId="" providerId="Windows Live" clId="Web-{B2627871-A4ED-C176-B78F-5A532305EA41}" dt="2026-04-07T09:19:08.651" v="84"/>
+          <ac:spMkLst>
+            <pc:docMk/>
+            <pc:sldMk cId="4081280683" sldId="274"/>
+            <ac:spMk id="4" creationId="{E8977517-E7AF-35C1-8B11-ADD73397338E}"/>
+          </ac:spMkLst>
+        </pc:spChg>
+        <pc:spChg chg="add del">
+          <ac:chgData name="Utilisateur invité" userId="" providerId="Windows Live" clId="Web-{B2627871-A4ED-C176-B78F-5A532305EA41}" dt="2026-04-07T09:20:12.184" v="94"/>
+          <ac:spMkLst>
+            <pc:docMk/>
+            <pc:sldMk cId="4081280683" sldId="274"/>
+            <ac:spMk id="6" creationId="{8646FF28-DDDF-2283-58CD-F61E03E3A6AF}"/>
+          </ac:spMkLst>
+        </pc:spChg>
+        <pc:spChg chg="add del">
+          <ac:chgData name="Utilisateur invité" userId="" providerId="Windows Live" clId="Web-{B2627871-A4ED-C176-B78F-5A532305EA41}" dt="2026-04-07T09:20:10.340" v="93"/>
+          <ac:spMkLst>
+            <pc:docMk/>
+            <pc:sldMk cId="4081280683" sldId="274"/>
+            <ac:spMk id="7" creationId="{29666E0A-89AD-8D00-7F65-5262F3A6173F}"/>
+          </ac:spMkLst>
+        </pc:spChg>
+        <pc:spChg chg="add del">
+          <ac:chgData name="Utilisateur invité" userId="" providerId="Windows Live" clId="Web-{B2627871-A4ED-C176-B78F-5A532305EA41}" dt="2026-04-07T09:20:24.981" v="96"/>
+          <ac:spMkLst>
+            <pc:docMk/>
+            <pc:sldMk cId="4081280683" sldId="274"/>
+            <ac:spMk id="8" creationId="{9DDDF27E-B80B-F122-9A75-AD3FD7C1DE3A}"/>
+          </ac:spMkLst>
+        </pc:spChg>
+        <pc:spChg chg="add mod">
+          <ac:chgData name="Utilisateur invité" userId="" providerId="Windows Live" clId="Web-{B2627871-A4ED-C176-B78F-5A532305EA41}" dt="2026-04-07T09:21:20.092" v="110" actId="14100"/>
+          <ac:spMkLst>
+            <pc:docMk/>
+            <pc:sldMk cId="4081280683" sldId="274"/>
+            <ac:spMk id="9" creationId="{4CE1EF8D-3B09-8E77-9664-BCCB3A48D1ED}"/>
+          </ac:spMkLst>
+        </pc:spChg>
+        <pc:picChg chg="add mod ord">
+          <ac:chgData name="Utilisateur invité" userId="" providerId="Windows Live" clId="Web-{B2627871-A4ED-C176-B78F-5A532305EA41}" dt="2026-04-07T09:19:19.073" v="86" actId="14100"/>
+          <ac:picMkLst>
+            <pc:docMk/>
+            <pc:sldMk cId="4081280683" sldId="274"/>
+            <ac:picMk id="5" creationId="{C18339FB-3AE7-AFFD-6A22-D74408153595}"/>
+          </ac:picMkLst>
+        </pc:picChg>
+      </pc:sldChg>
+      <pc:sldChg chg="new ord">
+        <pc:chgData name="Utilisateur invité" userId="" providerId="Windows Live" clId="Web-{B2627871-A4ED-C176-B78F-5A532305EA41}" dt="2026-04-07T09:00:06.625" v="12"/>
+        <pc:sldMkLst>
+          <pc:docMk/>
+          <pc:sldMk cId="3486643960" sldId="275"/>
+        </pc:sldMkLst>
+      </pc:sldChg>
+      <pc:sldChg chg="new del">
+        <pc:chgData name="Utilisateur invité" userId="" providerId="Windows Live" clId="Web-{B2627871-A4ED-C176-B78F-5A532305EA41}" dt="2026-04-07T09:16:03.825" v="64"/>
+        <pc:sldMkLst>
+          <pc:docMk/>
+          <pc:sldMk cId="1504491500" sldId="276"/>
+        </pc:sldMkLst>
+      </pc:sldChg>
+      <pc:sldChg chg="addSp delSp modSp new">
+        <pc:chgData name="Utilisateur invité" userId="" providerId="Windows Live" clId="Web-{B2627871-A4ED-C176-B78F-5A532305EA41}" dt="2026-04-07T09:31:58.126" v="158" actId="1076"/>
+        <pc:sldMkLst>
+          <pc:docMk/>
+          <pc:sldMk cId="893234378" sldId="277"/>
+        </pc:sldMkLst>
+        <pc:spChg chg="mod">
+          <ac:chgData name="Utilisateur invité" userId="" providerId="Windows Live" clId="Web-{B2627871-A4ED-C176-B78F-5A532305EA41}" dt="2026-04-07T09:31:52.501" v="157" actId="20577"/>
+          <ac:spMkLst>
+            <pc:docMk/>
+            <pc:sldMk cId="893234378" sldId="277"/>
+            <ac:spMk id="2" creationId="{DE1B5873-DB13-5538-88E4-5D7B2C56774E}"/>
+          </ac:spMkLst>
+        </pc:spChg>
+        <pc:spChg chg="del">
+          <ac:chgData name="Utilisateur invité" userId="" providerId="Windows Live" clId="Web-{B2627871-A4ED-C176-B78F-5A532305EA41}" dt="2026-04-07T09:14:12.960" v="61"/>
+          <ac:spMkLst>
+            <pc:docMk/>
+            <pc:sldMk cId="893234378" sldId="277"/>
+            <ac:spMk id="4" creationId="{7E9C2CE6-D2D9-3C71-972A-DC05FA45F9C9}"/>
+          </ac:spMkLst>
+        </pc:spChg>
+        <pc:picChg chg="add mod ord">
+          <ac:chgData name="Utilisateur invité" userId="" providerId="Windows Live" clId="Web-{B2627871-A4ED-C176-B78F-5A532305EA41}" dt="2026-04-07T09:31:58.126" v="158" actId="1076"/>
+          <ac:picMkLst>
+            <pc:docMk/>
+            <pc:sldMk cId="893234378" sldId="277"/>
+            <ac:picMk id="5" creationId="{0D85A996-4B34-EF2C-61A2-9136E79503E3}"/>
+          </ac:picMkLst>
+        </pc:picChg>
+      </pc:sldChg>
+      <pc:sldChg chg="addSp modSp new del">
+        <pc:chgData name="Utilisateur invité" userId="" providerId="Windows Live" clId="Web-{B2627871-A4ED-C176-B78F-5A532305EA41}" dt="2026-04-07T09:38:26.913" v="178"/>
+        <pc:sldMkLst>
+          <pc:docMk/>
+          <pc:sldMk cId="2109054053" sldId="278"/>
+        </pc:sldMkLst>
+        <pc:picChg chg="add mod">
+          <ac:chgData name="Utilisateur invité" userId="" providerId="Windows Live" clId="Web-{B2627871-A4ED-C176-B78F-5A532305EA41}" dt="2026-04-07T09:36:40.599" v="165" actId="14100"/>
+          <ac:picMkLst>
+            <pc:docMk/>
+            <pc:sldMk cId="2109054053" sldId="278"/>
+            <ac:picMk id="5" creationId="{27CDFABE-3362-6DAC-5551-2EF25457390A}"/>
+          </ac:picMkLst>
+        </pc:picChg>
       </pc:sldChg>
     </pc:docChg>
   </pc:docChgLst>
@@ -1401,7 +1870,7 @@
           <a:p>
             <a:fld id="{1CA5457B-CDAE-4DEB-AEC8-C82DE2312E37}" type="datetimeFigureOut">
               <a:rPr lang="en-US" smtClean="0"/>
-              <a:t>4/6/2026</a:t>
+              <a:t>4/7/26</a:t>
             </a:fld>
             <a:endParaRPr lang="en-US"/>
           </a:p>
@@ -1578,7 +2047,7 @@
           <a:p>
             <a:fld id="{090B78EA-28CE-41D8-9043-90E391E5F567}" type="datetimeFigureOut">
               <a:rPr lang="en-US" noProof="0" smtClean="0"/>
-              <a:t>4/6/2026</a:t>
+              <a:t>4/7/26</a:t>
             </a:fld>
             <a:endParaRPr lang="en-US" noProof="0"/>
           </a:p>
@@ -26630,7 +27099,7 @@
         </p:nvSpPr>
         <p:spPr>
           <a:xfrm>
-            <a:off x="2058194" y="5016817"/>
+            <a:off x="4157036" y="5711975"/>
             <a:ext cx="6803136" cy="365760"/>
           </a:xfrm>
         </p:spPr>
@@ -26645,7 +27114,7 @@
               <a:rPr lang="en-US" sz="9600">
                 <a:cs typeface="Arial"/>
               </a:rPr>
-              <a:t>Supervise By: </a:t>
+              <a:t>Supervised By: </a:t>
             </a:r>
             <a:r>
               <a:rPr lang="en-US" sz="9600" b="1">
@@ -26654,7 +27123,25 @@
                 </a:solidFill>
                 <a:cs typeface="Arial"/>
               </a:rPr>
-              <a:t> Dr Nkemeni Valery</a:t>
+              <a:t> Dr </a:t>
+            </a:r>
+            <a:r>
+              <a:rPr lang="en-US" sz="9600" b="1" err="1">
+                <a:solidFill>
+                  <a:srgbClr val="000000"/>
+                </a:solidFill>
+                <a:cs typeface="Arial"/>
+              </a:rPr>
+              <a:t>Nkemeni</a:t>
+            </a:r>
+            <a:r>
+              <a:rPr lang="en-US" sz="9600" b="1">
+                <a:solidFill>
+                  <a:srgbClr val="000000"/>
+                </a:solidFill>
+                <a:cs typeface="Arial"/>
+              </a:rPr>
+              <a:t> Valery</a:t>
             </a:r>
             <a:endParaRPr lang="en-US" sz="1200" b="1">
               <a:solidFill>
@@ -26718,29 +27205,103 @@
         </p:nvSpPr>
         <p:spPr>
           <a:xfrm>
-            <a:off x="832104" y="1231107"/>
-            <a:ext cx="10269950" cy="3514148"/>
+            <a:off x="324104" y="3690896"/>
+            <a:ext cx="10269950" cy="1321726"/>
           </a:xfrm>
         </p:spPr>
         <p:txBody>
           <a:bodyPr>
-            <a:normAutofit/>
+            <a:normAutofit fontScale="90000"/>
           </a:bodyPr>
           <a:lstStyle/>
           <a:p>
             <a:pPr algn="ctr"/>
             <a:r>
-              <a:rPr lang="en-US" b="0">
-                <a:ea typeface="+mj-lt"/>
-                <a:cs typeface="+mj-lt"/>
+              <a:rPr lang="en-US"/>
+              <a:t>MOBILE APP DEVELOPMENT PROCESS</a:t>
+            </a:r>
+          </a:p>
+        </p:txBody>
+      </p:sp>
+      <p:pic>
+        <p:nvPicPr>
+          <p:cNvPr id="5" name="Image 4" descr="Une image contenant personne, gadget, Appareil de communications portable, Appareil de communication&#10;&#10;Le contenu généré par l’IA peut être incorrect.">
+            <a:extLst>
+              <a:ext uri="{FF2B5EF4-FFF2-40B4-BE49-F238E27FC236}">
+                <a16:creationId xmlns:a16="http://schemas.microsoft.com/office/drawing/2014/main" id="{0E0C91B6-D246-0F54-5DC3-1176C46DC59D}"/>
+              </a:ext>
+            </a:extLst>
+          </p:cNvPr>
+          <p:cNvPicPr>
+            <a:picLocks noChangeAspect="1"/>
+          </p:cNvPicPr>
+          <p:nvPr/>
+        </p:nvPicPr>
+        <p:blipFill>
+          <a:blip r:embed="rId2"/>
+          <a:stretch>
+            <a:fillRect/>
+          </a:stretch>
+        </p:blipFill>
+        <p:spPr>
+          <a:xfrm>
+            <a:off x="3048000" y="183169"/>
+            <a:ext cx="8582526" cy="3069346"/>
+          </a:xfrm>
+          <a:prstGeom prst="rect">
+            <a:avLst/>
+          </a:prstGeom>
+        </p:spPr>
+      </p:pic>
+      <p:sp>
+        <p:nvSpPr>
+          <p:cNvPr id="7" name="ZoneTexte 6">
+            <a:extLst>
+              <a:ext uri="{FF2B5EF4-FFF2-40B4-BE49-F238E27FC236}">
+                <a16:creationId xmlns:a16="http://schemas.microsoft.com/office/drawing/2014/main" id="{AA70DF1F-4675-6104-6DEE-9812D06E0321}"/>
+              </a:ext>
+            </a:extLst>
+          </p:cNvPr>
+          <p:cNvSpPr txBox="1"/>
+          <p:nvPr/>
+        </p:nvSpPr>
+        <p:spPr>
+          <a:xfrm>
+            <a:off x="529935" y="5140541"/>
+            <a:ext cx="3217264" cy="954107"/>
+          </a:xfrm>
+          <a:prstGeom prst="rect">
+            <a:avLst/>
+          </a:prstGeom>
+          <a:noFill/>
+        </p:spPr>
+        <p:txBody>
+          <a:bodyPr rot="0" spcFirstLastPara="0" vertOverflow="overflow" horzOverflow="overflow" vert="horz" wrap="square" lIns="91440" tIns="45720" rIns="91440" bIns="45720" numCol="1" spcCol="0" rtlCol="0" fromWordArt="0" anchor="t" anchorCtr="0" forceAA="0" compatLnSpc="1">
+            <a:prstTxWarp prst="textNoShape">
+              <a:avLst/>
+            </a:prstTxWarp>
+            <a:spAutoFit/>
+          </a:bodyPr>
+          <a:lstStyle/>
+          <a:p>
+            <a:r>
+              <a:rPr lang="fr-FR">
+                <a:solidFill>
+                  <a:schemeClr val="bg1"/>
+                </a:solidFill>
+                <a:cs typeface="Arial"/>
               </a:rPr>
-              <a:t>Presented by: GROUP 11</a:t>
+              <a:t>PRESENTED BY:</a:t>
             </a:r>
-            <a:endParaRPr lang="en-US"/>
-          </a:p>
-          <a:p>
-            <a:pPr algn="ctr"/>
-            <a:endParaRPr lang="en-US"/>
+            <a:r>
+              <a:rPr lang="fr-FR" sz="2800">
+                <a:solidFill>
+                  <a:schemeClr val="bg1"/>
+                </a:solidFill>
+                <a:cs typeface="Arial"/>
+              </a:rPr>
+              <a:t> GROUP 11</a:t>
+            </a:r>
           </a:p>
         </p:txBody>
       </p:sp>
@@ -26776,10 +27337,10 @@
       </p:grpSpPr>
       <p:sp>
         <p:nvSpPr>
-          <p:cNvPr id="2" name="Title 1">
+          <p:cNvPr id="7" name="Title 6">
             <a:extLst>
               <a:ext uri="{FF2B5EF4-FFF2-40B4-BE49-F238E27FC236}">
-                <a16:creationId xmlns:a16="http://schemas.microsoft.com/office/drawing/2014/main" id="{B170ADED-37EE-C4FF-50A1-B14374238D37}"/>
+                <a16:creationId xmlns:a16="http://schemas.microsoft.com/office/drawing/2014/main" id="{7875C19A-1AAE-476A-A316-A2CF92D763D3}"/>
               </a:ext>
             </a:extLst>
           </p:cNvPr>
@@ -26790,36 +27351,49 @@
             <p:ph type="title"/>
           </p:nvPr>
         </p:nvSpPr>
-        <p:spPr>
-          <a:xfrm>
-            <a:off x="444500" y="542925"/>
-            <a:ext cx="11214100" cy="978729"/>
-          </a:xfrm>
-        </p:spPr>
+        <p:spPr/>
         <p:txBody>
           <a:bodyPr/>
           <a:lstStyle/>
           <a:p>
             <a:r>
-              <a:rPr lang="en-US" b="0">
-                <a:ea typeface="+mj-lt"/>
-                <a:cs typeface="+mj-lt"/>
+              <a:rPr lang="fr-FR">
+                <a:solidFill>
+                  <a:srgbClr val="63B7C6"/>
+                </a:solidFill>
               </a:rPr>
-              <a:t>Cost Estimation in Cameroon (XAF)</a:t>
+              <a:t>Key </a:t>
             </a:r>
-            <a:endParaRPr lang="en-US"/>
-          </a:p>
-          <a:p>
-            <a:endParaRPr lang="en-US"/>
+            <a:r>
+              <a:rPr lang="fr-FR" err="1">
+                <a:solidFill>
+                  <a:srgbClr val="63B7C6"/>
+                </a:solidFill>
+              </a:rPr>
+              <a:t>Comparison</a:t>
+            </a:r>
+            <a:r>
+              <a:rPr lang="fr-FR">
+                <a:solidFill>
+                  <a:srgbClr val="63B7C6"/>
+                </a:solidFill>
+              </a:rPr>
+              <a:t> of App Types</a:t>
+            </a:r>
+            <a:endParaRPr lang="en-US">
+              <a:solidFill>
+                <a:srgbClr val="63B7C6"/>
+              </a:solidFill>
+            </a:endParaRPr>
           </a:p>
         </p:txBody>
       </p:sp>
       <p:sp>
         <p:nvSpPr>
-          <p:cNvPr id="3" name="Slide Number Placeholder 2">
+          <p:cNvPr id="2" name="Slide Number Placeholder 1">
             <a:extLst>
               <a:ext uri="{FF2B5EF4-FFF2-40B4-BE49-F238E27FC236}">
-                <a16:creationId xmlns:a16="http://schemas.microsoft.com/office/drawing/2014/main" id="{038BCB6D-44FF-55EA-C91D-7C29D69E8474}"/>
+                <a16:creationId xmlns:a16="http://schemas.microsoft.com/office/drawing/2014/main" id="{BE9800F6-D571-48C4-8466-12AA1ADB6599}"/>
               </a:ext>
             </a:extLst>
           </p:cNvPr>
@@ -26836,20 +27410,20 @@
           <a:lstStyle/>
           <a:p>
             <a:fld id="{C263D6C4-4840-40CC-AC84-17E24B3B7BDE}" type="slidenum">
-              <a:rPr lang="en-US" noProof="0" smtClean="0"/>
+              <a:rPr lang="en-US" smtClean="0"/>
               <a:pPr/>
               <a:t>10</a:t>
             </a:fld>
-            <a:endParaRPr lang="en-US" noProof="0"/>
+            <a:endParaRPr lang="en-US"/>
           </a:p>
         </p:txBody>
       </p:sp>
       <p:sp>
         <p:nvSpPr>
-          <p:cNvPr id="4" name="Content Placeholder 3">
+          <p:cNvPr id="10" name="Text Placeholder 9">
             <a:extLst>
               <a:ext uri="{FF2B5EF4-FFF2-40B4-BE49-F238E27FC236}">
-                <a16:creationId xmlns:a16="http://schemas.microsoft.com/office/drawing/2014/main" id="{B8FD5EE2-2259-4CB2-1BF6-A3228B2B47D9}"/>
+                <a16:creationId xmlns:a16="http://schemas.microsoft.com/office/drawing/2014/main" id="{EF2BC084-E6DB-4DE7-B309-042A85EBA700}"/>
               </a:ext>
             </a:extLst>
           </p:cNvPr>
@@ -26857,7 +27431,7 @@
             <a:spLocks noGrp="1"/>
           </p:cNvSpPr>
           <p:nvPr>
-            <p:ph idx="1"/>
+            <p:ph sz="half" idx="1"/>
           </p:nvPr>
         </p:nvSpPr>
         <p:spPr/>
@@ -26867,96 +27441,336 @@
           </a:bodyPr>
           <a:lstStyle/>
           <a:p>
+            <a:pPr marL="0" indent="0">
+              <a:buNone/>
+            </a:pPr>
             <a:r>
-              <a:rPr lang="en-US" sz="2000" b="1">
-                <a:ea typeface="+mn-lt"/>
-                <a:cs typeface="+mn-lt"/>
-              </a:rPr>
-              <a:t>Simple/MVP:</a:t>
+              <a:rPr lang="fr-FR" b="1" i="1"/>
+              <a:t>Native </a:t>
             </a:r>
             <a:r>
-              <a:rPr lang="en-US" sz="2000">
-                <a:ea typeface="+mn-lt"/>
-                <a:cs typeface="+mn-lt"/>
-              </a:rPr>
-              <a:t> 300,000 – 500,000 FCFA.</a:t>
+              <a:rPr lang="fr-FR" b="1" i="1" err="1"/>
+              <a:t>apps</a:t>
             </a:r>
-            <a:endParaRPr lang="en-US" sz="2000">
+            <a:r>
+              <a:rPr lang="fr-FR"/>
+              <a:t> </a:t>
+            </a:r>
+            <a:r>
+              <a:rPr lang="fr-FR" err="1"/>
+              <a:t>offer</a:t>
+            </a:r>
+            <a:r>
+              <a:rPr lang="fr-FR"/>
+              <a:t> the best performance and full </a:t>
+            </a:r>
+            <a:r>
+              <a:rPr lang="fr-FR" err="1"/>
+              <a:t>device</a:t>
+            </a:r>
+            <a:r>
+              <a:rPr lang="fr-FR"/>
+              <a:t> </a:t>
+            </a:r>
+            <a:r>
+              <a:rPr lang="fr-FR" err="1"/>
+              <a:t>access</a:t>
+            </a:r>
+            <a:r>
+              <a:rPr lang="fr-FR"/>
+              <a:t>.</a:t>
+            </a:r>
+            <a:endParaRPr lang="en-US"/>
+          </a:p>
+          <a:p>
+            <a:pPr marL="0" indent="0">
+              <a:buNone/>
+            </a:pPr>
+            <a:r>
+              <a:rPr lang="fr-FR"/>
+              <a:t>
+</a:t>
+            </a:r>
+            <a:r>
+              <a:rPr lang="fr-FR" b="1" i="1"/>
+              <a:t>Web </a:t>
+            </a:r>
+            <a:r>
+              <a:rPr lang="fr-FR" b="1" i="1" err="1"/>
+              <a:t>apps</a:t>
+            </a:r>
+            <a:r>
+              <a:rPr lang="fr-FR"/>
+              <a:t> are </a:t>
+            </a:r>
+            <a:r>
+              <a:rPr lang="fr-FR" err="1"/>
+              <a:t>cheaper</a:t>
+            </a:r>
+            <a:r>
+              <a:rPr lang="fr-FR"/>
+              <a:t> and </a:t>
+            </a:r>
+            <a:r>
+              <a:rPr lang="fr-FR" err="1"/>
+              <a:t>easier</a:t>
+            </a:r>
+            <a:r>
+              <a:rPr lang="fr-FR"/>
+              <a:t> to </a:t>
+            </a:r>
+            <a:r>
+              <a:rPr lang="fr-FR" err="1"/>
+              <a:t>maintain</a:t>
+            </a:r>
+            <a:r>
+              <a:rPr lang="fr-FR"/>
+              <a:t>.</a:t>
+            </a:r>
+            <a:endParaRPr lang="en-US"/>
+          </a:p>
+          <a:p>
+            <a:pPr marL="0" indent="0">
+              <a:buNone/>
+            </a:pPr>
+            <a:r>
+              <a:rPr lang="fr-FR"/>
+              <a:t>
+</a:t>
+            </a:r>
+            <a:r>
+              <a:rPr lang="fr-FR" b="1" i="1" err="1"/>
+              <a:t>Hybrid</a:t>
+            </a:r>
+            <a:r>
+              <a:rPr lang="fr-FR" b="1" i="1"/>
+              <a:t> </a:t>
+            </a:r>
+            <a:r>
+              <a:rPr lang="fr-FR" b="1" i="1" err="1"/>
+              <a:t>apps</a:t>
+            </a:r>
+            <a:r>
+              <a:rPr lang="fr-FR"/>
+              <a:t> </a:t>
+            </a:r>
+            <a:r>
+              <a:rPr lang="fr-FR" err="1"/>
+              <a:t>reduce</a:t>
+            </a:r>
+            <a:r>
+              <a:rPr lang="fr-FR"/>
+              <a:t> </a:t>
+            </a:r>
+            <a:r>
+              <a:rPr lang="fr-FR" err="1"/>
+              <a:t>development</a:t>
+            </a:r>
+            <a:r>
+              <a:rPr lang="fr-FR"/>
+              <a:t> </a:t>
+            </a:r>
+            <a:r>
+              <a:rPr lang="fr-FR" err="1"/>
+              <a:t>cost.</a:t>
+            </a:r>
+            <a:r>
+              <a:rPr lang="fr-FR"/>
+              <a:t>
+</a:t>
+            </a:r>
+            <a:r>
+              <a:rPr lang="fr-FR" b="1" i="1"/>
+              <a:t>Cross-</a:t>
+            </a:r>
+            <a:r>
+              <a:rPr lang="fr-FR" b="1" i="1" err="1"/>
+              <a:t>platform</a:t>
+            </a:r>
+            <a:r>
+              <a:rPr lang="fr-FR" b="1" i="1"/>
+              <a:t> </a:t>
+            </a:r>
+            <a:r>
+              <a:rPr lang="fr-FR" b="1" i="1" err="1"/>
+              <a:t>apps</a:t>
+            </a:r>
+            <a:r>
+              <a:rPr lang="fr-FR"/>
+              <a:t> balance </a:t>
+            </a:r>
+            <a:r>
+              <a:rPr lang="fr-FR" err="1"/>
+              <a:t>cost</a:t>
+            </a:r>
+            <a:r>
+              <a:rPr lang="fr-FR"/>
+              <a:t> and performance.</a:t>
+            </a:r>
+            <a:endParaRPr lang="en-US"/>
+          </a:p>
+          <a:p>
+            <a:pPr marL="0" indent="0">
+              <a:buNone/>
+            </a:pPr>
+            <a:r>
+              <a:rPr lang="fr-FR"/>
+              <a:t>
+</a:t>
+            </a:r>
+            <a:r>
+              <a:rPr lang="fr-FR" b="1" i="1"/>
+              <a:t>PWA </a:t>
+            </a:r>
+            <a:r>
+              <a:rPr lang="fr-FR" err="1"/>
+              <a:t>provides</a:t>
+            </a:r>
+            <a:r>
+              <a:rPr lang="fr-FR"/>
+              <a:t> </a:t>
+            </a:r>
+            <a:r>
+              <a:rPr lang="fr-FR" err="1"/>
+              <a:t>lightweight</a:t>
+            </a:r>
+            <a:r>
+              <a:rPr lang="fr-FR"/>
+              <a:t> </a:t>
+            </a:r>
+            <a:r>
+              <a:rPr lang="fr-FR" err="1"/>
+              <a:t>app-like</a:t>
+            </a:r>
+            <a:r>
+              <a:rPr lang="fr-FR"/>
+              <a:t> </a:t>
+            </a:r>
+            <a:r>
+              <a:rPr lang="fr-FR" err="1"/>
+              <a:t>experiences</a:t>
+            </a:r>
+            <a:r>
+              <a:rPr lang="fr-FR"/>
+              <a:t>.</a:t>
+            </a:r>
+            <a:endParaRPr lang="en-US">
               <a:cs typeface="Arial"/>
             </a:endParaRPr>
           </a:p>
-          <a:p>
-            <a:endParaRPr lang="en-US" sz="2000">
-              <a:ea typeface="+mn-lt"/>
-              <a:cs typeface="+mn-lt"/>
-            </a:endParaRPr>
-          </a:p>
-          <a:p>
+        </p:txBody>
+      </p:sp>
+      <p:sp>
+        <p:nvSpPr>
+          <p:cNvPr id="3" name="Espace réservé du contenu 2">
+            <a:extLst>
+              <a:ext uri="{FF2B5EF4-FFF2-40B4-BE49-F238E27FC236}">
+                <a16:creationId xmlns:a16="http://schemas.microsoft.com/office/drawing/2014/main" id="{2AC141D2-FEB6-6157-0178-F71C02FA665D}"/>
+              </a:ext>
+            </a:extLst>
+          </p:cNvPr>
+          <p:cNvSpPr>
+            <a:spLocks noGrp="1"/>
+          </p:cNvSpPr>
+          <p:nvPr>
+            <p:ph sz="half" idx="2"/>
+          </p:nvPr>
+        </p:nvSpPr>
+        <p:spPr>
+          <a:xfrm>
+            <a:off x="6474163" y="1517715"/>
+            <a:ext cx="5184437" cy="3042630"/>
+          </a:xfrm>
+        </p:spPr>
+        <p:txBody>
+          <a:bodyPr vert="horz" lIns="91440" tIns="45720" rIns="91440" bIns="45720" rtlCol="0" anchor="t">
+            <a:normAutofit fontScale="92500" lnSpcReduction="20000"/>
+          </a:bodyPr>
+          <a:lstStyle/>
+          <a:p>
+            <a:pPr marL="0" indent="0">
+              <a:buNone/>
+            </a:pPr>
             <a:r>
-              <a:rPr lang="en-US" sz="2000" b="1">
-                <a:ea typeface="+mn-lt"/>
-                <a:cs typeface="+mn-lt"/>
-              </a:rPr>
-              <a:t>Medium (with Momo/OM):</a:t>
+              <a:rPr lang="fr-FR"/>
+              <a:t>The </a:t>
             </a:r>
             <a:r>
-              <a:rPr lang="en-US" sz="2000">
-                <a:ea typeface="+mn-lt"/>
-                <a:cs typeface="+mn-lt"/>
-              </a:rPr>
-              <a:t> 500,000 – 1,000,000 FCFA.</a:t>
+              <a:rPr lang="fr-FR" err="1"/>
+              <a:t>choice</a:t>
             </a:r>
-            <a:endParaRPr lang="en-US" sz="2000">
+            <a:r>
+              <a:rPr lang="fr-FR"/>
+              <a:t> </a:t>
+            </a:r>
+            <a:r>
+              <a:rPr lang="fr-FR" err="1"/>
+              <a:t>depends</a:t>
+            </a:r>
+            <a:r>
+              <a:rPr lang="fr-FR"/>
+              <a:t> on:</a:t>
+            </a:r>
+            <a:endParaRPr lang="en-US"/>
+          </a:p>
+          <a:p>
+            <a:pPr marL="0" indent="0">
+              <a:buNone/>
+            </a:pPr>
+            <a:r>
+              <a:rPr lang="fr-FR"/>
+              <a:t>
+-Budget</a:t>
+            </a:r>
+          </a:p>
+          <a:p>
+            <a:pPr marL="0" indent="0">
+              <a:buNone/>
+            </a:pPr>
+            <a:r>
+              <a:rPr lang="fr-FR"/>
+              <a:t>
+-Performance </a:t>
+            </a:r>
+            <a:r>
+              <a:rPr lang="fr-FR" err="1"/>
+              <a:t>needs</a:t>
+            </a:r>
+            <a:endParaRPr lang="fr-FR">
               <a:cs typeface="Arial"/>
             </a:endParaRPr>
           </a:p>
           <a:p>
-            <a:endParaRPr lang="en-US" sz="2000">
-              <a:ea typeface="+mn-lt"/>
-              <a:cs typeface="+mn-lt"/>
-            </a:endParaRPr>
-          </a:p>
-          <a:p>
+            <a:pPr marL="0" indent="0">
+              <a:buNone/>
+            </a:pPr>
             <a:r>
-              <a:rPr lang="en-US" sz="2000" b="1">
-                <a:ea typeface="+mn-lt"/>
-                <a:cs typeface="+mn-lt"/>
-              </a:rPr>
-              <a:t>Complex/Enterprise:</a:t>
+              <a:rPr lang="fr-FR"/>
+              <a:t>
+-Target </a:t>
             </a:r>
             <a:r>
-              <a:rPr lang="en-US" sz="2000">
-                <a:ea typeface="+mn-lt"/>
-                <a:cs typeface="+mn-lt"/>
-              </a:rPr>
-              <a:t> 1,000,000+ FCFA.</a:t>
+              <a:rPr lang="fr-FR" err="1"/>
+              <a:t>devices</a:t>
             </a:r>
-            <a:endParaRPr lang="en-US" sz="2000">
+            <a:endParaRPr lang="fr-FR">
               <a:cs typeface="Arial"/>
             </a:endParaRPr>
           </a:p>
           <a:p>
-            <a:endParaRPr lang="en-US" sz="2000">
-              <a:ea typeface="+mn-lt"/>
-              <a:cs typeface="+mn-lt"/>
-            </a:endParaRPr>
-          </a:p>
-          <a:p>
+            <a:pPr marL="0" indent="0">
+              <a:buNone/>
+            </a:pPr>
             <a:r>
-              <a:rPr lang="en-US" sz="2000" b="1">
-                <a:ea typeface="+mn-lt"/>
-                <a:cs typeface="+mn-lt"/>
-              </a:rPr>
-              <a:t>Key Factors:</a:t>
+              <a:rPr lang="fr-FR"/>
+              <a:t>
+-User </a:t>
             </a:r>
             <a:r>
-              <a:rPr lang="en-US" sz="2000">
-                <a:ea typeface="+mn-lt"/>
-                <a:cs typeface="+mn-lt"/>
-              </a:rPr>
-              <a:t> Number of screens, backend complexity, and third-party integrations.</a:t>
+              <a:rPr lang="fr-FR" err="1"/>
+              <a:t>experience</a:t>
             </a:r>
-            <a:endParaRPr lang="en-US" sz="2000">
+            <a:endParaRPr lang="fr-FR">
               <a:cs typeface="Arial"/>
             </a:endParaRPr>
           </a:p>
@@ -26965,13 +27779,25 @@
     </p:spTree>
     <p:extLst>
       <p:ext uri="{BB962C8B-B14F-4D97-AF65-F5344CB8AC3E}">
-        <p14:creationId xmlns:p14="http://schemas.microsoft.com/office/powerpoint/2010/main" val="1133137305"/>
+        <p14:creationId xmlns:p14="http://schemas.microsoft.com/office/powerpoint/2010/main" val="3733486012"/>
       </p:ext>
     </p:extLst>
   </p:cSld>
   <p:clrMapOvr>
     <a:masterClrMapping/>
   </p:clrMapOvr>
+  <mc:AlternateContent xmlns:mc="http://schemas.openxmlformats.org/markup-compatibility/2006" xmlns:p14="http://schemas.microsoft.com/office/powerpoint/2010/main">
+    <mc:Choice Requires="p14">
+      <p:transition spd="med" p14:dur="700">
+        <p:fade/>
+      </p:transition>
+    </mc:Choice>
+    <mc:Fallback xmlns="">
+      <p:transition spd="med">
+        <p:fade/>
+      </p:transition>
+    </mc:Fallback>
+  </mc:AlternateContent>
 </p:sld>
 </file>
 
@@ -26994,10 +27820,2042 @@
       </p:grpSpPr>
       <p:sp>
         <p:nvSpPr>
+          <p:cNvPr id="4" name="Title 3">
+            <a:extLst>
+              <a:ext uri="{FF2B5EF4-FFF2-40B4-BE49-F238E27FC236}">
+                <a16:creationId xmlns:a16="http://schemas.microsoft.com/office/drawing/2014/main" id="{315E3981-F0D7-482C-A8E0-6A57700BECA7}"/>
+              </a:ext>
+            </a:extLst>
+          </p:cNvPr>
+          <p:cNvSpPr>
+            <a:spLocks noGrp="1"/>
+          </p:cNvSpPr>
+          <p:nvPr>
+            <p:ph type="title"/>
+          </p:nvPr>
+        </p:nvSpPr>
+        <p:spPr>
+          <a:xfrm>
+            <a:off x="564816" y="770188"/>
+            <a:ext cx="11214100" cy="535531"/>
+          </a:xfrm>
+        </p:spPr>
+        <p:txBody>
+          <a:bodyPr/>
+          <a:lstStyle/>
+          <a:p>
+            <a:r>
+              <a:rPr lang="fr-FR" err="1">
+                <a:solidFill>
+                  <a:srgbClr val="63B7C6"/>
+                </a:solidFill>
+              </a:rPr>
+              <a:t>Programming</a:t>
+            </a:r>
+            <a:r>
+              <a:rPr lang="fr-FR">
+                <a:solidFill>
+                  <a:srgbClr val="63B7C6"/>
+                </a:solidFill>
+              </a:rPr>
+              <a:t> </a:t>
+            </a:r>
+            <a:r>
+              <a:rPr lang="fr-FR" err="1">
+                <a:solidFill>
+                  <a:srgbClr val="63B7C6"/>
+                </a:solidFill>
+              </a:rPr>
+              <a:t>Languages</a:t>
+            </a:r>
+            <a:r>
+              <a:rPr lang="fr-FR">
+                <a:solidFill>
+                  <a:srgbClr val="63B7C6"/>
+                </a:solidFill>
+              </a:rPr>
+              <a:t> And </a:t>
+            </a:r>
+            <a:r>
+              <a:rPr lang="fr-FR" err="1">
+                <a:solidFill>
+                  <a:srgbClr val="63B7C6"/>
+                </a:solidFill>
+              </a:rPr>
+              <a:t>Frameworks</a:t>
+            </a:r>
+            <a:endParaRPr lang="en-US" err="1">
+              <a:solidFill>
+                <a:srgbClr val="63B7C6"/>
+              </a:solidFill>
+            </a:endParaRPr>
+          </a:p>
+        </p:txBody>
+      </p:sp>
+      <p:sp>
+        <p:nvSpPr>
+          <p:cNvPr id="2" name="Slide Number Placeholder 1">
+            <a:extLst>
+              <a:ext uri="{FF2B5EF4-FFF2-40B4-BE49-F238E27FC236}">
+                <a16:creationId xmlns:a16="http://schemas.microsoft.com/office/drawing/2014/main" id="{520FC4EE-F318-4344-9E3C-B950ADB63865}"/>
+              </a:ext>
+            </a:extLst>
+          </p:cNvPr>
+          <p:cNvSpPr>
+            <a:spLocks noGrp="1"/>
+          </p:cNvSpPr>
+          <p:nvPr>
+            <p:ph type="sldNum" sz="quarter" idx="12"/>
+          </p:nvPr>
+        </p:nvSpPr>
+        <p:spPr>
+          <a:xfrm>
+            <a:off x="11252200" y="6315075"/>
+            <a:ext cx="406400" cy="174626"/>
+          </a:xfrm>
+        </p:spPr>
+        <p:txBody>
+          <a:bodyPr/>
+          <a:lstStyle/>
+          <a:p>
+            <a:fld id="{C263D6C4-4840-40CC-AC84-17E24B3B7BDE}" type="slidenum">
+              <a:rPr lang="en-US" smtClean="0"/>
+              <a:pPr/>
+              <a:t>11</a:t>
+            </a:fld>
+            <a:endParaRPr lang="en-US"/>
+          </a:p>
+        </p:txBody>
+      </p:sp>
+      <p:sp>
+        <p:nvSpPr>
+          <p:cNvPr id="7" name="Text Placeholder 6">
+            <a:extLst>
+              <a:ext uri="{FF2B5EF4-FFF2-40B4-BE49-F238E27FC236}">
+                <a16:creationId xmlns:a16="http://schemas.microsoft.com/office/drawing/2014/main" id="{B74126B4-1E6C-4FFF-9282-40E18A85A07F}"/>
+              </a:ext>
+            </a:extLst>
+          </p:cNvPr>
+          <p:cNvSpPr>
+            <a:spLocks noGrp="1"/>
+          </p:cNvSpPr>
+          <p:nvPr>
+            <p:ph idx="1"/>
+          </p:nvPr>
+        </p:nvSpPr>
+        <p:spPr>
+          <a:xfrm>
+            <a:off x="561294" y="3606572"/>
+            <a:ext cx="4803549" cy="2420713"/>
+          </a:xfrm>
+        </p:spPr>
+        <p:txBody>
+          <a:bodyPr vert="horz" lIns="91440" tIns="45720" rIns="91440" bIns="45720" rtlCol="0" anchor="t">
+            <a:normAutofit lnSpcReduction="10000"/>
+          </a:bodyPr>
+          <a:lstStyle/>
+          <a:p>
+            <a:pPr marL="0" indent="0">
+              <a:buNone/>
+            </a:pPr>
+            <a:endParaRPr lang="fr-FR" sz="2000" b="1" i="1">
+              <a:solidFill>
+                <a:srgbClr val="63B7C6"/>
+              </a:solidFill>
+              <a:cs typeface="Arial"/>
+            </a:endParaRPr>
+          </a:p>
+          <a:p>
+            <a:pPr marL="0" indent="0">
+              <a:buNone/>
+            </a:pPr>
+            <a:endParaRPr lang="fr-FR" sz="2000" b="1" i="1">
+              <a:solidFill>
+                <a:srgbClr val="63B7C6"/>
+              </a:solidFill>
+              <a:cs typeface="Arial"/>
+            </a:endParaRPr>
+          </a:p>
+          <a:p>
+            <a:pPr marL="0" indent="0">
+              <a:buNone/>
+            </a:pPr>
+            <a:r>
+              <a:rPr lang="fr-FR" sz="2000" b="1" i="1">
+                <a:solidFill>
+                  <a:srgbClr val="63B7C6"/>
+                </a:solidFill>
+                <a:cs typeface="Arial"/>
+              </a:rPr>
+              <a:t>Android</a:t>
+            </a:r>
+            <a:r>
+              <a:rPr lang="fr-FR" sz="2000" b="1" i="1">
+                <a:solidFill>
+                  <a:srgbClr val="63B7C6"/>
+                </a:solidFill>
+              </a:rPr>
+              <a:t> </a:t>
+            </a:r>
+            <a:r>
+              <a:rPr lang="fr-FR" sz="2000" b="1" i="1" err="1">
+                <a:solidFill>
+                  <a:srgbClr val="63B7C6"/>
+                </a:solidFill>
+              </a:rPr>
+              <a:t>Languages</a:t>
+            </a:r>
+            <a:endParaRPr lang="en-US" sz="2000">
+              <a:solidFill>
+                <a:srgbClr val="63B7C6"/>
+              </a:solidFill>
+              <a:cs typeface="Arial"/>
+            </a:endParaRPr>
+          </a:p>
+          <a:p>
+            <a:pPr marL="0" indent="0">
+              <a:buNone/>
+            </a:pPr>
+            <a:br>
+              <a:rPr lang="en-US" sz="2000">
+                <a:solidFill>
+                  <a:srgbClr val="63B7C6"/>
+                </a:solidFill>
+              </a:rPr>
+            </a:br>
+            <a:r>
+              <a:rPr lang="fr-FR" sz="2000" b="1"/>
+              <a:t>Java</a:t>
+            </a:r>
+            <a:r>
+              <a:rPr lang="fr-FR" sz="2000"/>
+              <a:t> – </a:t>
+            </a:r>
+            <a:r>
+              <a:rPr lang="fr-FR" sz="2000" err="1"/>
+              <a:t>traditional</a:t>
+            </a:r>
+            <a:r>
+              <a:rPr lang="fr-FR" sz="2000"/>
+              <a:t> </a:t>
+            </a:r>
+            <a:r>
+              <a:rPr lang="fr-FR" sz="2000" err="1"/>
+              <a:t>language</a:t>
+            </a:r>
+            <a:endParaRPr lang="en-US" sz="2000" err="1">
+              <a:solidFill>
+                <a:srgbClr val="63B7C6"/>
+              </a:solidFill>
+              <a:cs typeface="Arial"/>
+            </a:endParaRPr>
+          </a:p>
+          <a:p>
+            <a:pPr marL="0" indent="0">
+              <a:buNone/>
+            </a:pPr>
+            <a:br>
+              <a:rPr lang="en-US" sz="2000">
+                <a:solidFill>
+                  <a:srgbClr val="63B7C6"/>
+                </a:solidFill>
+              </a:rPr>
+            </a:br>
+            <a:r>
+              <a:rPr lang="fr-FR" sz="2000" b="1" err="1"/>
+              <a:t>Kotlin</a:t>
+            </a:r>
+            <a:r>
+              <a:rPr lang="fr-FR" sz="2000"/>
+              <a:t> – official modern </a:t>
+            </a:r>
+            <a:r>
+              <a:rPr lang="fr-FR" sz="2000" err="1"/>
+              <a:t>language</a:t>
+            </a:r>
+            <a:endParaRPr lang="en-US" err="1"/>
+          </a:p>
+        </p:txBody>
+      </p:sp>
+      <p:sp>
+        <p:nvSpPr>
+          <p:cNvPr id="9" name="Text Placeholder 6">
+            <a:extLst>
+              <a:ext uri="{FF2B5EF4-FFF2-40B4-BE49-F238E27FC236}">
+                <a16:creationId xmlns:a16="http://schemas.microsoft.com/office/drawing/2014/main" id="{6194E170-7B56-ACC1-AA26-6E3BF46C45F0}"/>
+              </a:ext>
+            </a:extLst>
+          </p:cNvPr>
+          <p:cNvSpPr txBox="1">
+            <a:spLocks/>
+          </p:cNvSpPr>
+          <p:nvPr/>
+        </p:nvSpPr>
+        <p:spPr>
+          <a:xfrm>
+            <a:off x="559479" y="1713364"/>
+            <a:ext cx="4803549" cy="1894570"/>
+          </a:xfrm>
+          <a:prstGeom prst="rect">
+            <a:avLst/>
+          </a:prstGeom>
+        </p:spPr>
+        <p:txBody>
+          <a:bodyPr vert="horz" lIns="91440" tIns="45720" rIns="91440" bIns="45720" rtlCol="0" anchor="t">
+            <a:normAutofit fontScale="92500" lnSpcReduction="10000"/>
+          </a:bodyPr>
+          <a:lstStyle>
+            <a:lvl1pPr marL="228600" indent="-228600" algn="l" defTabSz="914400" rtl="0" eaLnBrk="1" latinLnBrk="0" hangingPunct="1">
+              <a:lnSpc>
+                <a:spcPct val="90000"/>
+              </a:lnSpc>
+              <a:spcBef>
+                <a:spcPts val="1000"/>
+              </a:spcBef>
+              <a:buClr>
+                <a:schemeClr val="accent2"/>
+              </a:buClr>
+              <a:buFont typeface="Arial" panose="020B0604020202020204" pitchFamily="34" charset="0"/>
+              <a:buChar char="•"/>
+              <a:defRPr sz="2800" kern="1200">
+                <a:solidFill>
+                  <a:schemeClr val="bg1"/>
+                </a:solidFill>
+                <a:latin typeface="+mn-lt"/>
+                <a:ea typeface="+mn-ea"/>
+                <a:cs typeface="+mn-cs"/>
+              </a:defRPr>
+            </a:lvl1pPr>
+            <a:lvl2pPr marL="685800" indent="-228600" algn="l" defTabSz="914400" rtl="0" eaLnBrk="1" latinLnBrk="0" hangingPunct="1">
+              <a:lnSpc>
+                <a:spcPct val="90000"/>
+              </a:lnSpc>
+              <a:spcBef>
+                <a:spcPts val="500"/>
+              </a:spcBef>
+              <a:buClr>
+                <a:schemeClr val="accent2"/>
+              </a:buClr>
+              <a:buFont typeface="Arial" panose="020B0604020202020204" pitchFamily="34" charset="0"/>
+              <a:buChar char="•"/>
+              <a:defRPr sz="2400" kern="1200">
+                <a:solidFill>
+                  <a:schemeClr val="bg1"/>
+                </a:solidFill>
+                <a:latin typeface="+mn-lt"/>
+                <a:ea typeface="+mn-ea"/>
+                <a:cs typeface="+mn-cs"/>
+              </a:defRPr>
+            </a:lvl2pPr>
+            <a:lvl3pPr marL="1143000" indent="-228600" algn="l" defTabSz="914400" rtl="0" eaLnBrk="1" latinLnBrk="0" hangingPunct="1">
+              <a:lnSpc>
+                <a:spcPct val="90000"/>
+              </a:lnSpc>
+              <a:spcBef>
+                <a:spcPts val="500"/>
+              </a:spcBef>
+              <a:buClr>
+                <a:schemeClr val="accent2"/>
+              </a:buClr>
+              <a:buFont typeface="Arial" panose="020B0604020202020204" pitchFamily="34" charset="0"/>
+              <a:buChar char="•"/>
+              <a:defRPr sz="2000" kern="1200">
+                <a:solidFill>
+                  <a:schemeClr val="bg1"/>
+                </a:solidFill>
+                <a:latin typeface="+mn-lt"/>
+                <a:ea typeface="+mn-ea"/>
+                <a:cs typeface="+mn-cs"/>
+              </a:defRPr>
+            </a:lvl3pPr>
+            <a:lvl4pPr marL="1600200" indent="-228600" algn="l" defTabSz="914400" rtl="0" eaLnBrk="1" latinLnBrk="0" hangingPunct="1">
+              <a:lnSpc>
+                <a:spcPct val="90000"/>
+              </a:lnSpc>
+              <a:spcBef>
+                <a:spcPts val="500"/>
+              </a:spcBef>
+              <a:buClr>
+                <a:schemeClr val="accent2"/>
+              </a:buClr>
+              <a:buFont typeface="Arial" panose="020B0604020202020204" pitchFamily="34" charset="0"/>
+              <a:buChar char="•"/>
+              <a:defRPr sz="1800" kern="1200">
+                <a:solidFill>
+                  <a:schemeClr val="bg1"/>
+                </a:solidFill>
+                <a:latin typeface="+mn-lt"/>
+                <a:ea typeface="+mn-ea"/>
+                <a:cs typeface="+mn-cs"/>
+              </a:defRPr>
+            </a:lvl4pPr>
+            <a:lvl5pPr marL="2057400" indent="-228600" algn="l" defTabSz="914400" rtl="0" eaLnBrk="1" latinLnBrk="0" hangingPunct="1">
+              <a:lnSpc>
+                <a:spcPct val="90000"/>
+              </a:lnSpc>
+              <a:spcBef>
+                <a:spcPts val="500"/>
+              </a:spcBef>
+              <a:buClr>
+                <a:schemeClr val="accent2"/>
+              </a:buClr>
+              <a:buFont typeface="Arial" panose="020B0604020202020204" pitchFamily="34" charset="0"/>
+              <a:buChar char="•"/>
+              <a:defRPr sz="1800" kern="1200">
+                <a:solidFill>
+                  <a:schemeClr val="bg1"/>
+                </a:solidFill>
+                <a:latin typeface="+mn-lt"/>
+                <a:ea typeface="+mn-ea"/>
+                <a:cs typeface="+mn-cs"/>
+              </a:defRPr>
+            </a:lvl5pPr>
+            <a:lvl6pPr marL="2514600" indent="-228600" algn="l" defTabSz="914400" rtl="0" eaLnBrk="1" latinLnBrk="0" hangingPunct="1">
+              <a:lnSpc>
+                <a:spcPct val="90000"/>
+              </a:lnSpc>
+              <a:spcBef>
+                <a:spcPts val="500"/>
+              </a:spcBef>
+              <a:buFont typeface="Arial" panose="020B0604020202020204" pitchFamily="34" charset="0"/>
+              <a:buChar char="•"/>
+              <a:defRPr sz="1800" kern="1200">
+                <a:solidFill>
+                  <a:schemeClr val="tx1"/>
+                </a:solidFill>
+                <a:latin typeface="+mn-lt"/>
+                <a:ea typeface="+mn-ea"/>
+                <a:cs typeface="+mn-cs"/>
+              </a:defRPr>
+            </a:lvl6pPr>
+            <a:lvl7pPr marL="2971800" indent="-228600" algn="l" defTabSz="914400" rtl="0" eaLnBrk="1" latinLnBrk="0" hangingPunct="1">
+              <a:lnSpc>
+                <a:spcPct val="90000"/>
+              </a:lnSpc>
+              <a:spcBef>
+                <a:spcPts val="500"/>
+              </a:spcBef>
+              <a:buFont typeface="Arial" panose="020B0604020202020204" pitchFamily="34" charset="0"/>
+              <a:buChar char="•"/>
+              <a:defRPr sz="1800" kern="1200">
+                <a:solidFill>
+                  <a:schemeClr val="tx1"/>
+                </a:solidFill>
+                <a:latin typeface="+mn-lt"/>
+                <a:ea typeface="+mn-ea"/>
+                <a:cs typeface="+mn-cs"/>
+              </a:defRPr>
+            </a:lvl7pPr>
+            <a:lvl8pPr marL="3429000" indent="-228600" algn="l" defTabSz="914400" rtl="0" eaLnBrk="1" latinLnBrk="0" hangingPunct="1">
+              <a:lnSpc>
+                <a:spcPct val="90000"/>
+              </a:lnSpc>
+              <a:spcBef>
+                <a:spcPts val="500"/>
+              </a:spcBef>
+              <a:buFont typeface="Arial" panose="020B0604020202020204" pitchFamily="34" charset="0"/>
+              <a:buChar char="•"/>
+              <a:defRPr sz="1800" kern="1200">
+                <a:solidFill>
+                  <a:schemeClr val="tx1"/>
+                </a:solidFill>
+                <a:latin typeface="+mn-lt"/>
+                <a:ea typeface="+mn-ea"/>
+                <a:cs typeface="+mn-cs"/>
+              </a:defRPr>
+            </a:lvl8pPr>
+            <a:lvl9pPr marL="3886200" indent="-228600" algn="l" defTabSz="914400" rtl="0" eaLnBrk="1" latinLnBrk="0" hangingPunct="1">
+              <a:lnSpc>
+                <a:spcPct val="90000"/>
+              </a:lnSpc>
+              <a:spcBef>
+                <a:spcPts val="500"/>
+              </a:spcBef>
+              <a:buFont typeface="Arial" panose="020B0604020202020204" pitchFamily="34" charset="0"/>
+              <a:buChar char="•"/>
+              <a:defRPr sz="1800" kern="1200">
+                <a:solidFill>
+                  <a:schemeClr val="tx1"/>
+                </a:solidFill>
+                <a:latin typeface="+mn-lt"/>
+                <a:ea typeface="+mn-ea"/>
+                <a:cs typeface="+mn-cs"/>
+              </a:defRPr>
+            </a:lvl9pPr>
+          </a:lstStyle>
+          <a:p>
+            <a:pPr marL="0" indent="0">
+              <a:buFont typeface="Arial" panose="020B0604020202020204" pitchFamily="34" charset="0"/>
+              <a:buNone/>
+            </a:pPr>
+            <a:r>
+              <a:rPr lang="fr-FR" sz="2000" b="1" i="1">
+                <a:solidFill>
+                  <a:srgbClr val="63B7C6"/>
+                </a:solidFill>
+              </a:rPr>
+              <a:t>iOS </a:t>
+            </a:r>
+            <a:r>
+              <a:rPr lang="fr-FR" sz="2000" b="1" i="1" err="1">
+                <a:solidFill>
+                  <a:srgbClr val="63B7C6"/>
+                </a:solidFill>
+              </a:rPr>
+              <a:t>Languages</a:t>
+            </a:r>
+            <a:endParaRPr lang="en-US" sz="2000">
+              <a:cs typeface="Arial"/>
+            </a:endParaRPr>
+          </a:p>
+          <a:p>
+            <a:pPr marL="0" indent="0">
+              <a:buFont typeface="Arial" panose="020B0604020202020204" pitchFamily="34" charset="0"/>
+              <a:buNone/>
+            </a:pPr>
+            <a:r>
+              <a:rPr lang="fr-FR" sz="2000"/>
+              <a:t>
+</a:t>
+            </a:r>
+            <a:r>
+              <a:rPr lang="fr-FR" sz="2000" b="1"/>
+              <a:t>Swift</a:t>
+            </a:r>
+            <a:r>
+              <a:rPr lang="fr-FR" sz="2000"/>
+              <a:t> – main modern </a:t>
+            </a:r>
+            <a:r>
+              <a:rPr lang="fr-FR" sz="2000" err="1"/>
+              <a:t>language</a:t>
+            </a:r>
+            <a:endParaRPr lang="en-US" sz="2000" err="1">
+              <a:cs typeface="Arial"/>
+            </a:endParaRPr>
+          </a:p>
+          <a:p>
+            <a:pPr marL="0" indent="0">
+              <a:buFont typeface="Arial" panose="020B0604020202020204" pitchFamily="34" charset="0"/>
+              <a:buNone/>
+            </a:pPr>
+            <a:r>
+              <a:rPr lang="fr-FR" sz="2000"/>
+              <a:t>
+</a:t>
+            </a:r>
+            <a:r>
+              <a:rPr lang="fr-FR" sz="2000" b="1"/>
+              <a:t>Objective-C</a:t>
+            </a:r>
+            <a:r>
+              <a:rPr lang="fr-FR" sz="2000"/>
+              <a:t> – </a:t>
+            </a:r>
+            <a:r>
+              <a:rPr lang="fr-FR" sz="2000" err="1"/>
+              <a:t>older</a:t>
+            </a:r>
+            <a:r>
+              <a:rPr lang="fr-FR" sz="2000"/>
+              <a:t> </a:t>
+            </a:r>
+            <a:r>
+              <a:rPr lang="fr-FR" sz="2000" err="1"/>
+              <a:t>language</a:t>
+            </a:r>
+            <a:endParaRPr lang="en-US" sz="2000">
+              <a:cs typeface="Arial"/>
+            </a:endParaRPr>
+          </a:p>
+        </p:txBody>
+      </p:sp>
+      <p:sp>
+        <p:nvSpPr>
+          <p:cNvPr id="10" name="TextBox 9">
+            <a:extLst>
+              <a:ext uri="{FF2B5EF4-FFF2-40B4-BE49-F238E27FC236}">
+                <a16:creationId xmlns:a16="http://schemas.microsoft.com/office/drawing/2014/main" id="{56DB35B2-9F41-CED6-7BFF-1F20B515D218}"/>
+              </a:ext>
+            </a:extLst>
+          </p:cNvPr>
+          <p:cNvSpPr txBox="1"/>
+          <p:nvPr/>
+        </p:nvSpPr>
+        <p:spPr>
+          <a:xfrm>
+            <a:off x="5750785" y="1467165"/>
+            <a:ext cx="6096000" cy="2554545"/>
+          </a:xfrm>
+          <a:prstGeom prst="rect">
+            <a:avLst/>
+          </a:prstGeom>
+          <a:noFill/>
+        </p:spPr>
+        <p:txBody>
+          <a:bodyPr rot="0" spcFirstLastPara="0" vertOverflow="overflow" horzOverflow="overflow" vert="horz" wrap="square" lIns="91440" tIns="45720" rIns="91440" bIns="45720" numCol="1" spcCol="0" rtlCol="0" fromWordArt="0" anchor="t" anchorCtr="0" forceAA="0" compatLnSpc="1">
+            <a:prstTxWarp prst="textNoShape">
+              <a:avLst/>
+            </a:prstTxWarp>
+            <a:spAutoFit/>
+          </a:bodyPr>
+          <a:lstStyle/>
+          <a:p>
+            <a:r>
+              <a:rPr lang="fr-FR" sz="2000">
+                <a:latin typeface="Arial"/>
+                <a:ea typeface="Arial"/>
+                <a:cs typeface="Arial"/>
+              </a:rPr>
+              <a:t>​</a:t>
+            </a:r>
+            <a:r>
+              <a:rPr lang="fr-FR" sz="1900" b="1" i="1" err="1">
+                <a:solidFill>
+                  <a:srgbClr val="63B7C6"/>
+                </a:solidFill>
+                <a:latin typeface="Arial"/>
+                <a:ea typeface="Arial"/>
+                <a:cs typeface="Arial"/>
+              </a:rPr>
+              <a:t>Frameworks</a:t>
+            </a:r>
+            <a:endParaRPr lang="en-US">
+              <a:latin typeface="Arial"/>
+              <a:ea typeface="Arial"/>
+              <a:cs typeface="Arial"/>
+            </a:endParaRPr>
+          </a:p>
+          <a:p>
+            <a:br>
+              <a:rPr lang="fr-FR" sz="2000">
+                <a:latin typeface="Arial"/>
+                <a:ea typeface="Arial"/>
+                <a:cs typeface="Arial"/>
+              </a:rPr>
+            </a:br>
+            <a:r>
+              <a:rPr lang="fr-FR" sz="2000">
+                <a:solidFill>
+                  <a:schemeClr val="bg1"/>
+                </a:solidFill>
+                <a:latin typeface="Arial"/>
+                <a:ea typeface="Arial"/>
+                <a:cs typeface="Arial"/>
+              </a:rPr>
+              <a:t>- </a:t>
+            </a:r>
+            <a:r>
+              <a:rPr lang="fr-FR" sz="2000" err="1">
+                <a:solidFill>
+                  <a:schemeClr val="bg1"/>
+                </a:solidFill>
+                <a:latin typeface="Arial"/>
+                <a:ea typeface="Arial"/>
+                <a:cs typeface="Arial"/>
+              </a:rPr>
+              <a:t>React</a:t>
+            </a:r>
+            <a:r>
+              <a:rPr lang="fr-FR" sz="2000">
+                <a:solidFill>
+                  <a:schemeClr val="bg1"/>
+                </a:solidFill>
+                <a:latin typeface="Arial"/>
+                <a:ea typeface="Arial"/>
+                <a:cs typeface="Arial"/>
+              </a:rPr>
+              <a:t> Native​ (JavaScript / </a:t>
+            </a:r>
+            <a:r>
+              <a:rPr lang="fr-FR" sz="2000" err="1">
+                <a:solidFill>
+                  <a:schemeClr val="bg1"/>
+                </a:solidFill>
+                <a:latin typeface="Arial"/>
+                <a:ea typeface="Arial"/>
+                <a:cs typeface="Arial"/>
+              </a:rPr>
+              <a:t>Typescript</a:t>
+            </a:r>
+            <a:r>
+              <a:rPr lang="fr-FR" sz="2000">
+                <a:solidFill>
+                  <a:schemeClr val="bg1"/>
+                </a:solidFill>
+                <a:latin typeface="Arial"/>
+                <a:ea typeface="Arial"/>
+                <a:cs typeface="Arial"/>
+              </a:rPr>
+              <a:t>)</a:t>
+            </a:r>
+          </a:p>
+          <a:p>
+            <a:br>
+              <a:rPr lang="fr-FR" sz="2000">
+                <a:latin typeface="Arial"/>
+                <a:ea typeface="Arial"/>
+                <a:cs typeface="Arial"/>
+              </a:rPr>
+            </a:br>
+            <a:r>
+              <a:rPr lang="fr-FR" sz="2000">
+                <a:solidFill>
+                  <a:schemeClr val="bg1"/>
+                </a:solidFill>
+                <a:latin typeface="Arial"/>
+                <a:ea typeface="Arial"/>
+                <a:cs typeface="Arial"/>
+              </a:rPr>
+              <a:t>- Flutter​  (</a:t>
+            </a:r>
+            <a:r>
+              <a:rPr lang="fr-FR" sz="2000" b="1">
+                <a:solidFill>
+                  <a:schemeClr val="bg1"/>
+                </a:solidFill>
+                <a:latin typeface="Arial"/>
+                <a:ea typeface="Arial"/>
+                <a:cs typeface="Arial"/>
+              </a:rPr>
+              <a:t>Dart</a:t>
+            </a:r>
+            <a:r>
+              <a:rPr lang="fr-FR" sz="2000">
+                <a:solidFill>
+                  <a:schemeClr val="bg1"/>
+                </a:solidFill>
+                <a:latin typeface="Arial"/>
+                <a:ea typeface="Arial"/>
+                <a:cs typeface="Arial"/>
+              </a:rPr>
+              <a:t> )</a:t>
+            </a:r>
+            <a:endParaRPr lang="fr-FR"/>
+          </a:p>
+          <a:p>
+            <a:br>
+              <a:rPr lang="fr-FR" sz="2000">
+                <a:latin typeface="Arial"/>
+                <a:ea typeface="Arial"/>
+                <a:cs typeface="Arial"/>
+              </a:rPr>
+            </a:br>
+            <a:r>
+              <a:rPr lang="fr-FR" sz="2000">
+                <a:solidFill>
+                  <a:schemeClr val="bg1"/>
+                </a:solidFill>
+                <a:latin typeface="Arial"/>
+                <a:ea typeface="Arial"/>
+                <a:cs typeface="Arial"/>
+              </a:rPr>
+              <a:t>- Xamarin​ (</a:t>
+            </a:r>
+            <a:r>
+              <a:rPr lang="fr-FR" sz="2000" b="1">
+                <a:solidFill>
+                  <a:schemeClr val="bg1"/>
+                </a:solidFill>
+                <a:latin typeface="Arial"/>
+                <a:ea typeface="Arial"/>
+                <a:cs typeface="Arial"/>
+              </a:rPr>
+              <a:t>C#)</a:t>
+            </a:r>
+            <a:endParaRPr lang="fr-FR"/>
+          </a:p>
+          <a:p>
+            <a:pPr algn="ctr"/>
+            <a:endParaRPr lang="fr-FR" sz="2000">
+              <a:solidFill>
+                <a:srgbClr val="000000"/>
+              </a:solidFill>
+              <a:cs typeface="Arial"/>
+            </a:endParaRPr>
+          </a:p>
+        </p:txBody>
+      </p:sp>
+    </p:spTree>
+    <p:extLst>
+      <p:ext uri="{BB962C8B-B14F-4D97-AF65-F5344CB8AC3E}">
+        <p14:creationId xmlns:p14="http://schemas.microsoft.com/office/powerpoint/2010/main" val="3607270498"/>
+      </p:ext>
+    </p:extLst>
+  </p:cSld>
+  <p:clrMapOvr>
+    <a:masterClrMapping/>
+  </p:clrMapOvr>
+  <mc:AlternateContent xmlns:mc="http://schemas.openxmlformats.org/markup-compatibility/2006" xmlns:p14="http://schemas.microsoft.com/office/powerpoint/2010/main">
+    <mc:Choice Requires="p14">
+      <p:transition spd="med" p14:dur="700">
+        <p:fade/>
+      </p:transition>
+    </mc:Choice>
+    <mc:Fallback xmlns="">
+      <p:transition spd="med">
+        <p:fade/>
+      </p:transition>
+    </mc:Fallback>
+  </mc:AlternateContent>
+</p:sld>
+</file>
+
+<file path=ppt/slides/slide12.xml><?xml version="1.0" encoding="utf-8"?>
+<p:sld xmlns:a="http://schemas.openxmlformats.org/drawingml/2006/main" xmlns:r="http://schemas.openxmlformats.org/officeDocument/2006/relationships" xmlns:p="http://schemas.openxmlformats.org/presentationml/2006/main">
+  <p:cSld>
+    <p:spTree>
+      <p:nvGrpSpPr>
+        <p:cNvPr id="1" name=""/>
+        <p:cNvGrpSpPr/>
+        <p:nvPr/>
+      </p:nvGrpSpPr>
+      <p:grpSpPr>
+        <a:xfrm>
+          <a:off x="0" y="0"/>
+          <a:ext cx="0" cy="0"/>
+          <a:chOff x="0" y="0"/>
+          <a:chExt cx="0" cy="0"/>
+        </a:xfrm>
+      </p:grpSpPr>
+      <p:sp>
+        <p:nvSpPr>
+          <p:cNvPr id="2" name="Titre 1">
+            <a:extLst>
+              <a:ext uri="{FF2B5EF4-FFF2-40B4-BE49-F238E27FC236}">
+                <a16:creationId xmlns:a16="http://schemas.microsoft.com/office/drawing/2014/main" id="{DE1B5873-DB13-5538-88E4-5D7B2C56774E}"/>
+              </a:ext>
+            </a:extLst>
+          </p:cNvPr>
+          <p:cNvSpPr>
+            <a:spLocks noGrp="1"/>
+          </p:cNvSpPr>
+          <p:nvPr>
+            <p:ph type="title"/>
+          </p:nvPr>
+        </p:nvSpPr>
+        <p:spPr/>
+        <p:txBody>
+          <a:bodyPr/>
+          <a:lstStyle/>
+          <a:p>
+            <a:r>
+              <a:rPr lang="fr-FR"/>
+              <a:t>.</a:t>
+            </a:r>
+          </a:p>
+        </p:txBody>
+      </p:sp>
+      <p:sp>
+        <p:nvSpPr>
+          <p:cNvPr id="3" name="Espace réservé du numéro de diapositive 2">
+            <a:extLst>
+              <a:ext uri="{FF2B5EF4-FFF2-40B4-BE49-F238E27FC236}">
+                <a16:creationId xmlns:a16="http://schemas.microsoft.com/office/drawing/2014/main" id="{F37C7ED3-C6A1-BB78-A822-9887C69E9A47}"/>
+              </a:ext>
+            </a:extLst>
+          </p:cNvPr>
+          <p:cNvSpPr>
+            <a:spLocks noGrp="1"/>
+          </p:cNvSpPr>
+          <p:nvPr>
+            <p:ph type="sldNum" sz="quarter" idx="12"/>
+          </p:nvPr>
+        </p:nvSpPr>
+        <p:spPr/>
+        <p:txBody>
+          <a:bodyPr/>
+          <a:lstStyle/>
+          <a:p>
+            <a:fld id="{C263D6C4-4840-40CC-AC84-17E24B3B7BDE}" type="slidenum">
+              <a:rPr lang="en-US" noProof="0" smtClean="0"/>
+              <a:pPr/>
+              <a:t>12</a:t>
+            </a:fld>
+            <a:endParaRPr lang="en-US" noProof="0"/>
+          </a:p>
+        </p:txBody>
+      </p:sp>
+      <p:pic>
+        <p:nvPicPr>
+          <p:cNvPr id="5" name="Espace réservé du contenu 4" descr="Une image contenant texte, capture d’écran, nombre, Police&#10;&#10;Le contenu généré par l’IA peut être incorrect.">
+            <a:extLst>
+              <a:ext uri="{FF2B5EF4-FFF2-40B4-BE49-F238E27FC236}">
+                <a16:creationId xmlns:a16="http://schemas.microsoft.com/office/drawing/2014/main" id="{0D85A996-4B34-EF2C-61A2-9136E79503E3}"/>
+              </a:ext>
+            </a:extLst>
+          </p:cNvPr>
+          <p:cNvPicPr>
+            <a:picLocks noGrp="1" noChangeAspect="1"/>
+          </p:cNvPicPr>
+          <p:nvPr>
+            <p:ph idx="1"/>
+          </p:nvPr>
+        </p:nvPicPr>
+        <p:blipFill>
+          <a:blip r:embed="rId2"/>
+          <a:stretch>
+            <a:fillRect/>
+          </a:stretch>
+        </p:blipFill>
+        <p:spPr>
+          <a:xfrm>
+            <a:off x="1156719" y="1076994"/>
+            <a:ext cx="9868738" cy="5367338"/>
+          </a:xfrm>
+          <a:prstGeom prst="rect">
+            <a:avLst/>
+          </a:prstGeom>
+        </p:spPr>
+      </p:pic>
+    </p:spTree>
+    <p:extLst>
+      <p:ext uri="{BB962C8B-B14F-4D97-AF65-F5344CB8AC3E}">
+        <p14:creationId xmlns:p14="http://schemas.microsoft.com/office/powerpoint/2010/main" val="893234378"/>
+      </p:ext>
+    </p:extLst>
+  </p:cSld>
+  <p:clrMapOvr>
+    <a:masterClrMapping/>
+  </p:clrMapOvr>
+</p:sld>
+</file>
+
+<file path=ppt/slides/slide13.xml><?xml version="1.0" encoding="utf-8"?>
+<p:sld xmlns:a="http://schemas.openxmlformats.org/drawingml/2006/main" xmlns:r="http://schemas.openxmlformats.org/officeDocument/2006/relationships" xmlns:p="http://schemas.openxmlformats.org/presentationml/2006/main">
+  <p:cSld>
+    <p:spTree>
+      <p:nvGrpSpPr>
+        <p:cNvPr id="1" name=""/>
+        <p:cNvGrpSpPr/>
+        <p:nvPr/>
+      </p:nvGrpSpPr>
+      <p:grpSpPr>
+        <a:xfrm>
+          <a:off x="0" y="0"/>
+          <a:ext cx="0" cy="0"/>
+          <a:chOff x="0" y="0"/>
+          <a:chExt cx="0" cy="0"/>
+        </a:xfrm>
+      </p:grpSpPr>
+      <p:sp>
+        <p:nvSpPr>
+          <p:cNvPr id="2" name="Titre 1">
+            <a:extLst>
+              <a:ext uri="{FF2B5EF4-FFF2-40B4-BE49-F238E27FC236}">
+                <a16:creationId xmlns:a16="http://schemas.microsoft.com/office/drawing/2014/main" id="{63F874BF-273A-4A36-CFA6-33ABE4B75CFD}"/>
+              </a:ext>
+            </a:extLst>
+          </p:cNvPr>
+          <p:cNvSpPr>
+            <a:spLocks noGrp="1"/>
+          </p:cNvSpPr>
+          <p:nvPr>
+            <p:ph type="title"/>
+          </p:nvPr>
+        </p:nvSpPr>
+        <p:spPr/>
+        <p:txBody>
+          <a:bodyPr/>
+          <a:lstStyle/>
+          <a:p>
+            <a:r>
+              <a:rPr lang="fr-FR"/>
+              <a:t> X-CODE (SWIFT)</a:t>
+            </a:r>
+          </a:p>
+        </p:txBody>
+      </p:sp>
+      <p:sp>
+        <p:nvSpPr>
+          <p:cNvPr id="3" name="Espace réservé du numéro de diapositive 2">
+            <a:extLst>
+              <a:ext uri="{FF2B5EF4-FFF2-40B4-BE49-F238E27FC236}">
+                <a16:creationId xmlns:a16="http://schemas.microsoft.com/office/drawing/2014/main" id="{F685ADC2-53C6-2786-4588-4F0283C32128}"/>
+              </a:ext>
+            </a:extLst>
+          </p:cNvPr>
+          <p:cNvSpPr>
+            <a:spLocks noGrp="1"/>
+          </p:cNvSpPr>
+          <p:nvPr>
+            <p:ph type="sldNum" sz="quarter" idx="12"/>
+          </p:nvPr>
+        </p:nvSpPr>
+        <p:spPr/>
+        <p:txBody>
+          <a:bodyPr/>
+          <a:lstStyle/>
+          <a:p>
+            <a:fld id="{C263D6C4-4840-40CC-AC84-17E24B3B7BDE}" type="slidenum">
+              <a:rPr lang="en-US" noProof="0" smtClean="0"/>
+              <a:pPr/>
+              <a:t>13</a:t>
+            </a:fld>
+            <a:endParaRPr lang="en-US" noProof="0"/>
+          </a:p>
+        </p:txBody>
+      </p:sp>
+      <p:pic>
+        <p:nvPicPr>
+          <p:cNvPr id="5" name="Espace réservé du contenu 4" descr="Une image contenant texte, capture d’écran, logiciel, Icône d’ordinateur&#10;&#10;Le contenu généré par l’IA peut être incorrect.">
+            <a:extLst>
+              <a:ext uri="{FF2B5EF4-FFF2-40B4-BE49-F238E27FC236}">
+                <a16:creationId xmlns:a16="http://schemas.microsoft.com/office/drawing/2014/main" id="{F3FEC0B7-FEB8-929E-804D-7B834F474816}"/>
+              </a:ext>
+            </a:extLst>
+          </p:cNvPr>
+          <p:cNvPicPr>
+            <a:picLocks noGrp="1" noChangeAspect="1"/>
+          </p:cNvPicPr>
+          <p:nvPr>
+            <p:ph idx="1"/>
+          </p:nvPr>
+        </p:nvPicPr>
+        <p:blipFill>
+          <a:blip r:embed="rId2"/>
+          <a:stretch>
+            <a:fillRect/>
+          </a:stretch>
+        </p:blipFill>
+        <p:spPr>
+          <a:xfrm>
+            <a:off x="-219696" y="1478046"/>
+            <a:ext cx="9199250" cy="4351338"/>
+          </a:xfrm>
+          <a:prstGeom prst="rect">
+            <a:avLst/>
+          </a:prstGeom>
+        </p:spPr>
+      </p:pic>
+      <p:pic>
+        <p:nvPicPr>
+          <p:cNvPr id="6" name="Image 5" descr="Une image contenant Téléphone mobile, gadget, Appareil de communications portable, Appareil de communication&#10;&#10;Le contenu généré par l’IA peut être incorrect.">
+            <a:extLst>
+              <a:ext uri="{FF2B5EF4-FFF2-40B4-BE49-F238E27FC236}">
+                <a16:creationId xmlns:a16="http://schemas.microsoft.com/office/drawing/2014/main" id="{B7F5B3CD-479F-A2C0-A008-7931B6181FF5}"/>
+              </a:ext>
+            </a:extLst>
+          </p:cNvPr>
+          <p:cNvPicPr>
+            <a:picLocks noChangeAspect="1"/>
+          </p:cNvPicPr>
+          <p:nvPr/>
+        </p:nvPicPr>
+        <p:blipFill>
+          <a:blip r:embed="rId3"/>
+          <a:srcRect l="30132" r="27523" b="4275"/>
+          <a:stretch>
+            <a:fillRect/>
+          </a:stretch>
+        </p:blipFill>
+        <p:spPr>
+          <a:xfrm>
+            <a:off x="9192043" y="1709487"/>
+            <a:ext cx="3004849" cy="3829487"/>
+          </a:xfrm>
+          <a:prstGeom prst="rect">
+            <a:avLst/>
+          </a:prstGeom>
+        </p:spPr>
+      </p:pic>
+      <p:sp>
+        <p:nvSpPr>
+          <p:cNvPr id="7" name="ZoneTexte 6">
+            <a:extLst>
+              <a:ext uri="{FF2B5EF4-FFF2-40B4-BE49-F238E27FC236}">
+                <a16:creationId xmlns:a16="http://schemas.microsoft.com/office/drawing/2014/main" id="{4BEBD420-9D40-29EB-BD25-37EAC916600A}"/>
+              </a:ext>
+            </a:extLst>
+          </p:cNvPr>
+          <p:cNvSpPr txBox="1"/>
+          <p:nvPr/>
+        </p:nvSpPr>
+        <p:spPr>
+          <a:xfrm>
+            <a:off x="1468751" y="6282991"/>
+            <a:ext cx="2692710" cy="369332"/>
+          </a:xfrm>
+          <a:prstGeom prst="rect">
+            <a:avLst/>
+          </a:prstGeom>
+          <a:noFill/>
+        </p:spPr>
+        <p:txBody>
+          <a:bodyPr rot="0" spcFirstLastPara="0" vertOverflow="overflow" horzOverflow="overflow" vert="horz" wrap="square" lIns="91440" tIns="45720" rIns="91440" bIns="45720" numCol="1" spcCol="0" rtlCol="0" fromWordArt="0" anchor="t" anchorCtr="0" forceAA="0" compatLnSpc="1">
+            <a:prstTxWarp prst="textNoShape">
+              <a:avLst/>
+            </a:prstTxWarp>
+            <a:spAutoFit/>
+          </a:bodyPr>
+          <a:lstStyle/>
+          <a:p>
+            <a:pPr algn="l"/>
+            <a:r>
+              <a:rPr lang="fr-FR">
+                <a:cs typeface="Arial"/>
+              </a:rPr>
+              <a:t>V</a:t>
+            </a:r>
+            <a:r>
+              <a:rPr lang="fr-FR">
+                <a:solidFill>
+                  <a:schemeClr val="bg1"/>
+                </a:solidFill>
+                <a:cs typeface="Arial"/>
+              </a:rPr>
+              <a:t>HJ</a:t>
+            </a:r>
+          </a:p>
+        </p:txBody>
+      </p:sp>
+    </p:spTree>
+    <p:extLst>
+      <p:ext uri="{BB962C8B-B14F-4D97-AF65-F5344CB8AC3E}">
+        <p14:creationId xmlns:p14="http://schemas.microsoft.com/office/powerpoint/2010/main" val="1876291841"/>
+      </p:ext>
+    </p:extLst>
+  </p:cSld>
+  <p:clrMapOvr>
+    <a:masterClrMapping/>
+  </p:clrMapOvr>
+</p:sld>
+</file>
+
+<file path=ppt/slides/slide14.xml><?xml version="1.0" encoding="utf-8"?>
+<p:sld xmlns:a="http://schemas.openxmlformats.org/drawingml/2006/main" xmlns:r="http://schemas.openxmlformats.org/officeDocument/2006/relationships" xmlns:p="http://schemas.openxmlformats.org/presentationml/2006/main">
+  <p:cSld>
+    <p:spTree>
+      <p:nvGrpSpPr>
+        <p:cNvPr id="1" name=""/>
+        <p:cNvGrpSpPr/>
+        <p:nvPr/>
+      </p:nvGrpSpPr>
+      <p:grpSpPr>
+        <a:xfrm>
+          <a:off x="0" y="0"/>
+          <a:ext cx="0" cy="0"/>
+          <a:chOff x="0" y="0"/>
+          <a:chExt cx="0" cy="0"/>
+        </a:xfrm>
+      </p:grpSpPr>
+      <p:sp>
+        <p:nvSpPr>
+          <p:cNvPr id="2" name="Titre 1">
+            <a:extLst>
+              <a:ext uri="{FF2B5EF4-FFF2-40B4-BE49-F238E27FC236}">
+                <a16:creationId xmlns:a16="http://schemas.microsoft.com/office/drawing/2014/main" id="{32F3C7B1-AFF6-428B-7AED-229463B314E0}"/>
+              </a:ext>
+            </a:extLst>
+          </p:cNvPr>
+          <p:cNvSpPr>
+            <a:spLocks noGrp="1"/>
+          </p:cNvSpPr>
+          <p:nvPr>
+            <p:ph type="title"/>
+          </p:nvPr>
+        </p:nvSpPr>
+        <p:spPr/>
+        <p:txBody>
+          <a:bodyPr/>
+          <a:lstStyle/>
+          <a:p>
+            <a:r>
+              <a:rPr lang="fr-FR"/>
+              <a:t>ANDROID STUDIO </a:t>
+            </a:r>
+          </a:p>
+        </p:txBody>
+      </p:sp>
+      <p:sp>
+        <p:nvSpPr>
+          <p:cNvPr id="3" name="Espace réservé du numéro de diapositive 2">
+            <a:extLst>
+              <a:ext uri="{FF2B5EF4-FFF2-40B4-BE49-F238E27FC236}">
+                <a16:creationId xmlns:a16="http://schemas.microsoft.com/office/drawing/2014/main" id="{7D27E41C-4D64-98DE-2E2C-85E74323A5AA}"/>
+              </a:ext>
+            </a:extLst>
+          </p:cNvPr>
+          <p:cNvSpPr>
+            <a:spLocks noGrp="1"/>
+          </p:cNvSpPr>
+          <p:nvPr>
+            <p:ph type="sldNum" sz="quarter" idx="12"/>
+          </p:nvPr>
+        </p:nvSpPr>
+        <p:spPr/>
+        <p:txBody>
+          <a:bodyPr/>
+          <a:lstStyle/>
+          <a:p>
+            <a:fld id="{C263D6C4-4840-40CC-AC84-17E24B3B7BDE}" type="slidenum">
+              <a:rPr lang="en-US" noProof="0" smtClean="0"/>
+              <a:pPr/>
+              <a:t>14</a:t>
+            </a:fld>
+            <a:endParaRPr lang="en-US" noProof="0"/>
+          </a:p>
+        </p:txBody>
+      </p:sp>
+      <p:pic>
+        <p:nvPicPr>
+          <p:cNvPr id="5" name="Espace réservé du contenu 4">
+            <a:extLst>
+              <a:ext uri="{FF2B5EF4-FFF2-40B4-BE49-F238E27FC236}">
+                <a16:creationId xmlns:a16="http://schemas.microsoft.com/office/drawing/2014/main" id="{419DDBE6-1030-BDC2-4518-573B4FB41FCB}"/>
+              </a:ext>
+            </a:extLst>
+          </p:cNvPr>
+          <p:cNvPicPr>
+            <a:picLocks noGrp="1" noChangeAspect="1"/>
+          </p:cNvPicPr>
+          <p:nvPr>
+            <p:ph idx="1"/>
+          </p:nvPr>
+        </p:nvPicPr>
+        <p:blipFill>
+          <a:blip r:embed="rId2"/>
+          <a:stretch>
+            <a:fillRect/>
+          </a:stretch>
+        </p:blipFill>
+        <p:spPr>
+          <a:xfrm>
+            <a:off x="1850960" y="1825625"/>
+            <a:ext cx="8400045" cy="4351338"/>
+          </a:xfrm>
+          <a:prstGeom prst="rect">
+            <a:avLst/>
+          </a:prstGeom>
+        </p:spPr>
+      </p:pic>
+    </p:spTree>
+    <p:extLst>
+      <p:ext uri="{BB962C8B-B14F-4D97-AF65-F5344CB8AC3E}">
+        <p14:creationId xmlns:p14="http://schemas.microsoft.com/office/powerpoint/2010/main" val="3105874620"/>
+      </p:ext>
+    </p:extLst>
+  </p:cSld>
+  <p:clrMapOvr>
+    <a:masterClrMapping/>
+  </p:clrMapOvr>
+</p:sld>
+</file>
+
+<file path=ppt/slides/slide15.xml><?xml version="1.0" encoding="utf-8"?>
+<p:sld xmlns:a="http://schemas.openxmlformats.org/drawingml/2006/main" xmlns:r="http://schemas.openxmlformats.org/officeDocument/2006/relationships" xmlns:p="http://schemas.openxmlformats.org/presentationml/2006/main">
+  <p:cSld>
+    <p:spTree>
+      <p:nvGrpSpPr>
+        <p:cNvPr id="1" name=""/>
+        <p:cNvGrpSpPr/>
+        <p:nvPr/>
+      </p:nvGrpSpPr>
+      <p:grpSpPr>
+        <a:xfrm>
+          <a:off x="0" y="0"/>
+          <a:ext cx="0" cy="0"/>
+          <a:chOff x="0" y="0"/>
+          <a:chExt cx="0" cy="0"/>
+        </a:xfrm>
+      </p:grpSpPr>
+      <p:sp>
+        <p:nvSpPr>
+          <p:cNvPr id="3" name="Slide Number Placeholder 2">
+            <a:extLst>
+              <a:ext uri="{FF2B5EF4-FFF2-40B4-BE49-F238E27FC236}">
+                <a16:creationId xmlns:a16="http://schemas.microsoft.com/office/drawing/2014/main" id="{53E24542-3419-D0AE-8997-4CA00118378B}"/>
+              </a:ext>
+            </a:extLst>
+          </p:cNvPr>
+          <p:cNvSpPr>
+            <a:spLocks noGrp="1"/>
+          </p:cNvSpPr>
+          <p:nvPr>
+            <p:ph type="sldNum" sz="quarter" idx="12"/>
+          </p:nvPr>
+        </p:nvSpPr>
+        <p:spPr/>
+        <p:txBody>
+          <a:bodyPr/>
+          <a:lstStyle/>
+          <a:p>
+            <a:fld id="{C263D6C4-4840-40CC-AC84-17E24B3B7BDE}" type="slidenum">
+              <a:rPr lang="en-US" noProof="0" smtClean="0"/>
+              <a:pPr/>
+              <a:t>15</a:t>
+            </a:fld>
+            <a:endParaRPr lang="en-US" noProof="0"/>
+          </a:p>
+        </p:txBody>
+      </p:sp>
+      <p:sp>
+        <p:nvSpPr>
+          <p:cNvPr id="4" name="Content Placeholder 3">
+            <a:extLst>
+              <a:ext uri="{FF2B5EF4-FFF2-40B4-BE49-F238E27FC236}">
+                <a16:creationId xmlns:a16="http://schemas.microsoft.com/office/drawing/2014/main" id="{BC3C7601-E598-D895-A67B-BCE070B77069}"/>
+              </a:ext>
+            </a:extLst>
+          </p:cNvPr>
+          <p:cNvSpPr>
+            <a:spLocks noGrp="1"/>
+          </p:cNvSpPr>
+          <p:nvPr>
+            <p:ph idx="1"/>
+          </p:nvPr>
+        </p:nvSpPr>
+        <p:spPr>
+          <a:xfrm>
+            <a:off x="443365" y="2261054"/>
+            <a:ext cx="5867628" cy="1439410"/>
+          </a:xfrm>
+        </p:spPr>
+        <p:txBody>
+          <a:bodyPr vert="horz" lIns="91440" tIns="45720" rIns="91440" bIns="45720" rtlCol="0" anchor="t">
+            <a:normAutofit/>
+          </a:bodyPr>
+          <a:lstStyle/>
+          <a:p>
+            <a:endParaRPr lang="en-US" dirty="0">
+              <a:ea typeface="+mn-lt"/>
+              <a:cs typeface="+mn-lt"/>
+            </a:endParaRPr>
+          </a:p>
+          <a:p>
+            <a:r>
+              <a:rPr lang="en-US" dirty="0">
+                <a:ea typeface="+mn-lt"/>
+                <a:cs typeface="+mn-lt"/>
+              </a:rPr>
+              <a:t> </a:t>
+            </a:r>
+            <a:r>
+              <a:rPr lang="en-US" sz="1800" dirty="0">
+                <a:latin typeface="Nunito"/>
+                <a:cs typeface="Arial"/>
+              </a:rPr>
+              <a:t>Design patterns are reusable solutions to common software development problems. </a:t>
+            </a:r>
+            <a:endParaRPr lang="en-US" sz="1800" dirty="0">
+              <a:cs typeface="Arial"/>
+            </a:endParaRPr>
+          </a:p>
+          <a:p>
+            <a:endParaRPr lang="en-US" dirty="0">
+              <a:cs typeface="Arial"/>
+            </a:endParaRPr>
+          </a:p>
+        </p:txBody>
+      </p:sp>
+      <p:pic>
+        <p:nvPicPr>
+          <p:cNvPr id="5" name="Image 4" descr="Une image contenant texte, capture d’écran, Police, diagramme&#10;&#10;Le contenu généré par l’IA peut être incorrect.">
+            <a:extLst>
+              <a:ext uri="{FF2B5EF4-FFF2-40B4-BE49-F238E27FC236}">
+                <a16:creationId xmlns:a16="http://schemas.microsoft.com/office/drawing/2014/main" id="{4047D2BB-4002-B725-AB0A-9638AAB70935}"/>
+              </a:ext>
+            </a:extLst>
+          </p:cNvPr>
+          <p:cNvPicPr>
+            <a:picLocks noChangeAspect="1"/>
+          </p:cNvPicPr>
+          <p:nvPr/>
+        </p:nvPicPr>
+        <p:blipFill>
+          <a:blip r:embed="rId2"/>
+          <a:stretch>
+            <a:fillRect/>
+          </a:stretch>
+        </p:blipFill>
+        <p:spPr>
+          <a:xfrm>
+            <a:off x="6843713" y="1408340"/>
+            <a:ext cx="5335360" cy="4612820"/>
+          </a:xfrm>
+          <a:prstGeom prst="rect">
+            <a:avLst/>
+          </a:prstGeom>
+        </p:spPr>
+      </p:pic>
+    </p:spTree>
+    <p:extLst>
+      <p:ext uri="{BB962C8B-B14F-4D97-AF65-F5344CB8AC3E}">
+        <p14:creationId xmlns:p14="http://schemas.microsoft.com/office/powerpoint/2010/main" val="3543692863"/>
+      </p:ext>
+    </p:extLst>
+  </p:cSld>
+  <p:clrMapOvr>
+    <a:masterClrMapping/>
+  </p:clrMapOvr>
+</p:sld>
+</file>
+
+<file path=ppt/slides/slide16.xml><?xml version="1.0" encoding="utf-8"?>
+<p:sld xmlns:a="http://schemas.openxmlformats.org/drawingml/2006/main" xmlns:r="http://schemas.openxmlformats.org/officeDocument/2006/relationships" xmlns:p="http://schemas.openxmlformats.org/presentationml/2006/main">
+  <p:cSld>
+    <p:spTree>
+      <p:nvGrpSpPr>
+        <p:cNvPr id="1" name=""/>
+        <p:cNvGrpSpPr/>
+        <p:nvPr/>
+      </p:nvGrpSpPr>
+      <p:grpSpPr>
+        <a:xfrm>
+          <a:off x="0" y="0"/>
+          <a:ext cx="0" cy="0"/>
+          <a:chOff x="0" y="0"/>
+          <a:chExt cx="0" cy="0"/>
+        </a:xfrm>
+      </p:grpSpPr>
+      <p:sp>
+        <p:nvSpPr>
+          <p:cNvPr id="2" name="Titre 1">
+            <a:extLst>
+              <a:ext uri="{FF2B5EF4-FFF2-40B4-BE49-F238E27FC236}">
+                <a16:creationId xmlns:a16="http://schemas.microsoft.com/office/drawing/2014/main" id="{76BD4846-8A4F-EA06-9D97-8BF7BCA44628}"/>
+              </a:ext>
+            </a:extLst>
+          </p:cNvPr>
+          <p:cNvSpPr>
+            <a:spLocks noGrp="1"/>
+          </p:cNvSpPr>
+          <p:nvPr>
+            <p:ph type="title"/>
+          </p:nvPr>
+        </p:nvSpPr>
+        <p:spPr/>
+        <p:txBody>
+          <a:bodyPr/>
+          <a:lstStyle/>
+          <a:p>
+            <a:pPr algn="ctr"/>
+            <a:r>
+              <a:rPr lang="fr-FR"/>
+              <a:t>     MVC</a:t>
+            </a:r>
+          </a:p>
+        </p:txBody>
+      </p:sp>
+      <p:sp>
+        <p:nvSpPr>
+          <p:cNvPr id="3" name="Espace réservé du numéro de diapositive 2">
+            <a:extLst>
+              <a:ext uri="{FF2B5EF4-FFF2-40B4-BE49-F238E27FC236}">
+                <a16:creationId xmlns:a16="http://schemas.microsoft.com/office/drawing/2014/main" id="{09A47308-874C-54FB-5912-0AB0015C4D67}"/>
+              </a:ext>
+            </a:extLst>
+          </p:cNvPr>
+          <p:cNvSpPr>
+            <a:spLocks noGrp="1"/>
+          </p:cNvSpPr>
+          <p:nvPr>
+            <p:ph type="sldNum" sz="quarter" idx="12"/>
+          </p:nvPr>
+        </p:nvSpPr>
+        <p:spPr/>
+        <p:txBody>
+          <a:bodyPr/>
+          <a:lstStyle/>
+          <a:p>
+            <a:fld id="{C263D6C4-4840-40CC-AC84-17E24B3B7BDE}" type="slidenum">
+              <a:rPr lang="en-US" noProof="0" smtClean="0"/>
+              <a:pPr/>
+              <a:t>16</a:t>
+            </a:fld>
+            <a:endParaRPr lang="en-US" noProof="0"/>
+          </a:p>
+        </p:txBody>
+      </p:sp>
+      <p:pic>
+        <p:nvPicPr>
+          <p:cNvPr id="5" name="Espace réservé du contenu 4" descr="Une image contenant texte, capture d’écran, diagramme, Police&#10;&#10;Le contenu généré par l’IA peut être incorrect.">
+            <a:extLst>
+              <a:ext uri="{FF2B5EF4-FFF2-40B4-BE49-F238E27FC236}">
+                <a16:creationId xmlns:a16="http://schemas.microsoft.com/office/drawing/2014/main" id="{2C28933E-B9D1-9A73-2750-528E773C0242}"/>
+              </a:ext>
+            </a:extLst>
+          </p:cNvPr>
+          <p:cNvPicPr>
+            <a:picLocks noGrp="1" noChangeAspect="1"/>
+          </p:cNvPicPr>
+          <p:nvPr>
+            <p:ph idx="1"/>
+          </p:nvPr>
+        </p:nvPicPr>
+        <p:blipFill>
+          <a:blip r:embed="rId2"/>
+          <a:stretch>
+            <a:fillRect/>
+          </a:stretch>
+        </p:blipFill>
+        <p:spPr>
+          <a:xfrm>
+            <a:off x="5533217" y="1732047"/>
+            <a:ext cx="6396267" cy="4444916"/>
+          </a:xfrm>
+          <a:prstGeom prst="rect">
+            <a:avLst/>
+          </a:prstGeom>
+        </p:spPr>
+      </p:pic>
+      <p:sp>
+        <p:nvSpPr>
+          <p:cNvPr id="6" name="ZoneTexte 5">
+            <a:extLst>
+              <a:ext uri="{FF2B5EF4-FFF2-40B4-BE49-F238E27FC236}">
+                <a16:creationId xmlns:a16="http://schemas.microsoft.com/office/drawing/2014/main" id="{76AF7CE6-D64A-7AFA-A473-472F696E7482}"/>
+              </a:ext>
+            </a:extLst>
+          </p:cNvPr>
+          <p:cNvSpPr txBox="1"/>
+          <p:nvPr/>
+        </p:nvSpPr>
+        <p:spPr>
+          <a:xfrm>
+            <a:off x="746032" y="2377977"/>
+            <a:ext cx="3357145" cy="2031325"/>
+          </a:xfrm>
+          <a:prstGeom prst="rect">
+            <a:avLst/>
+          </a:prstGeom>
+          <a:noFill/>
+        </p:spPr>
+        <p:txBody>
+          <a:bodyPr rot="0" spcFirstLastPara="0" vertOverflow="overflow" horzOverflow="overflow" vert="horz" wrap="square" lIns="91440" tIns="45720" rIns="91440" bIns="45720" numCol="1" spcCol="0" rtlCol="0" fromWordArt="0" anchor="t" anchorCtr="0" forceAA="0" compatLnSpc="1">
+            <a:prstTxWarp prst="textNoShape">
+              <a:avLst/>
+            </a:prstTxWarp>
+            <a:spAutoFit/>
+          </a:bodyPr>
+          <a:lstStyle/>
+          <a:p>
+            <a:pPr marL="285750" indent="-285750">
+              <a:lnSpc>
+                <a:spcPct val="90000"/>
+              </a:lnSpc>
+              <a:spcBef>
+                <a:spcPts val="1000"/>
+              </a:spcBef>
+              <a:buFont typeface="Arial"/>
+              <a:buChar char="•"/>
+            </a:pPr>
+            <a:r>
+              <a:rPr lang="en-US" sz="2000" b="1">
+                <a:solidFill>
+                  <a:srgbClr val="FFFFFF"/>
+                </a:solidFill>
+                <a:cs typeface="Arial"/>
+              </a:rPr>
+              <a:t>MVC (Model-View-Controller):</a:t>
+            </a:r>
+            <a:r>
+              <a:rPr lang="en-US" sz="2000">
+                <a:solidFill>
+                  <a:srgbClr val="FFFFFF"/>
+                </a:solidFill>
+                <a:cs typeface="Arial"/>
+              </a:rPr>
+              <a:t> The classic separation. Simple but can lead to "MassiveControllers" in big apps.</a:t>
+            </a:r>
+            <a:endParaRPr lang="en-US" sz="2000">
+              <a:cs typeface="Arial"/>
+            </a:endParaRPr>
+          </a:p>
+          <a:p>
+            <a:pPr algn="l"/>
+            <a:endParaRPr lang="fr-FR">
+              <a:cs typeface="Arial"/>
+            </a:endParaRPr>
+          </a:p>
+        </p:txBody>
+      </p:sp>
+    </p:spTree>
+    <p:extLst>
+      <p:ext uri="{BB962C8B-B14F-4D97-AF65-F5344CB8AC3E}">
+        <p14:creationId xmlns:p14="http://schemas.microsoft.com/office/powerpoint/2010/main" val="2522936038"/>
+      </p:ext>
+    </p:extLst>
+  </p:cSld>
+  <p:clrMapOvr>
+    <a:masterClrMapping/>
+  </p:clrMapOvr>
+</p:sld>
+</file>
+
+<file path=ppt/slides/slide17.xml><?xml version="1.0" encoding="utf-8"?>
+<p:sld xmlns:a="http://schemas.openxmlformats.org/drawingml/2006/main" xmlns:r="http://schemas.openxmlformats.org/officeDocument/2006/relationships" xmlns:p="http://schemas.openxmlformats.org/presentationml/2006/main">
+  <p:cSld>
+    <p:spTree>
+      <p:nvGrpSpPr>
+        <p:cNvPr id="1" name=""/>
+        <p:cNvGrpSpPr/>
+        <p:nvPr/>
+      </p:nvGrpSpPr>
+      <p:grpSpPr>
+        <a:xfrm>
+          <a:off x="0" y="0"/>
+          <a:ext cx="0" cy="0"/>
+          <a:chOff x="0" y="0"/>
+          <a:chExt cx="0" cy="0"/>
+        </a:xfrm>
+      </p:grpSpPr>
+      <p:sp>
+        <p:nvSpPr>
+          <p:cNvPr id="2" name="Titre 1">
+            <a:extLst>
+              <a:ext uri="{FF2B5EF4-FFF2-40B4-BE49-F238E27FC236}">
+                <a16:creationId xmlns:a16="http://schemas.microsoft.com/office/drawing/2014/main" id="{C21CA040-88ED-BD3D-2682-A85A0BC5D025}"/>
+              </a:ext>
+            </a:extLst>
+          </p:cNvPr>
+          <p:cNvSpPr>
+            <a:spLocks noGrp="1"/>
+          </p:cNvSpPr>
+          <p:nvPr>
+            <p:ph type="title"/>
+          </p:nvPr>
+        </p:nvSpPr>
+        <p:spPr/>
+        <p:txBody>
+          <a:bodyPr/>
+          <a:lstStyle/>
+          <a:p>
+            <a:pPr algn="ctr"/>
+            <a:r>
+              <a:rPr lang="fr-FR"/>
+              <a:t>MVP</a:t>
+            </a:r>
+          </a:p>
+        </p:txBody>
+      </p:sp>
+      <p:sp>
+        <p:nvSpPr>
+          <p:cNvPr id="3" name="Espace réservé du numéro de diapositive 2">
+            <a:extLst>
+              <a:ext uri="{FF2B5EF4-FFF2-40B4-BE49-F238E27FC236}">
+                <a16:creationId xmlns:a16="http://schemas.microsoft.com/office/drawing/2014/main" id="{96A73FC7-8360-2B3B-B739-A3F8DD741D42}"/>
+              </a:ext>
+            </a:extLst>
+          </p:cNvPr>
+          <p:cNvSpPr>
+            <a:spLocks noGrp="1"/>
+          </p:cNvSpPr>
+          <p:nvPr>
+            <p:ph type="sldNum" sz="quarter" idx="12"/>
+          </p:nvPr>
+        </p:nvSpPr>
+        <p:spPr/>
+        <p:txBody>
+          <a:bodyPr/>
+          <a:lstStyle/>
+          <a:p>
+            <a:fld id="{C263D6C4-4840-40CC-AC84-17E24B3B7BDE}" type="slidenum">
+              <a:rPr lang="en-US" noProof="0" smtClean="0"/>
+              <a:pPr/>
+              <a:t>17</a:t>
+            </a:fld>
+            <a:endParaRPr lang="en-US" noProof="0"/>
+          </a:p>
+        </p:txBody>
+      </p:sp>
+      <p:pic>
+        <p:nvPicPr>
+          <p:cNvPr id="5" name="Espace réservé du contenu 4" descr="Une image contenant texte, capture d’écran, Police, diagramme&#10;&#10;Le contenu généré par l’IA peut être incorrect.">
+            <a:extLst>
+              <a:ext uri="{FF2B5EF4-FFF2-40B4-BE49-F238E27FC236}">
+                <a16:creationId xmlns:a16="http://schemas.microsoft.com/office/drawing/2014/main" id="{CB212070-1593-2AD2-5F4B-A8B5B9E7D572}"/>
+              </a:ext>
+            </a:extLst>
+          </p:cNvPr>
+          <p:cNvPicPr>
+            <a:picLocks noGrp="1" noChangeAspect="1"/>
+          </p:cNvPicPr>
+          <p:nvPr>
+            <p:ph idx="1"/>
+          </p:nvPr>
+        </p:nvPicPr>
+        <p:blipFill>
+          <a:blip r:embed="rId2"/>
+          <a:stretch>
+            <a:fillRect/>
+          </a:stretch>
+        </p:blipFill>
+        <p:spPr>
+          <a:xfrm>
+            <a:off x="5507115" y="1732047"/>
+            <a:ext cx="6675733" cy="4444916"/>
+          </a:xfrm>
+          <a:prstGeom prst="rect">
+            <a:avLst/>
+          </a:prstGeom>
+        </p:spPr>
+      </p:pic>
+      <p:sp>
+        <p:nvSpPr>
+          <p:cNvPr id="6" name="ZoneTexte 5">
+            <a:extLst>
+              <a:ext uri="{FF2B5EF4-FFF2-40B4-BE49-F238E27FC236}">
+                <a16:creationId xmlns:a16="http://schemas.microsoft.com/office/drawing/2014/main" id="{01B9B5BD-620B-BF61-7C6E-D2CC74B17E3D}"/>
+              </a:ext>
+            </a:extLst>
+          </p:cNvPr>
+          <p:cNvSpPr txBox="1"/>
+          <p:nvPr/>
+        </p:nvSpPr>
+        <p:spPr>
+          <a:xfrm>
+            <a:off x="234285" y="2681053"/>
+            <a:ext cx="5123249" cy="1015663"/>
+          </a:xfrm>
+          <a:prstGeom prst="rect">
+            <a:avLst/>
+          </a:prstGeom>
+          <a:noFill/>
+        </p:spPr>
+        <p:txBody>
+          <a:bodyPr rot="0" spcFirstLastPara="0" vertOverflow="overflow" horzOverflow="overflow" vert="horz" wrap="square" lIns="91440" tIns="45720" rIns="91440" bIns="45720" numCol="1" spcCol="0" rtlCol="0" fromWordArt="0" anchor="t" anchorCtr="0" forceAA="0" compatLnSpc="1">
+            <a:prstTxWarp prst="textNoShape">
+              <a:avLst/>
+            </a:prstTxWarp>
+            <a:spAutoFit/>
+          </a:bodyPr>
+          <a:lstStyle/>
+          <a:p>
+            <a:pPr marL="342900" indent="-342900">
+              <a:buFont typeface="Arial"/>
+              <a:buChar char="•"/>
+            </a:pPr>
+            <a:r>
+              <a:rPr lang="en-US" sz="2000" b="1">
+                <a:solidFill>
+                  <a:srgbClr val="FFFFFF"/>
+                </a:solidFill>
+                <a:cs typeface="Arial"/>
+              </a:rPr>
+              <a:t>MVP (Model-View-Presenter):</a:t>
+            </a:r>
+            <a:r>
+              <a:rPr lang="en-US" sz="2000">
+                <a:solidFill>
+                  <a:srgbClr val="FFFFFF"/>
+                </a:solidFill>
+                <a:cs typeface="Arial"/>
+              </a:rPr>
+              <a:t> Presenter acts as a middleman; better for unit testing.</a:t>
+            </a:r>
+            <a:endParaRPr lang="fr-FR">
+              <a:cs typeface="Arial"/>
+            </a:endParaRPr>
+          </a:p>
+        </p:txBody>
+      </p:sp>
+    </p:spTree>
+    <p:extLst>
+      <p:ext uri="{BB962C8B-B14F-4D97-AF65-F5344CB8AC3E}">
+        <p14:creationId xmlns:p14="http://schemas.microsoft.com/office/powerpoint/2010/main" val="1297010817"/>
+      </p:ext>
+    </p:extLst>
+  </p:cSld>
+  <p:clrMapOvr>
+    <a:masterClrMapping/>
+  </p:clrMapOvr>
+</p:sld>
+</file>
+
+<file path=ppt/slides/slide18.xml><?xml version="1.0" encoding="utf-8"?>
+<p:sld xmlns:a="http://schemas.openxmlformats.org/drawingml/2006/main" xmlns:r="http://schemas.openxmlformats.org/officeDocument/2006/relationships" xmlns:p="http://schemas.openxmlformats.org/presentationml/2006/main">
+  <p:cSld>
+    <p:spTree>
+      <p:nvGrpSpPr>
+        <p:cNvPr id="1" name=""/>
+        <p:cNvGrpSpPr/>
+        <p:nvPr/>
+      </p:nvGrpSpPr>
+      <p:grpSpPr>
+        <a:xfrm>
+          <a:off x="0" y="0"/>
+          <a:ext cx="0" cy="0"/>
+          <a:chOff x="0" y="0"/>
+          <a:chExt cx="0" cy="0"/>
+        </a:xfrm>
+      </p:grpSpPr>
+      <p:sp>
+        <p:nvSpPr>
+          <p:cNvPr id="2" name="Titre 1">
+            <a:extLst>
+              <a:ext uri="{FF2B5EF4-FFF2-40B4-BE49-F238E27FC236}">
+                <a16:creationId xmlns:a16="http://schemas.microsoft.com/office/drawing/2014/main" id="{51FE138A-3225-5EB0-9DBE-0C35001FA5A0}"/>
+              </a:ext>
+            </a:extLst>
+          </p:cNvPr>
+          <p:cNvSpPr>
+            <a:spLocks noGrp="1"/>
+          </p:cNvSpPr>
+          <p:nvPr>
+            <p:ph type="title"/>
+          </p:nvPr>
+        </p:nvSpPr>
+        <p:spPr/>
+        <p:txBody>
+          <a:bodyPr/>
+          <a:lstStyle/>
+          <a:p>
+            <a:pPr algn="ctr"/>
+            <a:r>
+              <a:rPr lang="fr-FR"/>
+              <a:t>MVVM</a:t>
+            </a:r>
+          </a:p>
+        </p:txBody>
+      </p:sp>
+      <p:sp>
+        <p:nvSpPr>
+          <p:cNvPr id="3" name="Espace réservé du numéro de diapositive 2">
+            <a:extLst>
+              <a:ext uri="{FF2B5EF4-FFF2-40B4-BE49-F238E27FC236}">
+                <a16:creationId xmlns:a16="http://schemas.microsoft.com/office/drawing/2014/main" id="{704158B4-30D3-247F-7907-5AA30CA8C21A}"/>
+              </a:ext>
+            </a:extLst>
+          </p:cNvPr>
+          <p:cNvSpPr>
+            <a:spLocks noGrp="1"/>
+          </p:cNvSpPr>
+          <p:nvPr>
+            <p:ph type="sldNum" sz="quarter" idx="12"/>
+          </p:nvPr>
+        </p:nvSpPr>
+        <p:spPr/>
+        <p:txBody>
+          <a:bodyPr/>
+          <a:lstStyle/>
+          <a:p>
+            <a:fld id="{C263D6C4-4840-40CC-AC84-17E24B3B7BDE}" type="slidenum">
+              <a:rPr lang="en-US" noProof="0" smtClean="0"/>
+              <a:pPr/>
+              <a:t>18</a:t>
+            </a:fld>
+            <a:endParaRPr lang="en-US" noProof="0"/>
+          </a:p>
+        </p:txBody>
+      </p:sp>
+      <p:pic>
+        <p:nvPicPr>
+          <p:cNvPr id="5" name="Espace réservé du contenu 4" descr="Une image contenant texte, capture d’écran, Police, diagramme&#10;&#10;Le contenu généré par l’IA peut être incorrect.">
+            <a:extLst>
+              <a:ext uri="{FF2B5EF4-FFF2-40B4-BE49-F238E27FC236}">
+                <a16:creationId xmlns:a16="http://schemas.microsoft.com/office/drawing/2014/main" id="{C18339FB-3AE7-AFFD-6A22-D74408153595}"/>
+              </a:ext>
+            </a:extLst>
+          </p:cNvPr>
+          <p:cNvPicPr>
+            <a:picLocks noGrp="1" noChangeAspect="1"/>
+          </p:cNvPicPr>
+          <p:nvPr>
+            <p:ph idx="1"/>
+          </p:nvPr>
+        </p:nvPicPr>
+        <p:blipFill>
+          <a:blip r:embed="rId2"/>
+          <a:stretch>
+            <a:fillRect/>
+          </a:stretch>
+        </p:blipFill>
+        <p:spPr>
+          <a:xfrm>
+            <a:off x="6302642" y="2153444"/>
+            <a:ext cx="5164890" cy="3695700"/>
+          </a:xfrm>
+          <a:prstGeom prst="rect">
+            <a:avLst/>
+          </a:prstGeom>
+        </p:spPr>
+      </p:pic>
+      <p:sp>
+        <p:nvSpPr>
+          <p:cNvPr id="9" name="ZoneTexte 8">
+            <a:extLst>
+              <a:ext uri="{FF2B5EF4-FFF2-40B4-BE49-F238E27FC236}">
+                <a16:creationId xmlns:a16="http://schemas.microsoft.com/office/drawing/2014/main" id="{4CE1EF8D-3B09-8E77-9664-BCCB3A48D1ED}"/>
+              </a:ext>
+            </a:extLst>
+          </p:cNvPr>
+          <p:cNvSpPr txBox="1"/>
+          <p:nvPr/>
+        </p:nvSpPr>
+        <p:spPr>
+          <a:xfrm>
+            <a:off x="22838" y="2727681"/>
+            <a:ext cx="5012880" cy="1882567"/>
+          </a:xfrm>
+          <a:prstGeom prst="rect">
+            <a:avLst/>
+          </a:prstGeom>
+          <a:noFill/>
+        </p:spPr>
+        <p:txBody>
+          <a:bodyPr rot="0" spcFirstLastPara="0" vertOverflow="overflow" horzOverflow="overflow" vert="horz" wrap="square" lIns="91440" tIns="45720" rIns="91440" bIns="45720" numCol="1" spcCol="0" rtlCol="0" fromWordArt="0" anchor="t" anchorCtr="0" forceAA="0" compatLnSpc="1">
+            <a:prstTxWarp prst="textNoShape">
+              <a:avLst/>
+            </a:prstTxWarp>
+            <a:spAutoFit/>
+          </a:bodyPr>
+          <a:lstStyle/>
+          <a:p>
+            <a:pPr marL="285750" indent="-285750">
+              <a:lnSpc>
+                <a:spcPct val="90000"/>
+              </a:lnSpc>
+              <a:spcBef>
+                <a:spcPts val="1000"/>
+              </a:spcBef>
+              <a:buFont typeface="Arial"/>
+              <a:buChar char="•"/>
+            </a:pPr>
+            <a:r>
+              <a:rPr lang="en-US" sz="2000" b="1">
+                <a:solidFill>
+                  <a:srgbClr val="FFFFFF"/>
+                </a:solidFill>
+                <a:cs typeface="Arial"/>
+              </a:rPr>
+              <a:t>MVVM (Model-View-</a:t>
+            </a:r>
+            <a:r>
+              <a:rPr lang="en-US" sz="2000" b="1" err="1">
+                <a:solidFill>
+                  <a:srgbClr val="FFFFFF"/>
+                </a:solidFill>
+                <a:cs typeface="Arial"/>
+              </a:rPr>
+              <a:t>ViewModel</a:t>
+            </a:r>
+            <a:r>
+              <a:rPr lang="en-US" sz="2000" b="1">
+                <a:solidFill>
+                  <a:srgbClr val="FFFFFF"/>
+                </a:solidFill>
+                <a:cs typeface="Arial"/>
+              </a:rPr>
+              <a:t>):</a:t>
+            </a:r>
+            <a:r>
+              <a:rPr lang="en-US" sz="2000">
+                <a:solidFill>
+                  <a:srgbClr val="FFFFFF"/>
+                </a:solidFill>
+                <a:cs typeface="Arial"/>
+              </a:rPr>
+              <a:t> Modern standard (Android Jetpack). Uses </a:t>
+            </a:r>
+            <a:r>
+              <a:rPr lang="en-US" sz="2000" b="1">
+                <a:solidFill>
+                  <a:srgbClr val="FFFFFF"/>
+                </a:solidFill>
+                <a:cs typeface="Arial"/>
+              </a:rPr>
+              <a:t>Data Binding</a:t>
+            </a:r>
+            <a:r>
+              <a:rPr lang="en-US" sz="2000">
+                <a:solidFill>
+                  <a:srgbClr val="FFFFFF"/>
+                </a:solidFill>
+                <a:cs typeface="Arial"/>
+              </a:rPr>
+              <a:t> </a:t>
+            </a:r>
+            <a:r>
+              <a:rPr lang="en-US" sz="2000" err="1">
+                <a:solidFill>
+                  <a:srgbClr val="FFFFFF"/>
+                </a:solidFill>
+                <a:cs typeface="Arial"/>
+              </a:rPr>
+              <a:t>tosync</a:t>
+            </a:r>
+            <a:r>
+              <a:rPr lang="en-US" sz="2000">
+                <a:solidFill>
+                  <a:srgbClr val="FFFFFF"/>
+                </a:solidFill>
+                <a:cs typeface="Arial"/>
+              </a:rPr>
+              <a:t> UI and Logic automatically.</a:t>
+            </a:r>
+            <a:endParaRPr lang="en-US" sz="2000">
+              <a:solidFill>
+                <a:srgbClr val="000000"/>
+              </a:solidFill>
+              <a:cs typeface="Arial"/>
+            </a:endParaRPr>
+          </a:p>
+          <a:p>
+            <a:pPr marL="285750" indent="-285750">
+              <a:lnSpc>
+                <a:spcPct val="90000"/>
+              </a:lnSpc>
+              <a:spcBef>
+                <a:spcPts val="1000"/>
+              </a:spcBef>
+              <a:buFont typeface="Arial"/>
+              <a:buChar char="•"/>
+            </a:pPr>
+            <a:endParaRPr lang="en-US" sz="2000">
+              <a:solidFill>
+                <a:srgbClr val="000000"/>
+              </a:solidFill>
+              <a:cs typeface="Arial"/>
+            </a:endParaRPr>
+          </a:p>
+          <a:p>
+            <a:pPr algn="l"/>
+            <a:endParaRPr lang="fr-FR">
+              <a:solidFill>
+                <a:srgbClr val="000000"/>
+              </a:solidFill>
+              <a:cs typeface="Arial"/>
+            </a:endParaRPr>
+          </a:p>
+        </p:txBody>
+      </p:sp>
+    </p:spTree>
+    <p:extLst>
+      <p:ext uri="{BB962C8B-B14F-4D97-AF65-F5344CB8AC3E}">
+        <p14:creationId xmlns:p14="http://schemas.microsoft.com/office/powerpoint/2010/main" val="4081280683"/>
+      </p:ext>
+    </p:extLst>
+  </p:cSld>
+  <p:clrMapOvr>
+    <a:masterClrMapping/>
+  </p:clrMapOvr>
+</p:sld>
+</file>
+
+<file path=ppt/slides/slide19.xml><?xml version="1.0" encoding="utf-8"?>
+<p:sld xmlns:a="http://schemas.openxmlformats.org/drawingml/2006/main" xmlns:r="http://schemas.openxmlformats.org/officeDocument/2006/relationships" xmlns:p="http://schemas.openxmlformats.org/presentationml/2006/main">
+  <p:cSld>
+    <p:spTree>
+      <p:nvGrpSpPr>
+        <p:cNvPr id="1" name=""/>
+        <p:cNvGrpSpPr/>
+        <p:nvPr/>
+      </p:nvGrpSpPr>
+      <p:grpSpPr>
+        <a:xfrm>
+          <a:off x="0" y="0"/>
+          <a:ext cx="0" cy="0"/>
+          <a:chOff x="0" y="0"/>
+          <a:chExt cx="0" cy="0"/>
+        </a:xfrm>
+      </p:grpSpPr>
+      <p:sp>
+        <p:nvSpPr>
           <p:cNvPr id="2" name="Title 1">
             <a:extLst>
               <a:ext uri="{FF2B5EF4-FFF2-40B4-BE49-F238E27FC236}">
-                <a16:creationId xmlns:a16="http://schemas.microsoft.com/office/drawing/2014/main" id="{954F6758-C92E-6908-58B2-CD2D88CAE5CD}"/>
+                <a16:creationId xmlns:a16="http://schemas.microsoft.com/office/drawing/2014/main" id="{51348BA5-1584-F84E-2736-19E9659CCBDF}"/>
               </a:ext>
             </a:extLst>
           </p:cNvPr>
@@ -27023,7 +29881,7 @@
                 <a:ea typeface="+mj-lt"/>
                 <a:cs typeface="+mj-lt"/>
               </a:rPr>
-              <a:t>Conclusion &amp; Key Takeaways</a:t>
+              <a:t>Requirement Engineering (The 5 Stages)</a:t>
             </a:r>
             <a:endParaRPr lang="en-US"/>
           </a:p>
@@ -27037,7 +29895,7 @@
           <p:cNvPr id="3" name="Slide Number Placeholder 2">
             <a:extLst>
               <a:ext uri="{FF2B5EF4-FFF2-40B4-BE49-F238E27FC236}">
-                <a16:creationId xmlns:a16="http://schemas.microsoft.com/office/drawing/2014/main" id="{59194012-71B5-4D70-2D20-67C1578466EC}"/>
+                <a16:creationId xmlns:a16="http://schemas.microsoft.com/office/drawing/2014/main" id="{8EFDEAFD-DADB-8F7F-B368-210124ED4C0D}"/>
               </a:ext>
             </a:extLst>
           </p:cNvPr>
@@ -27056,7 +29914,7 @@
             <a:fld id="{C263D6C4-4840-40CC-AC84-17E24B3B7BDE}" type="slidenum">
               <a:rPr lang="en-US" noProof="0" smtClean="0"/>
               <a:pPr/>
-              <a:t>11</a:t>
+              <a:t>19</a:t>
             </a:fld>
             <a:endParaRPr lang="en-US" noProof="0"/>
           </a:p>
@@ -27067,7 +29925,7 @@
           <p:cNvPr id="4" name="Content Placeholder 3">
             <a:extLst>
               <a:ext uri="{FF2B5EF4-FFF2-40B4-BE49-F238E27FC236}">
-                <a16:creationId xmlns:a16="http://schemas.microsoft.com/office/drawing/2014/main" id="{2CA8E04D-525E-1338-F666-D78D99B23BC7}"/>
+                <a16:creationId xmlns:a16="http://schemas.microsoft.com/office/drawing/2014/main" id="{0C4045AE-80EC-6677-1C76-45869F186E5E}"/>
               </a:ext>
             </a:extLst>
           </p:cNvPr>
@@ -27087,122 +29945,147 @@
           <a:p>
             <a:r>
               <a:rPr lang="en-US" sz="2000" b="1">
-                <a:cs typeface="Arial"/>
-              </a:rPr>
-              <a:t>Architecture Over Code:</a:t>
-            </a:r>
-            <a:r>
-              <a:rPr lang="en-US" sz="2000">
-                <a:cs typeface="Arial"/>
-              </a:rPr>
-              <a:t> Choosing the right pattern (</a:t>
-            </a:r>
-            <a:r>
-              <a:rPr lang="en-US" sz="2000" b="1">
-                <a:cs typeface="Arial"/>
-              </a:rPr>
-              <a:t>MVVM/MVP</a:t>
-            </a:r>
-            <a:r>
-              <a:rPr lang="en-US" sz="2000">
-                <a:cs typeface="Arial"/>
-              </a:rPr>
-              <a:t>) is the foundation for building scalable, easy-to-maintain applications.</a:t>
-            </a:r>
-            <a:br>
-              <a:rPr lang="en-US" sz="2000">
-                <a:cs typeface="Arial"/>
-              </a:rPr>
-            </a:br>
-            <a:endParaRPr lang="en-US" sz="2000">
-              <a:cs typeface="Arial"/>
-            </a:endParaRPr>
-          </a:p>
-          <a:p>
-            <a:r>
-              <a:rPr lang="en-US" sz="2000" b="1">
                 <a:ea typeface="+mn-lt"/>
                 <a:cs typeface="+mn-lt"/>
               </a:rPr>
-              <a:t>The Cross-Platform Edge:</a:t>
+              <a:t>Elicitation:</a:t>
             </a:r>
             <a:r>
               <a:rPr lang="en-US" sz="2000">
                 <a:ea typeface="+mn-lt"/>
                 <a:cs typeface="+mn-lt"/>
               </a:rPr>
-              <a:t> Frameworks like </a:t>
+              <a:t> Interviews and user research.</a:t>
+            </a:r>
+            <a:endParaRPr lang="en-US" sz="2000">
+              <a:cs typeface="Arial"/>
+            </a:endParaRPr>
+          </a:p>
+          <a:p>
+            <a:endParaRPr lang="en-US" sz="2000">
+              <a:ea typeface="+mn-lt"/>
+              <a:cs typeface="+mn-lt"/>
+            </a:endParaRPr>
+          </a:p>
+          <a:p>
+            <a:r>
+              <a:rPr lang="en-US" sz="2000" b="1">
+                <a:ea typeface="+mn-lt"/>
+                <a:cs typeface="+mn-lt"/>
+              </a:rPr>
+              <a:t>Analysis:</a:t>
+            </a:r>
+            <a:r>
+              <a:rPr lang="en-US" sz="2000">
+                <a:ea typeface="+mn-lt"/>
+                <a:cs typeface="+mn-lt"/>
+              </a:rPr>
+              <a:t> Feasibility studies and "Must-have" vs. "Nice-to-have" (MVP).</a:t>
+            </a:r>
+            <a:endParaRPr lang="en-US" sz="2000">
+              <a:cs typeface="Arial"/>
+            </a:endParaRPr>
+          </a:p>
+          <a:p>
+            <a:endParaRPr lang="en-US" sz="2000">
+              <a:ea typeface="+mn-lt"/>
+              <a:cs typeface="+mn-lt"/>
+            </a:endParaRPr>
+          </a:p>
+          <a:p>
+            <a:r>
+              <a:rPr lang="en-US" sz="2000" b="1">
+                <a:ea typeface="+mn-lt"/>
+                <a:cs typeface="+mn-lt"/>
+              </a:rPr>
+              <a:t>Specification:</a:t>
+            </a:r>
+            <a:r>
+              <a:rPr lang="en-US" sz="2000">
+                <a:ea typeface="+mn-lt"/>
+                <a:cs typeface="+mn-lt"/>
+              </a:rPr>
+              <a:t> Documenting User Stories and Functional requirements.</a:t>
+            </a:r>
+            <a:endParaRPr lang="en-US" sz="2000">
+              <a:cs typeface="Arial"/>
+            </a:endParaRPr>
+          </a:p>
+          <a:p>
+            <a:endParaRPr lang="en-US" sz="2000">
+              <a:ea typeface="+mn-lt"/>
+              <a:cs typeface="+mn-lt"/>
+            </a:endParaRPr>
+          </a:p>
+          <a:p>
+            <a:r>
+              <a:rPr lang="en-US" sz="2000" b="1">
+                <a:ea typeface="+mn-lt"/>
+                <a:cs typeface="+mn-lt"/>
+              </a:rPr>
+              <a:t>Validation:</a:t>
+            </a:r>
+            <a:r>
+              <a:rPr lang="en-US" sz="2000">
+                <a:ea typeface="+mn-lt"/>
+                <a:cs typeface="+mn-lt"/>
+              </a:rPr>
+              <a:t> Prototyping in </a:t>
             </a:r>
             <a:r>
               <a:rPr lang="en-US" sz="2000" b="1">
                 <a:ea typeface="+mn-lt"/>
                 <a:cs typeface="+mn-lt"/>
               </a:rPr>
-              <a:t>Flutter</a:t>
+              <a:t>Figma</a:t>
             </a:r>
             <a:r>
               <a:rPr lang="en-US" sz="2000">
                 <a:ea typeface="+mn-lt"/>
                 <a:cs typeface="+mn-lt"/>
               </a:rPr>
-              <a:t> and </a:t>
+              <a:t> before coding.</a:t>
             </a:r>
+            <a:endParaRPr lang="en-US" sz="2000">
+              <a:cs typeface="Arial"/>
+            </a:endParaRPr>
+          </a:p>
+          <a:p>
+            <a:endParaRPr lang="en-US" sz="2000">
+              <a:ea typeface="+mn-lt"/>
+              <a:cs typeface="+mn-lt"/>
+            </a:endParaRPr>
+          </a:p>
+          <a:p>
             <a:r>
               <a:rPr lang="en-US" sz="2000" b="1">
                 <a:ea typeface="+mn-lt"/>
                 <a:cs typeface="+mn-lt"/>
               </a:rPr>
-              <a:t>React Native</a:t>
+              <a:t>Management:</a:t>
             </a:r>
             <a:r>
               <a:rPr lang="en-US" sz="2000">
                 <a:ea typeface="+mn-lt"/>
                 <a:cs typeface="+mn-lt"/>
               </a:rPr>
-              <a:t> provide the ideal balance of performance and cost-efficiency for our local market.</a:t>
+              <a:t> Handling "Scope Creep" and change requests.</a:t>
             </a:r>
-          </a:p>
-          <a:p>
             <a:endParaRPr lang="en-US" sz="2000">
               <a:cs typeface="Arial"/>
             </a:endParaRPr>
           </a:p>
           <a:p>
-            <a:r>
-              <a:rPr lang="en-US" sz="2000" b="1">
-                <a:ea typeface="+mn-lt"/>
-                <a:cs typeface="+mn-lt"/>
-              </a:rPr>
-              <a:t>Precision in Planning:</a:t>
-            </a:r>
-            <a:r>
-              <a:rPr lang="en-US" sz="2000">
-                <a:ea typeface="+mn-lt"/>
-                <a:cs typeface="+mn-lt"/>
-              </a:rPr>
-              <a:t> Strong </a:t>
-            </a:r>
-            <a:r>
-              <a:rPr lang="en-US" sz="2000" b="1">
-                <a:ea typeface="+mn-lt"/>
-                <a:cs typeface="+mn-lt"/>
-              </a:rPr>
-              <a:t>Requirement Engineering</a:t>
-            </a:r>
-            <a:r>
-              <a:rPr lang="en-US" sz="2000">
-                <a:ea typeface="+mn-lt"/>
-                <a:cs typeface="+mn-lt"/>
-              </a:rPr>
-              <a:t> prevents technical debt and ensures the final product effectively solves the user's problem.</a:t>
-            </a:r>
+            <a:endParaRPr lang="en-US" sz="2000">
+              <a:cs typeface="Arial"/>
+            </a:endParaRPr>
           </a:p>
         </p:txBody>
       </p:sp>
     </p:spTree>
     <p:extLst>
       <p:ext uri="{BB962C8B-B14F-4D97-AF65-F5344CB8AC3E}">
-        <p14:creationId xmlns:p14="http://schemas.microsoft.com/office/powerpoint/2010/main" val="1357249329"/>
+        <p14:creationId xmlns:p14="http://schemas.microsoft.com/office/powerpoint/2010/main" val="3626490682"/>
       </p:ext>
     </p:extLst>
   </p:cSld>
@@ -27213,153 +30096,6 @@
 </file>
 
 <file path=ppt/slides/slide2.xml><?xml version="1.0" encoding="utf-8"?>
-<p:sld xmlns:a="http://schemas.openxmlformats.org/drawingml/2006/main" xmlns:r="http://schemas.openxmlformats.org/officeDocument/2006/relationships" xmlns:p="http://schemas.openxmlformats.org/presentationml/2006/main">
-  <p:cSld>
-    <p:spTree>
-      <p:nvGrpSpPr>
-        <p:cNvPr id="1" name=""/>
-        <p:cNvGrpSpPr/>
-        <p:nvPr/>
-      </p:nvGrpSpPr>
-      <p:grpSpPr>
-        <a:xfrm>
-          <a:off x="0" y="0"/>
-          <a:ext cx="0" cy="0"/>
-          <a:chOff x="0" y="0"/>
-          <a:chExt cx="0" cy="0"/>
-        </a:xfrm>
-      </p:grpSpPr>
-      <p:sp>
-        <p:nvSpPr>
-          <p:cNvPr id="2" name="Text Placeholder 1">
-            <a:extLst>
-              <a:ext uri="{FF2B5EF4-FFF2-40B4-BE49-F238E27FC236}">
-                <a16:creationId xmlns:a16="http://schemas.microsoft.com/office/drawing/2014/main" id="{2A2EA8EC-853F-1A87-7D23-C6BA5FAD6D81}"/>
-              </a:ext>
-            </a:extLst>
-          </p:cNvPr>
-          <p:cNvSpPr>
-            <a:spLocks noGrp="1"/>
-          </p:cNvSpPr>
-          <p:nvPr>
-            <p:ph type="body" idx="1"/>
-          </p:nvPr>
-        </p:nvSpPr>
-        <p:spPr>
-          <a:xfrm>
-            <a:off x="2391569" y="4754880"/>
-            <a:ext cx="6803136" cy="996791"/>
-          </a:xfrm>
-        </p:spPr>
-        <p:txBody>
-          <a:bodyPr vert="horz" lIns="91440" tIns="45720" rIns="91440" bIns="45720" rtlCol="0" anchor="t">
-            <a:noAutofit/>
-          </a:bodyPr>
-          <a:lstStyle/>
-          <a:p>
-            <a:pPr algn="ctr"/>
-            <a:r>
-              <a:rPr lang="en-US" sz="2800">
-                <a:ea typeface="+mn-lt"/>
-                <a:cs typeface="+mn-lt"/>
-              </a:rPr>
-              <a:t>From Architectural Design to Cost Estimation</a:t>
-            </a:r>
-            <a:endParaRPr lang="en-US" sz="2800"/>
-          </a:p>
-          <a:p>
-            <a:endParaRPr lang="en-US"/>
-          </a:p>
-        </p:txBody>
-      </p:sp>
-      <p:sp>
-        <p:nvSpPr>
-          <p:cNvPr id="3" name="Slide Number Placeholder 2">
-            <a:extLst>
-              <a:ext uri="{FF2B5EF4-FFF2-40B4-BE49-F238E27FC236}">
-                <a16:creationId xmlns:a16="http://schemas.microsoft.com/office/drawing/2014/main" id="{65691E39-21BF-FE8D-ADCE-CA3AB28F2997}"/>
-              </a:ext>
-            </a:extLst>
-          </p:cNvPr>
-          <p:cNvSpPr>
-            <a:spLocks noGrp="1"/>
-          </p:cNvSpPr>
-          <p:nvPr>
-            <p:ph type="sldNum" sz="quarter" idx="12"/>
-          </p:nvPr>
-        </p:nvSpPr>
-        <p:spPr/>
-        <p:txBody>
-          <a:bodyPr/>
-          <a:lstStyle/>
-          <a:p>
-            <a:fld id="{C263D6C4-4840-40CC-AC84-17E24B3B7BDE}" type="slidenum">
-              <a:rPr lang="en-US" noProof="0" smtClean="0"/>
-              <a:pPr/>
-              <a:t>2</a:t>
-            </a:fld>
-            <a:endParaRPr lang="en-US" noProof="0"/>
-          </a:p>
-        </p:txBody>
-      </p:sp>
-      <p:sp>
-        <p:nvSpPr>
-          <p:cNvPr id="4" name="Title 3">
-            <a:extLst>
-              <a:ext uri="{FF2B5EF4-FFF2-40B4-BE49-F238E27FC236}">
-                <a16:creationId xmlns:a16="http://schemas.microsoft.com/office/drawing/2014/main" id="{BDE7664C-8919-1A47-C494-29A280B46FDB}"/>
-              </a:ext>
-            </a:extLst>
-          </p:cNvPr>
-          <p:cNvSpPr>
-            <a:spLocks noGrp="1"/>
-          </p:cNvSpPr>
-          <p:nvPr>
-            <p:ph type="title"/>
-          </p:nvPr>
-        </p:nvSpPr>
-        <p:spPr>
-          <a:xfrm>
-            <a:off x="2034635" y="350046"/>
-            <a:ext cx="7781544" cy="4109460"/>
-          </a:xfrm>
-        </p:spPr>
-        <p:txBody>
-          <a:bodyPr>
-            <a:normAutofit/>
-          </a:bodyPr>
-          <a:lstStyle/>
-          <a:p>
-            <a:pPr algn="ctr"/>
-            <a:r>
-              <a:rPr lang="en-US" sz="6600" b="0">
-                <a:ea typeface="+mj-lt"/>
-                <a:cs typeface="+mj-lt"/>
-              </a:rPr>
-              <a:t>Comprehensive Mobile App Development</a:t>
-            </a:r>
-            <a:endParaRPr lang="en-US" sz="6600"/>
-          </a:p>
-          <a:p>
-            <a:pPr algn="ctr"/>
-            <a:endParaRPr lang="en-US" sz="6600"/>
-          </a:p>
-        </p:txBody>
-      </p:sp>
-    </p:spTree>
-    <p:extLst>
-      <p:ext uri="{BB962C8B-B14F-4D97-AF65-F5344CB8AC3E}">
-        <p14:creationId xmlns:p14="http://schemas.microsoft.com/office/powerpoint/2010/main" val="2834416146"/>
-      </p:ext>
-    </p:extLst>
-  </p:cSld>
-  <p:clrMapOvr>
-    <a:masterClrMapping/>
-  </p:clrMapOvr>
-</p:sld>
-</file>
-
-<file path=ppt/slides/slide3.xml><?xml version="1.0" encoding="utf-8"?>
 <p:sld xmlns:a="http://schemas.openxmlformats.org/drawingml/2006/main" xmlns:r="http://schemas.openxmlformats.org/officeDocument/2006/relationships" xmlns:p="http://schemas.openxmlformats.org/presentationml/2006/main">
   <p:cSld>
     <p:spTree>
@@ -27400,7 +30136,7 @@
             <a:fld id="{C263D6C4-4840-40CC-AC84-17E24B3B7BDE}" type="slidenum">
               <a:rPr lang="en-US" noProof="0" smtClean="0"/>
               <a:pPr/>
-              <a:t>3</a:t>
+              <a:t>2</a:t>
             </a:fld>
             <a:endParaRPr lang="en-US" noProof="0"/>
           </a:p>
@@ -28104,7 +30840,494 @@
 </p:sld>
 </file>
 
-<file path=ppt/slides/slide4.xml><?xml version="1.0" encoding="utf-8"?>
+<file path=ppt/slides/slide20.xml><?xml version="1.0" encoding="utf-8"?>
+<p:sld xmlns:a="http://schemas.openxmlformats.org/drawingml/2006/main" xmlns:r="http://schemas.openxmlformats.org/officeDocument/2006/relationships" xmlns:p="http://schemas.openxmlformats.org/presentationml/2006/main">
+  <p:cSld>
+    <p:spTree>
+      <p:nvGrpSpPr>
+        <p:cNvPr id="1" name=""/>
+        <p:cNvGrpSpPr/>
+        <p:nvPr/>
+      </p:nvGrpSpPr>
+      <p:grpSpPr>
+        <a:xfrm>
+          <a:off x="0" y="0"/>
+          <a:ext cx="0" cy="0"/>
+          <a:chOff x="0" y="0"/>
+          <a:chExt cx="0" cy="0"/>
+        </a:xfrm>
+      </p:grpSpPr>
+      <p:sp>
+        <p:nvSpPr>
+          <p:cNvPr id="2" name="Title 1">
+            <a:extLst>
+              <a:ext uri="{FF2B5EF4-FFF2-40B4-BE49-F238E27FC236}">
+                <a16:creationId xmlns:a16="http://schemas.microsoft.com/office/drawing/2014/main" id="{B170ADED-37EE-C4FF-50A1-B14374238D37}"/>
+              </a:ext>
+            </a:extLst>
+          </p:cNvPr>
+          <p:cNvSpPr>
+            <a:spLocks noGrp="1"/>
+          </p:cNvSpPr>
+          <p:nvPr>
+            <p:ph type="title"/>
+          </p:nvPr>
+        </p:nvSpPr>
+        <p:spPr>
+          <a:xfrm>
+            <a:off x="444500" y="542925"/>
+            <a:ext cx="11214100" cy="978729"/>
+          </a:xfrm>
+        </p:spPr>
+        <p:txBody>
+          <a:bodyPr/>
+          <a:lstStyle/>
+          <a:p>
+            <a:r>
+              <a:rPr lang="en-US" b="0">
+                <a:ea typeface="+mj-lt"/>
+                <a:cs typeface="+mj-lt"/>
+              </a:rPr>
+              <a:t>Cost Estimation in Cameroon (XAF)</a:t>
+            </a:r>
+            <a:endParaRPr lang="en-US"/>
+          </a:p>
+          <a:p>
+            <a:endParaRPr lang="en-US"/>
+          </a:p>
+        </p:txBody>
+      </p:sp>
+      <p:sp>
+        <p:nvSpPr>
+          <p:cNvPr id="3" name="Slide Number Placeholder 2">
+            <a:extLst>
+              <a:ext uri="{FF2B5EF4-FFF2-40B4-BE49-F238E27FC236}">
+                <a16:creationId xmlns:a16="http://schemas.microsoft.com/office/drawing/2014/main" id="{038BCB6D-44FF-55EA-C91D-7C29D69E8474}"/>
+              </a:ext>
+            </a:extLst>
+          </p:cNvPr>
+          <p:cNvSpPr>
+            <a:spLocks noGrp="1"/>
+          </p:cNvSpPr>
+          <p:nvPr>
+            <p:ph type="sldNum" sz="quarter" idx="12"/>
+          </p:nvPr>
+        </p:nvSpPr>
+        <p:spPr/>
+        <p:txBody>
+          <a:bodyPr/>
+          <a:lstStyle/>
+          <a:p>
+            <a:fld id="{C263D6C4-4840-40CC-AC84-17E24B3B7BDE}" type="slidenum">
+              <a:rPr lang="en-US" noProof="0" smtClean="0"/>
+              <a:pPr/>
+              <a:t>20</a:t>
+            </a:fld>
+            <a:endParaRPr lang="en-US" noProof="0"/>
+          </a:p>
+        </p:txBody>
+      </p:sp>
+      <p:sp>
+        <p:nvSpPr>
+          <p:cNvPr id="4" name="Content Placeholder 3">
+            <a:extLst>
+              <a:ext uri="{FF2B5EF4-FFF2-40B4-BE49-F238E27FC236}">
+                <a16:creationId xmlns:a16="http://schemas.microsoft.com/office/drawing/2014/main" id="{B8FD5EE2-2259-4CB2-1BF6-A3228B2B47D9}"/>
+              </a:ext>
+            </a:extLst>
+          </p:cNvPr>
+          <p:cNvSpPr>
+            <a:spLocks noGrp="1"/>
+          </p:cNvSpPr>
+          <p:nvPr>
+            <p:ph idx="1"/>
+          </p:nvPr>
+        </p:nvSpPr>
+        <p:spPr/>
+        <p:txBody>
+          <a:bodyPr vert="horz" lIns="91440" tIns="45720" rIns="91440" bIns="45720" rtlCol="0" anchor="t">
+            <a:normAutofit/>
+          </a:bodyPr>
+          <a:lstStyle/>
+          <a:p>
+            <a:r>
+              <a:rPr lang="en-US" sz="2000" b="1">
+                <a:ea typeface="+mn-lt"/>
+                <a:cs typeface="+mn-lt"/>
+              </a:rPr>
+              <a:t>Simple/MVP:</a:t>
+            </a:r>
+            <a:r>
+              <a:rPr lang="en-US" sz="2000">
+                <a:ea typeface="+mn-lt"/>
+                <a:cs typeface="+mn-lt"/>
+              </a:rPr>
+              <a:t> 300,000 – 500,000 FCFA.</a:t>
+            </a:r>
+            <a:endParaRPr lang="en-US" sz="2000">
+              <a:cs typeface="Arial"/>
+            </a:endParaRPr>
+          </a:p>
+          <a:p>
+            <a:endParaRPr lang="en-US" sz="2000">
+              <a:ea typeface="+mn-lt"/>
+              <a:cs typeface="+mn-lt"/>
+            </a:endParaRPr>
+          </a:p>
+          <a:p>
+            <a:r>
+              <a:rPr lang="en-US" sz="2000" b="1">
+                <a:ea typeface="+mn-lt"/>
+                <a:cs typeface="+mn-lt"/>
+              </a:rPr>
+              <a:t>Medium (with Momo/OM):</a:t>
+            </a:r>
+            <a:r>
+              <a:rPr lang="en-US" sz="2000">
+                <a:ea typeface="+mn-lt"/>
+                <a:cs typeface="+mn-lt"/>
+              </a:rPr>
+              <a:t> 500,000 – 1,000,000 FCFA.</a:t>
+            </a:r>
+            <a:endParaRPr lang="en-US" sz="2000">
+              <a:cs typeface="Arial"/>
+            </a:endParaRPr>
+          </a:p>
+          <a:p>
+            <a:endParaRPr lang="en-US" sz="2000">
+              <a:ea typeface="+mn-lt"/>
+              <a:cs typeface="+mn-lt"/>
+            </a:endParaRPr>
+          </a:p>
+          <a:p>
+            <a:r>
+              <a:rPr lang="en-US" sz="2000" b="1">
+                <a:ea typeface="+mn-lt"/>
+                <a:cs typeface="+mn-lt"/>
+              </a:rPr>
+              <a:t>Complex/Enterprise:</a:t>
+            </a:r>
+            <a:r>
+              <a:rPr lang="en-US" sz="2000">
+                <a:ea typeface="+mn-lt"/>
+                <a:cs typeface="+mn-lt"/>
+              </a:rPr>
+              <a:t> 1,000,000+ FCFA.</a:t>
+            </a:r>
+            <a:endParaRPr lang="en-US" sz="2000">
+              <a:cs typeface="Arial"/>
+            </a:endParaRPr>
+          </a:p>
+          <a:p>
+            <a:endParaRPr lang="en-US" sz="2000">
+              <a:ea typeface="+mn-lt"/>
+              <a:cs typeface="+mn-lt"/>
+            </a:endParaRPr>
+          </a:p>
+          <a:p>
+            <a:r>
+              <a:rPr lang="en-US" sz="2000" b="1">
+                <a:ea typeface="+mn-lt"/>
+                <a:cs typeface="+mn-lt"/>
+              </a:rPr>
+              <a:t>Key Factors:</a:t>
+            </a:r>
+            <a:r>
+              <a:rPr lang="en-US" sz="2000">
+                <a:ea typeface="+mn-lt"/>
+                <a:cs typeface="+mn-lt"/>
+              </a:rPr>
+              <a:t> Number of screens, backend complexity, and third-party integrations.</a:t>
+            </a:r>
+            <a:endParaRPr lang="en-US" sz="2000">
+              <a:cs typeface="Arial"/>
+            </a:endParaRPr>
+          </a:p>
+        </p:txBody>
+      </p:sp>
+    </p:spTree>
+    <p:extLst>
+      <p:ext uri="{BB962C8B-B14F-4D97-AF65-F5344CB8AC3E}">
+        <p14:creationId xmlns:p14="http://schemas.microsoft.com/office/powerpoint/2010/main" val="1133137305"/>
+      </p:ext>
+    </p:extLst>
+  </p:cSld>
+  <p:clrMapOvr>
+    <a:masterClrMapping/>
+  </p:clrMapOvr>
+</p:sld>
+</file>
+
+<file path=ppt/slides/slide21.xml><?xml version="1.0" encoding="utf-8"?>
+<p:sld xmlns:a="http://schemas.openxmlformats.org/drawingml/2006/main" xmlns:r="http://schemas.openxmlformats.org/officeDocument/2006/relationships" xmlns:p="http://schemas.openxmlformats.org/presentationml/2006/main">
+  <p:cSld>
+    <p:spTree>
+      <p:nvGrpSpPr>
+        <p:cNvPr id="1" name=""/>
+        <p:cNvGrpSpPr/>
+        <p:nvPr/>
+      </p:nvGrpSpPr>
+      <p:grpSpPr>
+        <a:xfrm>
+          <a:off x="0" y="0"/>
+          <a:ext cx="0" cy="0"/>
+          <a:chOff x="0" y="0"/>
+          <a:chExt cx="0" cy="0"/>
+        </a:xfrm>
+      </p:grpSpPr>
+      <p:sp>
+        <p:nvSpPr>
+          <p:cNvPr id="2" name="Title 1">
+            <a:extLst>
+              <a:ext uri="{FF2B5EF4-FFF2-40B4-BE49-F238E27FC236}">
+                <a16:creationId xmlns:a16="http://schemas.microsoft.com/office/drawing/2014/main" id="{954F6758-C92E-6908-58B2-CD2D88CAE5CD}"/>
+              </a:ext>
+            </a:extLst>
+          </p:cNvPr>
+          <p:cNvSpPr>
+            <a:spLocks noGrp="1"/>
+          </p:cNvSpPr>
+          <p:nvPr>
+            <p:ph type="title"/>
+          </p:nvPr>
+        </p:nvSpPr>
+        <p:spPr>
+          <a:xfrm>
+            <a:off x="444500" y="542925"/>
+            <a:ext cx="11214100" cy="978729"/>
+          </a:xfrm>
+        </p:spPr>
+        <p:txBody>
+          <a:bodyPr/>
+          <a:lstStyle/>
+          <a:p>
+            <a:r>
+              <a:rPr lang="en-US" b="0" dirty="0">
+                <a:ea typeface="+mj-lt"/>
+                <a:cs typeface="+mj-lt"/>
+              </a:rPr>
+              <a:t>Conclusion &amp; Key Takeaways</a:t>
+            </a:r>
+            <a:endParaRPr lang="en-US" dirty="0"/>
+          </a:p>
+          <a:p>
+            <a:endParaRPr lang="en-US" dirty="0"/>
+          </a:p>
+        </p:txBody>
+      </p:sp>
+      <p:sp>
+        <p:nvSpPr>
+          <p:cNvPr id="3" name="Slide Number Placeholder 2">
+            <a:extLst>
+              <a:ext uri="{FF2B5EF4-FFF2-40B4-BE49-F238E27FC236}">
+                <a16:creationId xmlns:a16="http://schemas.microsoft.com/office/drawing/2014/main" id="{59194012-71B5-4D70-2D20-67C1578466EC}"/>
+              </a:ext>
+            </a:extLst>
+          </p:cNvPr>
+          <p:cNvSpPr>
+            <a:spLocks noGrp="1"/>
+          </p:cNvSpPr>
+          <p:nvPr>
+            <p:ph type="sldNum" sz="quarter" idx="12"/>
+          </p:nvPr>
+        </p:nvSpPr>
+        <p:spPr/>
+        <p:txBody>
+          <a:bodyPr/>
+          <a:lstStyle/>
+          <a:p>
+            <a:fld id="{C263D6C4-4840-40CC-AC84-17E24B3B7BDE}" type="slidenum">
+              <a:rPr lang="en-US" noProof="0" smtClean="0"/>
+              <a:pPr/>
+              <a:t>21</a:t>
+            </a:fld>
+            <a:endParaRPr lang="en-US" noProof="0"/>
+          </a:p>
+        </p:txBody>
+      </p:sp>
+      <p:sp>
+        <p:nvSpPr>
+          <p:cNvPr id="4" name="Content Placeholder 3">
+            <a:extLst>
+              <a:ext uri="{FF2B5EF4-FFF2-40B4-BE49-F238E27FC236}">
+                <a16:creationId xmlns:a16="http://schemas.microsoft.com/office/drawing/2014/main" id="{2CA8E04D-525E-1338-F666-D78D99B23BC7}"/>
+              </a:ext>
+            </a:extLst>
+          </p:cNvPr>
+          <p:cNvSpPr>
+            <a:spLocks noGrp="1"/>
+          </p:cNvSpPr>
+          <p:nvPr>
+            <p:ph idx="1"/>
+          </p:nvPr>
+        </p:nvSpPr>
+        <p:spPr/>
+        <p:txBody>
+          <a:bodyPr vert="horz" lIns="91440" tIns="45720" rIns="91440" bIns="45720" rtlCol="0" anchor="t">
+            <a:normAutofit/>
+          </a:bodyPr>
+          <a:lstStyle/>
+          <a:p>
+            <a:r>
+              <a:rPr lang="en-US" sz="2000" b="1" dirty="0">
+                <a:cs typeface="Arial"/>
+              </a:rPr>
+              <a:t>Architecture Over Code:</a:t>
+            </a:r>
+            <a:r>
+              <a:rPr lang="en-US" sz="2000" dirty="0">
+                <a:cs typeface="Arial"/>
+              </a:rPr>
+              <a:t> Choosing the right pattern (</a:t>
+            </a:r>
+            <a:r>
+              <a:rPr lang="en-US" sz="2000" b="1" dirty="0">
+                <a:cs typeface="Arial"/>
+              </a:rPr>
+              <a:t>MVVM/MVP</a:t>
+            </a:r>
+            <a:r>
+              <a:rPr lang="en-US" sz="2000" dirty="0">
+                <a:cs typeface="Arial"/>
+              </a:rPr>
+              <a:t>) is the foundation for building scalable, easy-to-maintain applications.</a:t>
+            </a:r>
+            <a:br>
+              <a:rPr lang="en-US" sz="2000" dirty="0">
+                <a:cs typeface="Arial"/>
+              </a:rPr>
+            </a:br>
+            <a:endParaRPr lang="en-US" sz="2000" dirty="0">
+              <a:cs typeface="Arial"/>
+            </a:endParaRPr>
+          </a:p>
+          <a:p>
+            <a:r>
+              <a:rPr lang="en-US" sz="2000" b="1" dirty="0">
+                <a:ea typeface="+mn-lt"/>
+                <a:cs typeface="+mn-lt"/>
+              </a:rPr>
+              <a:t>The Cross-Platform Edge:</a:t>
+            </a:r>
+            <a:r>
+              <a:rPr lang="en-US" sz="2000" dirty="0">
+                <a:ea typeface="+mn-lt"/>
+                <a:cs typeface="+mn-lt"/>
+              </a:rPr>
+              <a:t> Frameworks like </a:t>
+            </a:r>
+            <a:r>
+              <a:rPr lang="en-US" sz="2000" b="1" dirty="0">
+                <a:ea typeface="+mn-lt"/>
+                <a:cs typeface="+mn-lt"/>
+              </a:rPr>
+              <a:t>Flutter</a:t>
+            </a:r>
+            <a:r>
+              <a:rPr lang="en-US" sz="2000" dirty="0">
+                <a:ea typeface="+mn-lt"/>
+                <a:cs typeface="+mn-lt"/>
+              </a:rPr>
+              <a:t> and </a:t>
+            </a:r>
+            <a:r>
+              <a:rPr lang="en-US" sz="2000" b="1" dirty="0">
+                <a:ea typeface="+mn-lt"/>
+                <a:cs typeface="+mn-lt"/>
+              </a:rPr>
+              <a:t>React Native</a:t>
+            </a:r>
+            <a:r>
+              <a:rPr lang="en-US" sz="2000" dirty="0">
+                <a:ea typeface="+mn-lt"/>
+                <a:cs typeface="+mn-lt"/>
+              </a:rPr>
+              <a:t> provide the ideal balance of performance and cost-efficiency for our local market.</a:t>
+            </a:r>
+          </a:p>
+          <a:p>
+            <a:endParaRPr lang="en-US" sz="2000" dirty="0">
+              <a:cs typeface="Arial"/>
+            </a:endParaRPr>
+          </a:p>
+          <a:p>
+            <a:r>
+              <a:rPr lang="en-US" sz="2000" b="1" dirty="0">
+                <a:ea typeface="+mn-lt"/>
+                <a:cs typeface="+mn-lt"/>
+              </a:rPr>
+              <a:t>Precision in Planning:</a:t>
+            </a:r>
+            <a:r>
+              <a:rPr lang="en-US" sz="2000" dirty="0">
+                <a:ea typeface="+mn-lt"/>
+                <a:cs typeface="+mn-lt"/>
+              </a:rPr>
+              <a:t> Strong </a:t>
+            </a:r>
+            <a:r>
+              <a:rPr lang="en-US" sz="2000" b="1" dirty="0">
+                <a:ea typeface="+mn-lt"/>
+                <a:cs typeface="+mn-lt"/>
+              </a:rPr>
+              <a:t>Requirement Engineering</a:t>
+            </a:r>
+            <a:r>
+              <a:rPr lang="en-US" sz="2000" dirty="0">
+                <a:ea typeface="+mn-lt"/>
+                <a:cs typeface="+mn-lt"/>
+              </a:rPr>
+              <a:t> prevents technical debt and ensures the final product effectively solves the user's problem.</a:t>
+            </a:r>
+          </a:p>
+        </p:txBody>
+      </p:sp>
+      <p:sp>
+        <p:nvSpPr>
+          <p:cNvPr id="5" name="TextBox 4">
+            <a:extLst>
+              <a:ext uri="{FF2B5EF4-FFF2-40B4-BE49-F238E27FC236}">
+                <a16:creationId xmlns:a16="http://schemas.microsoft.com/office/drawing/2014/main" id="{28405406-BCF3-25D4-D0E9-A3A75BD64432}"/>
+              </a:ext>
+            </a:extLst>
+          </p:cNvPr>
+          <p:cNvSpPr txBox="1"/>
+          <p:nvPr/>
+        </p:nvSpPr>
+        <p:spPr>
+          <a:xfrm>
+            <a:off x="3324314" y="4495088"/>
+            <a:ext cx="184731" cy="369332"/>
+          </a:xfrm>
+          <a:prstGeom prst="rect">
+            <a:avLst/>
+          </a:prstGeom>
+          <a:noFill/>
+        </p:spPr>
+        <p:txBody>
+          <a:bodyPr wrap="none" rtlCol="0">
+            <a:spAutoFit/>
+          </a:bodyPr>
+          <a:lstStyle/>
+          <a:p>
+            <a:endParaRPr lang="en-CM" dirty="0"/>
+          </a:p>
+        </p:txBody>
+      </p:sp>
+    </p:spTree>
+    <p:extLst>
+      <p:ext uri="{BB962C8B-B14F-4D97-AF65-F5344CB8AC3E}">
+        <p14:creationId xmlns:p14="http://schemas.microsoft.com/office/powerpoint/2010/main" val="1357249329"/>
+      </p:ext>
+    </p:extLst>
+  </p:cSld>
+  <p:clrMapOvr>
+    <a:masterClrMapping/>
+  </p:clrMapOvr>
+</p:sld>
+</file>
+
+<file path=ppt/slides/slide3.xml><?xml version="1.0" encoding="utf-8"?>
 <p:sld xmlns:a="http://schemas.openxmlformats.org/drawingml/2006/main" xmlns:r="http://schemas.openxmlformats.org/officeDocument/2006/relationships" xmlns:p="http://schemas.openxmlformats.org/presentationml/2006/main">
   <p:cSld>
     <p:spTree>
@@ -28186,7 +31409,7 @@
             <a:fld id="{C263D6C4-4840-40CC-AC84-17E24B3B7BDE}" type="slidenum">
               <a:rPr lang="en-US" smtClean="0"/>
               <a:pPr/>
-              <a:t>4</a:t>
+              <a:t>3</a:t>
             </a:fld>
             <a:endParaRPr lang="en-US"/>
           </a:p>
@@ -28210,8 +31433,8 @@
         </p:nvSpPr>
         <p:spPr>
           <a:xfrm>
-            <a:off x="519908" y="1515507"/>
-            <a:ext cx="7041405" cy="1421133"/>
+            <a:off x="519908" y="1515508"/>
+            <a:ext cx="7041405" cy="786258"/>
           </a:xfrm>
         </p:spPr>
         <p:txBody>
@@ -28224,72 +31447,60 @@
               <a:buNone/>
             </a:pPr>
             <a:r>
-              <a:rPr lang="fr-FR" sz="2000">
+              <a:rPr lang="fr-FR" sz="2000" dirty="0">
                 <a:cs typeface="Arial"/>
               </a:rPr>
               <a:t>Mobile applications are software programs </a:t>
             </a:r>
             <a:r>
-              <a:rPr lang="fr-FR" sz="2000" err="1">
+              <a:rPr lang="fr-FR" sz="2000" dirty="0" err="1">
                 <a:cs typeface="Arial"/>
               </a:rPr>
               <a:t>developed</a:t>
             </a:r>
             <a:r>
-              <a:rPr lang="fr-FR" sz="2000">
+              <a:rPr lang="fr-FR" sz="2000" dirty="0">
                 <a:cs typeface="Arial"/>
               </a:rPr>
-              <a:t> to </a:t>
+              <a:t> to run on mobile </a:t>
             </a:r>
             <a:r>
-              <a:rPr lang="fr-FR" sz="2000" err="1">
-                <a:cs typeface="Arial"/>
-              </a:rPr>
-              <a:t>run</a:t>
-            </a:r>
-            <a:r>
-              <a:rPr lang="fr-FR" sz="2000">
-                <a:cs typeface="Arial"/>
-              </a:rPr>
-              <a:t> on mobile </a:t>
-            </a:r>
-            <a:r>
-              <a:rPr lang="fr-FR" sz="2000" err="1">
+              <a:rPr lang="fr-FR" sz="2000" dirty="0" err="1">
                 <a:cs typeface="Arial"/>
               </a:rPr>
               <a:t>devices</a:t>
             </a:r>
             <a:r>
-              <a:rPr lang="fr-FR" sz="2000">
+              <a:rPr lang="fr-FR" sz="2000" dirty="0">
                 <a:cs typeface="Arial"/>
               </a:rPr>
               <a:t> </a:t>
             </a:r>
             <a:r>
-              <a:rPr lang="fr-FR" sz="2000" err="1">
+              <a:rPr lang="fr-FR" sz="2000" dirty="0" err="1">
                 <a:cs typeface="Arial"/>
               </a:rPr>
               <a:t>such</a:t>
             </a:r>
             <a:r>
-              <a:rPr lang="fr-FR" sz="2000">
+              <a:rPr lang="fr-FR" sz="2000" dirty="0">
                 <a:cs typeface="Arial"/>
               </a:rPr>
               <a:t> as smartphones and </a:t>
             </a:r>
             <a:r>
-              <a:rPr lang="fr-FR" sz="2000" err="1">
+              <a:rPr lang="fr-FR" sz="2000" dirty="0" err="1">
                 <a:cs typeface="Arial"/>
               </a:rPr>
               <a:t>tablets</a:t>
             </a:r>
             <a:r>
-              <a:rPr lang="fr-FR" sz="2000">
+              <a:rPr lang="fr-FR" sz="2000" dirty="0">
                 <a:cs typeface="Arial"/>
               </a:rPr>
               <a:t>.</a:t>
             </a:r>
-            <a:endParaRPr lang="en-US" sz="2000">
+            <a:endParaRPr lang="en-US" sz="2000" dirty="0">
               <a:cs typeface="Arial"/>
             </a:endParaRPr>
           </a:p>
@@ -28297,49 +31508,9 @@
             <a:pPr marL="0" indent="0">
               <a:buNone/>
             </a:pPr>
-            <a:r>
-              <a:rPr lang="fr-FR" sz="2000">
-                <a:cs typeface="Arial"/>
-              </a:rPr>
-              <a:t>
-</a:t>
-            </a:r>
-            <a:r>
-              <a:rPr lang="fr-FR" sz="2000" err="1">
-                <a:cs typeface="Arial"/>
-              </a:rPr>
-              <a:t>They</a:t>
-            </a:r>
-            <a:r>
-              <a:rPr lang="fr-FR" sz="2000">
-                <a:cs typeface="Arial"/>
-              </a:rPr>
-              <a:t> are </a:t>
-            </a:r>
-            <a:r>
-              <a:rPr lang="fr-FR" sz="2000" err="1">
-                <a:cs typeface="Arial"/>
-              </a:rPr>
-              <a:t>classified</a:t>
-            </a:r>
-            <a:r>
-              <a:rPr lang="fr-FR" sz="2000">
-                <a:cs typeface="Arial"/>
-              </a:rPr>
-              <a:t> </a:t>
-            </a:r>
-            <a:r>
-              <a:rPr lang="fr-FR" sz="2000" err="1">
-                <a:cs typeface="Arial"/>
-              </a:rPr>
-              <a:t>based</a:t>
-            </a:r>
-            <a:r>
-              <a:rPr lang="fr-FR" sz="2000">
-                <a:cs typeface="Arial"/>
-              </a:rPr>
-              <a:t> on</a:t>
-            </a:r>
+            <a:endParaRPr lang="fr-FR" sz="2000" dirty="0">
+              <a:cs typeface="Arial"/>
+            </a:endParaRPr>
           </a:p>
         </p:txBody>
       </p:sp>
@@ -28361,8 +31532,8 @@
         </p:nvSpPr>
         <p:spPr>
           <a:xfrm>
-            <a:off x="442802" y="3273982"/>
-            <a:ext cx="6103301" cy="2914964"/>
+            <a:off x="444500" y="3771852"/>
+            <a:ext cx="10444217" cy="2725785"/>
           </a:xfrm>
         </p:spPr>
         <p:txBody>
@@ -28372,78 +31543,319 @@
           <a:lstStyle/>
           <a:p>
             <a:r>
-              <a:rPr lang="fr-FR" b="1" i="1" err="1">
+              <a:rPr lang="fr-FR" b="1" i="1" dirty="0" err="1">
+                <a:latin typeface="Helvetica" pitchFamily="2" charset="0"/>
                 <a:cs typeface="Arial"/>
               </a:rPr>
               <a:t>Development</a:t>
             </a:r>
             <a:r>
-              <a:rPr lang="fr-FR" b="1" i="1">
+              <a:rPr lang="fr-FR" b="1" i="1" dirty="0">
+                <a:latin typeface="Helvetica" pitchFamily="2" charset="0"/>
                 <a:cs typeface="Arial"/>
               </a:rPr>
               <a:t> </a:t>
             </a:r>
             <a:r>
-              <a:rPr lang="fr-FR" b="1" i="1" err="1">
+              <a:rPr lang="fr-FR" b="1" i="1" dirty="0" err="1">
+                <a:latin typeface="Helvetica" pitchFamily="2" charset="0"/>
                 <a:cs typeface="Arial"/>
               </a:rPr>
               <a:t>method</a:t>
             </a:r>
-            <a:endParaRPr lang="en-US" b="1" i="1" err="1"/>
-          </a:p>
-          <a:p>
-            <a:endParaRPr lang="fr-FR" b="1" i="1">
+            <a:r>
+              <a:rPr lang="fr-FR" b="1" i="1" dirty="0">
+                <a:latin typeface="Helvetica" pitchFamily="2" charset="0"/>
+                <a:cs typeface="Arial"/>
+              </a:rPr>
+              <a:t>: </a:t>
+            </a:r>
+            <a:r>
+              <a:rPr lang="en-US" dirty="0"/>
+              <a:t>This refers to how the app is built.</a:t>
+            </a:r>
+            <a:endParaRPr lang="en-US" b="1" i="1" dirty="0">
+              <a:latin typeface="Helvetica" pitchFamily="2" charset="0"/>
+            </a:endParaRPr>
+          </a:p>
+          <a:p>
+            <a:pPr marL="0" indent="0">
+              <a:buNone/>
+            </a:pPr>
+            <a:endParaRPr lang="fr-FR" b="1" i="1" dirty="0">
+              <a:latin typeface="Helvetica" pitchFamily="2" charset="0"/>
               <a:cs typeface="Arial"/>
             </a:endParaRPr>
           </a:p>
           <a:p>
             <a:r>
-              <a:rPr lang="fr-FR" b="1" i="1">
+              <a:rPr lang="fr-FR" b="1" i="1" dirty="0">
+                <a:latin typeface="Helvetica" pitchFamily="2" charset="0"/>
                 <a:cs typeface="Arial"/>
               </a:rPr>
-              <a:t>Platform compatibility</a:t>
+              <a:t>Platform compatibility: This </a:t>
             </a:r>
-            <a:endParaRPr lang="en-US" b="1" i="1">
+            <a:r>
+              <a:rPr lang="fr-FR" b="1" i="1" dirty="0" err="1">
+                <a:latin typeface="Helvetica" pitchFamily="2" charset="0"/>
+                <a:cs typeface="Arial"/>
+              </a:rPr>
+              <a:t>means</a:t>
+            </a:r>
+            <a:r>
+              <a:rPr lang="fr-FR" b="1" i="1" dirty="0">
+                <a:latin typeface="Helvetica" pitchFamily="2" charset="0"/>
+                <a:cs typeface="Arial"/>
+              </a:rPr>
+              <a:t> </a:t>
+            </a:r>
+            <a:r>
+              <a:rPr lang="fr-FR" b="1" i="1" dirty="0" err="1">
+                <a:latin typeface="Helvetica" pitchFamily="2" charset="0"/>
+                <a:cs typeface="Arial"/>
+              </a:rPr>
+              <a:t>which</a:t>
+            </a:r>
+            <a:r>
+              <a:rPr lang="fr-FR" b="1" i="1" dirty="0">
+                <a:latin typeface="Helvetica" pitchFamily="2" charset="0"/>
+                <a:cs typeface="Arial"/>
+              </a:rPr>
+              <a:t> </a:t>
+            </a:r>
+            <a:r>
+              <a:rPr lang="fr-FR" b="1" i="1" dirty="0" err="1">
+                <a:latin typeface="Helvetica" pitchFamily="2" charset="0"/>
+                <a:cs typeface="Arial"/>
+              </a:rPr>
+              <a:t>devices</a:t>
+            </a:r>
+            <a:r>
+              <a:rPr lang="fr-FR" b="1" i="1" dirty="0">
+                <a:latin typeface="Helvetica" pitchFamily="2" charset="0"/>
+                <a:cs typeface="Arial"/>
+              </a:rPr>
+              <a:t> or operating </a:t>
+            </a:r>
+            <a:r>
+              <a:rPr lang="fr-FR" b="1" i="1" dirty="0" err="1">
+                <a:latin typeface="Helvetica" pitchFamily="2" charset="0"/>
+                <a:cs typeface="Arial"/>
+              </a:rPr>
+              <a:t>systems</a:t>
+            </a:r>
+            <a:r>
+              <a:rPr lang="fr-FR" b="1" i="1" dirty="0">
+                <a:latin typeface="Helvetica" pitchFamily="2" charset="0"/>
+                <a:cs typeface="Arial"/>
+              </a:rPr>
+              <a:t> the app can run on.</a:t>
+            </a:r>
+            <a:endParaRPr lang="en-US" b="1" i="1" dirty="0">
+              <a:latin typeface="Helvetica" pitchFamily="2" charset="0"/>
               <a:cs typeface="Arial"/>
             </a:endParaRPr>
           </a:p>
           <a:p>
-            <a:endParaRPr lang="fr-FR" b="1" i="1">
+            <a:endParaRPr lang="fr-FR" b="1" i="1" dirty="0">
+              <a:latin typeface="Helvetica" pitchFamily="2" charset="0"/>
               <a:cs typeface="Arial"/>
             </a:endParaRPr>
           </a:p>
           <a:p>
             <a:r>
-              <a:rPr lang="fr-FR" b="1" i="1">
+              <a:rPr lang="fr-FR" b="1" i="1" dirty="0">
+                <a:latin typeface="Helvetica" pitchFamily="2" charset="0"/>
                 <a:cs typeface="Arial"/>
               </a:rPr>
-              <a:t>Hardware accessibility</a:t>
+              <a:t>Hardware </a:t>
             </a:r>
-            <a:endParaRPr lang="en-US" b="1" i="1">
+            <a:r>
+              <a:rPr lang="fr-FR" b="1" i="1" dirty="0" err="1">
+                <a:latin typeface="Helvetica" pitchFamily="2" charset="0"/>
+                <a:cs typeface="Arial"/>
+              </a:rPr>
+              <a:t>accessibility</a:t>
+            </a:r>
+            <a:r>
+              <a:rPr lang="fr-FR" b="1" i="1" dirty="0">
+                <a:latin typeface="Helvetica" pitchFamily="2" charset="0"/>
+                <a:cs typeface="Arial"/>
+              </a:rPr>
+              <a:t> : This </a:t>
+            </a:r>
+            <a:r>
+              <a:rPr lang="fr-FR" b="1" i="1" dirty="0" err="1">
+                <a:latin typeface="Helvetica" pitchFamily="2" charset="0"/>
+                <a:cs typeface="Arial"/>
+              </a:rPr>
+              <a:t>refers</a:t>
+            </a:r>
+            <a:r>
+              <a:rPr lang="fr-FR" b="1" i="1" dirty="0">
+                <a:latin typeface="Helvetica" pitchFamily="2" charset="0"/>
+                <a:cs typeface="Arial"/>
+              </a:rPr>
+              <a:t> to how </a:t>
+            </a:r>
+            <a:r>
+              <a:rPr lang="fr-FR" b="1" i="1" dirty="0" err="1">
+                <a:latin typeface="Helvetica" pitchFamily="2" charset="0"/>
+                <a:cs typeface="Arial"/>
+              </a:rPr>
+              <a:t>much</a:t>
+            </a:r>
+            <a:r>
+              <a:rPr lang="fr-FR" b="1" i="1" dirty="0">
+                <a:latin typeface="Helvetica" pitchFamily="2" charset="0"/>
+                <a:cs typeface="Arial"/>
+              </a:rPr>
+              <a:t> of the </a:t>
+            </a:r>
+            <a:r>
+              <a:rPr lang="fr-FR" b="1" i="1" dirty="0" err="1">
+                <a:latin typeface="Helvetica" pitchFamily="2" charset="0"/>
+                <a:cs typeface="Arial"/>
+              </a:rPr>
+              <a:t>phone’s</a:t>
+            </a:r>
+            <a:r>
+              <a:rPr lang="fr-FR" b="1" i="1" dirty="0">
+                <a:latin typeface="Helvetica" pitchFamily="2" charset="0"/>
+                <a:cs typeface="Arial"/>
+              </a:rPr>
+              <a:t> hardware the app can use.</a:t>
+            </a:r>
+            <a:endParaRPr lang="en-US" b="1" i="1" dirty="0">
+              <a:latin typeface="Helvetica" pitchFamily="2" charset="0"/>
               <a:cs typeface="Arial"/>
             </a:endParaRPr>
           </a:p>
           <a:p>
-            <a:endParaRPr lang="fr-FR" b="1" i="1">
+            <a:endParaRPr lang="fr-FR" b="1" i="1" dirty="0">
+              <a:latin typeface="Helvetica" pitchFamily="2" charset="0"/>
               <a:cs typeface="Arial"/>
             </a:endParaRPr>
           </a:p>
           <a:p>
+            <a:pPr marL="0" indent="0">
+              <a:buNone/>
+            </a:pPr>
             <a:r>
-              <a:rPr lang="fr-FR" b="1" i="1">
+              <a:rPr lang="fr-FR" b="1" i="1" dirty="0">
+                <a:latin typeface="Helvetica" pitchFamily="2" charset="0"/>
                 <a:cs typeface="Arial"/>
               </a:rPr>
               <a:t>Performance </a:t>
             </a:r>
             <a:r>
-              <a:rPr lang="fr-FR" b="1" i="1" err="1">
+              <a:rPr lang="fr-FR" b="1" i="1" dirty="0" err="1">
+                <a:latin typeface="Helvetica" pitchFamily="2" charset="0"/>
                 <a:cs typeface="Arial"/>
               </a:rPr>
-              <a:t>level</a:t>
+              <a:t>Level</a:t>
             </a:r>
-            <a:endParaRPr lang="en-US" b="1" i="1">
+            <a:r>
+              <a:rPr lang="fr-FR" b="1" i="1" dirty="0">
+                <a:latin typeface="Helvetica" pitchFamily="2" charset="0"/>
+                <a:cs typeface="Arial"/>
+              </a:rPr>
+              <a:t>: This </a:t>
+            </a:r>
+            <a:r>
+              <a:rPr lang="fr-FR" b="1" i="1" dirty="0" err="1">
+                <a:latin typeface="Helvetica" pitchFamily="2" charset="0"/>
+                <a:cs typeface="Arial"/>
+              </a:rPr>
+              <a:t>describes</a:t>
+            </a:r>
+            <a:r>
+              <a:rPr lang="fr-FR" b="1" i="1" dirty="0">
+                <a:latin typeface="Helvetica" pitchFamily="2" charset="0"/>
+                <a:cs typeface="Arial"/>
+              </a:rPr>
+              <a:t> how fast, </a:t>
+            </a:r>
+            <a:r>
+              <a:rPr lang="fr-FR" b="1" i="1" dirty="0" err="1">
+                <a:latin typeface="Helvetica" pitchFamily="2" charset="0"/>
+                <a:cs typeface="Arial"/>
+              </a:rPr>
+              <a:t>smooth</a:t>
+            </a:r>
+            <a:r>
+              <a:rPr lang="fr-FR" b="1" i="1" dirty="0">
+                <a:latin typeface="Helvetica" pitchFamily="2" charset="0"/>
+                <a:cs typeface="Arial"/>
+              </a:rPr>
+              <a:t>, and efficient the app </a:t>
+            </a:r>
+            <a:r>
+              <a:rPr lang="fr-FR" b="1" i="1" dirty="0" err="1">
+                <a:latin typeface="Helvetica" pitchFamily="2" charset="0"/>
+                <a:cs typeface="Arial"/>
+              </a:rPr>
+              <a:t>is</a:t>
+            </a:r>
+            <a:r>
+              <a:rPr lang="fr-FR" b="1" i="1" dirty="0">
+                <a:latin typeface="Helvetica" pitchFamily="2" charset="0"/>
+                <a:cs typeface="Arial"/>
+              </a:rPr>
+              <a:t>.</a:t>
+            </a:r>
+            <a:endParaRPr lang="en-US" b="1" i="1" dirty="0">
+              <a:latin typeface="Helvetica" pitchFamily="2" charset="0"/>
               <a:cs typeface="Arial"/>
             </a:endParaRPr>
+          </a:p>
+          <a:p>
+            <a:pPr marL="0" indent="0">
+              <a:buNone/>
+            </a:pPr>
+            <a:endParaRPr lang="en-US" b="1" i="1" dirty="0">
+              <a:latin typeface="Helvetica" pitchFamily="2" charset="0"/>
+              <a:cs typeface="Arial"/>
+            </a:endParaRPr>
+          </a:p>
+        </p:txBody>
+      </p:sp>
+      <p:sp>
+        <p:nvSpPr>
+          <p:cNvPr id="3" name="TextBox 2">
+            <a:extLst>
+              <a:ext uri="{FF2B5EF4-FFF2-40B4-BE49-F238E27FC236}">
+                <a16:creationId xmlns:a16="http://schemas.microsoft.com/office/drawing/2014/main" id="{B4EA8AD6-4D92-2217-2B48-5370E1450A6F}"/>
+              </a:ext>
+            </a:extLst>
+          </p:cNvPr>
+          <p:cNvSpPr txBox="1"/>
+          <p:nvPr/>
+        </p:nvSpPr>
+        <p:spPr>
+          <a:xfrm>
+            <a:off x="357352" y="2805976"/>
+            <a:ext cx="4635062" cy="461665"/>
+          </a:xfrm>
+          <a:prstGeom prst="rect">
+            <a:avLst/>
+          </a:prstGeom>
+          <a:noFill/>
+        </p:spPr>
+        <p:txBody>
+          <a:bodyPr wrap="square" rtlCol="0">
+            <a:spAutoFit/>
+          </a:bodyPr>
+          <a:lstStyle/>
+          <a:p>
+            <a:r>
+              <a:rPr lang="en-CM" sz="2400" dirty="0">
+                <a:solidFill>
+                  <a:schemeClr val="bg1"/>
+                </a:solidFill>
+              </a:rPr>
+              <a:t>Classified Based On</a:t>
+            </a:r>
           </a:p>
         </p:txBody>
       </p:sp>
@@ -28457,13 +31869,13 @@
   <p:clrMapOvr>
     <a:masterClrMapping/>
   </p:clrMapOvr>
-  <mc:AlternateContent xmlns:mc="http://schemas.openxmlformats.org/markup-compatibility/2006">
-    <mc:Choice xmlns:p14="http://schemas.microsoft.com/office/powerpoint/2010/main" Requires="p14">
+  <mc:AlternateContent xmlns:mc="http://schemas.openxmlformats.org/markup-compatibility/2006" xmlns:p14="http://schemas.microsoft.com/office/powerpoint/2010/main">
+    <mc:Choice Requires="p14">
       <p:transition spd="med" p14:dur="700">
         <p:fade/>
       </p:transition>
     </mc:Choice>
-    <mc:Fallback>
+    <mc:Fallback xmlns="">
       <p:transition spd="med">
         <p:fade/>
       </p:transition>
@@ -28472,7 +31884,7 @@
 </p:sld>
 </file>
 
-<file path=ppt/slides/slide5.xml><?xml version="1.0" encoding="utf-8"?>
+<file path=ppt/slides/slide4.xml><?xml version="1.0" encoding="utf-8"?>
 <p:sld xmlns:a="http://schemas.openxmlformats.org/drawingml/2006/main" xmlns:r="http://schemas.openxmlformats.org/officeDocument/2006/relationships" xmlns:p="http://schemas.openxmlformats.org/presentationml/2006/main">
   <p:cSld>
     <p:bg>
@@ -28515,8 +31927,8 @@
         </p:nvSpPr>
         <p:spPr>
           <a:xfrm>
-            <a:off x="1347314" y="420822"/>
-            <a:ext cx="9893674" cy="1125504"/>
+            <a:off x="3452500" y="420822"/>
+            <a:ext cx="7788487" cy="1219971"/>
           </a:xfrm>
         </p:spPr>
         <p:txBody>
@@ -28525,7 +31937,7 @@
           <a:p>
             <a:pPr algn="ctr"/>
             <a:r>
-              <a:rPr lang="fr-FR" sz="3600" b="0">
+              <a:rPr lang="fr-FR" sz="3600" b="0" dirty="0">
                 <a:solidFill>
                   <a:srgbClr val="FFFFFF"/>
                 </a:solidFill>
@@ -28533,9 +31945,9 @@
                 <a:ea typeface="Tahoma"/>
                 <a:cs typeface="Arial"/>
               </a:rPr>
-              <a:t>Types of Mobile Applications</a:t>
+              <a:t>Types of Mobile Applications (5)</a:t>
             </a:r>
-            <a:endParaRPr lang="fr-FR" sz="3600" b="0">
+            <a:endParaRPr lang="fr-FR" sz="3600" b="0" dirty="0">
               <a:solidFill>
                 <a:srgbClr val="000000"/>
               </a:solidFill>
@@ -28545,7 +31957,7 @@
             </a:endParaRPr>
           </a:p>
           <a:p>
-            <a:endParaRPr lang="fr-FR" sz="2800">
+            <a:endParaRPr lang="fr-FR" sz="2800" dirty="0">
               <a:ea typeface="Tahoma"/>
               <a:cs typeface="Tahoma"/>
             </a:endParaRPr>
@@ -28554,328 +31966,241 @@
       </p:sp>
       <p:sp>
         <p:nvSpPr>
-          <p:cNvPr id="9" name="Subtitle 2">
+          <p:cNvPr id="6" name="TextBox 5">
             <a:extLst>
               <a:ext uri="{FF2B5EF4-FFF2-40B4-BE49-F238E27FC236}">
-                <a16:creationId xmlns:a16="http://schemas.microsoft.com/office/drawing/2014/main" id="{8444E71D-559E-6807-6DDB-E22A80A6DAB2}"/>
+                <a16:creationId xmlns:a16="http://schemas.microsoft.com/office/drawing/2014/main" id="{6AE462C5-2255-CFAB-BC39-27624259067F}"/>
               </a:ext>
             </a:extLst>
           </p:cNvPr>
-          <p:cNvSpPr>
-            <a:spLocks noGrp="1"/>
-          </p:cNvSpPr>
-          <p:nvPr>
-            <p:ph type="subTitle" idx="1"/>
-          </p:nvPr>
+          <p:cNvSpPr txBox="1"/>
+          <p:nvPr/>
         </p:nvSpPr>
         <p:spPr>
           <a:xfrm>
-            <a:off x="2121680" y="1718231"/>
-            <a:ext cx="9113851" cy="4593046"/>
+            <a:off x="-1253386" y="6896896"/>
+            <a:ext cx="3298677" cy="2585323"/>
           </a:xfrm>
+          <a:prstGeom prst="rect">
+            <a:avLst/>
+          </a:prstGeom>
+          <a:noFill/>
         </p:spPr>
         <p:txBody>
-          <a:bodyPr vert="horz" lIns="91440" tIns="45720" rIns="91440" bIns="45720" rtlCol="0" anchor="t">
-            <a:normAutofit lnSpcReduction="10000"/>
+          <a:bodyPr wrap="square" rtlCol="0">
+            <a:spAutoFit/>
           </a:bodyPr>
           <a:lstStyle/>
           <a:p>
             <a:r>
-              <a:rPr lang="fr-FR" b="1">
-                <a:ea typeface="+mn-lt"/>
-                <a:cs typeface="+mn-lt"/>
+              <a:rPr lang="en-US" dirty="0">
+                <a:solidFill>
+                  <a:schemeClr val="bg1"/>
+                </a:solidFill>
               </a:rPr>
-              <a:t>• </a:t>
+              <a:t>⁠ ⁠Native Apps</a:t>
             </a:r>
+          </a:p>
+          <a:p>
+            <a:endParaRPr lang="en-US" dirty="0">
+              <a:solidFill>
+                <a:schemeClr val="bg1"/>
+              </a:solidFill>
+            </a:endParaRPr>
+          </a:p>
+          <a:p>
             <a:r>
-              <a:rPr lang="fr-FR" b="1">
-                <a:ea typeface="Verdana"/>
-                <a:cs typeface="+mn-lt"/>
+              <a:rPr lang="en-US" dirty="0">
+                <a:solidFill>
+                  <a:schemeClr val="bg1"/>
+                </a:solidFill>
               </a:rPr>
-              <a:t>Native Apps:</a:t>
+              <a:t>- Built for one platform (Android or iOS)</a:t>
             </a:r>
           </a:p>
           <a:p>
+            <a:endParaRPr lang="en-US" dirty="0">
+              <a:solidFill>
+                <a:schemeClr val="bg1"/>
+              </a:solidFill>
+            </a:endParaRPr>
+          </a:p>
+          <a:p>
             <a:r>
-              <a:rPr lang="fr-FR">
-                <a:ea typeface="Verdana"/>
-                <a:cs typeface="+mn-lt"/>
+              <a:rPr lang="en-US" dirty="0">
+                <a:solidFill>
+                  <a:schemeClr val="bg1"/>
+                </a:solidFill>
               </a:rPr>
-              <a:t> </a:t>
+              <a:t>- Very fast and reliable</a:t>
             </a:r>
+          </a:p>
+          <a:p>
+            <a:endParaRPr lang="en-US" dirty="0">
+              <a:solidFill>
+                <a:schemeClr val="bg1"/>
+              </a:solidFill>
+            </a:endParaRPr>
+          </a:p>
+          <a:p>
             <a:r>
-              <a:rPr lang="fr-FR" err="1">
-                <a:ea typeface="Verdana"/>
-                <a:cs typeface="+mn-lt"/>
+              <a:rPr lang="en-US" dirty="0">
+                <a:solidFill>
+                  <a:schemeClr val="bg1"/>
+                </a:solidFill>
               </a:rPr>
-              <a:t>Developed</a:t>
+              <a:t>- Expensive to develop</a:t>
             </a:r>
+          </a:p>
+          <a:p>
+            <a:endParaRPr lang="en-US" dirty="0">
+              <a:solidFill>
+                <a:schemeClr val="bg1"/>
+              </a:solidFill>
+            </a:endParaRPr>
+          </a:p>
+        </p:txBody>
+      </p:sp>
+      <p:sp>
+        <p:nvSpPr>
+          <p:cNvPr id="12" name="TextBox 11">
+            <a:extLst>
+              <a:ext uri="{FF2B5EF4-FFF2-40B4-BE49-F238E27FC236}">
+                <a16:creationId xmlns:a16="http://schemas.microsoft.com/office/drawing/2014/main" id="{3BCDC1F1-F9F1-60ED-69C0-261A6B1424DB}"/>
+              </a:ext>
+            </a:extLst>
+          </p:cNvPr>
+          <p:cNvSpPr txBox="1"/>
+          <p:nvPr/>
+        </p:nvSpPr>
+        <p:spPr>
+          <a:xfrm>
+            <a:off x="3170489" y="2204815"/>
+            <a:ext cx="8070498" cy="3785652"/>
+          </a:xfrm>
+          <a:prstGeom prst="rect">
+            <a:avLst/>
+          </a:prstGeom>
+          <a:noFill/>
+        </p:spPr>
+        <p:txBody>
+          <a:bodyPr wrap="square" rtlCol="0">
+            <a:spAutoFit/>
+          </a:bodyPr>
+          <a:lstStyle/>
+          <a:p>
+            <a:pPr marL="342900" indent="-342900">
+              <a:buAutoNum type="arabicPeriod"/>
+            </a:pPr>
             <a:r>
-              <a:rPr lang="fr-FR">
-                <a:ea typeface="Verdana"/>
-                <a:cs typeface="+mn-lt"/>
+              <a:rPr lang="en-US" sz="2400" dirty="0">
+                <a:solidFill>
+                  <a:schemeClr val="bg1"/>
+                </a:solidFill>
               </a:rPr>
-              <a:t> </a:t>
+              <a:t>⁠Native Apps</a:t>
             </a:r>
+          </a:p>
+          <a:p>
+            <a:pPr marL="342900" indent="-342900">
+              <a:buAutoNum type="arabicPeriod"/>
+            </a:pPr>
+            <a:endParaRPr lang="en-US" sz="2400" dirty="0">
+              <a:solidFill>
+                <a:schemeClr val="bg1"/>
+              </a:solidFill>
+            </a:endParaRPr>
+          </a:p>
+          <a:p>
+            <a:pPr marL="342900" indent="-342900">
+              <a:buAutoNum type="arabicPeriod"/>
+            </a:pPr>
             <a:r>
-              <a:rPr lang="fr-FR" err="1">
-                <a:ea typeface="Verdana"/>
-                <a:cs typeface="+mn-lt"/>
+              <a:rPr lang="en-US" sz="2400" dirty="0">
+                <a:solidFill>
+                  <a:schemeClr val="bg1"/>
+                </a:solidFill>
               </a:rPr>
-              <a:t>specifically</a:t>
+              <a:t>Web Apps</a:t>
             </a:r>
+          </a:p>
+          <a:p>
+            <a:pPr marL="342900" indent="-342900">
+              <a:buAutoNum type="arabicPeriod"/>
+            </a:pPr>
+            <a:endParaRPr lang="en-US" sz="2400" dirty="0">
+              <a:solidFill>
+                <a:schemeClr val="bg1"/>
+              </a:solidFill>
+            </a:endParaRPr>
+          </a:p>
+          <a:p>
+            <a:pPr marL="342900" indent="-342900">
+              <a:buAutoNum type="arabicPeriod"/>
+            </a:pPr>
             <a:r>
-              <a:rPr lang="fr-FR">
-                <a:ea typeface="Verdana"/>
-                <a:cs typeface="+mn-lt"/>
+              <a:rPr lang="en-US" sz="2400" dirty="0">
+                <a:solidFill>
+                  <a:schemeClr val="bg1"/>
+                </a:solidFill>
               </a:rPr>
-              <a:t> for one platform (iOS or Android).</a:t>
+              <a:t>⁠Hybrid Apps</a:t>
             </a:r>
           </a:p>
           <a:p>
-            <a:endParaRPr lang="fr-FR">
-              <a:ea typeface="Verdana"/>
-              <a:cs typeface="+mn-lt"/>
+            <a:pPr marL="342900" indent="-342900">
+              <a:buAutoNum type="arabicPeriod"/>
+            </a:pPr>
+            <a:endParaRPr lang="en-US" sz="2400" dirty="0">
+              <a:solidFill>
+                <a:schemeClr val="bg1"/>
+              </a:solidFill>
             </a:endParaRPr>
           </a:p>
           <a:p>
+            <a:pPr marL="342900" indent="-342900">
+              <a:buAutoNum type="arabicPeriod"/>
+            </a:pPr>
             <a:r>
-              <a:rPr lang="fr-FR" b="1">
-                <a:ea typeface="Verdana"/>
-                <a:cs typeface="+mn-lt"/>
+              <a:rPr lang="en-US" sz="2400" dirty="0">
+                <a:solidFill>
+                  <a:schemeClr val="bg1"/>
+                </a:solidFill>
               </a:rPr>
-              <a:t>• Web Apps:</a:t>
+              <a:t>Cross-Platform Apps</a:t>
             </a:r>
           </a:p>
           <a:p>
+            <a:pPr marL="342900" indent="-342900">
+              <a:buAutoNum type="arabicPeriod"/>
+            </a:pPr>
+            <a:endParaRPr lang="en-US" sz="2400" dirty="0">
+              <a:solidFill>
+                <a:schemeClr val="bg1"/>
+              </a:solidFill>
+            </a:endParaRPr>
+          </a:p>
+          <a:p>
+            <a:pPr marL="342900" indent="-342900">
+              <a:buAutoNum type="arabicPeriod"/>
+            </a:pPr>
             <a:r>
-              <a:rPr lang="fr-FR">
-                <a:ea typeface="Verdana"/>
-                <a:cs typeface="+mn-lt"/>
+              <a:rPr lang="en-US" sz="2400" dirty="0">
+                <a:solidFill>
+                  <a:schemeClr val="bg1"/>
+                </a:solidFill>
               </a:rPr>
-              <a:t> Responsive </a:t>
+              <a:t>Cross-Platform Apps</a:t>
             </a:r>
-            <a:r>
-              <a:rPr lang="fr-FR" err="1">
-                <a:ea typeface="Verdana"/>
-                <a:cs typeface="+mn-lt"/>
-              </a:rPr>
-              <a:t>websites</a:t>
-            </a:r>
-            <a:r>
-              <a:rPr lang="fr-FR">
-                <a:ea typeface="Verdana"/>
-                <a:cs typeface="+mn-lt"/>
-              </a:rPr>
-              <a:t> </a:t>
-            </a:r>
-            <a:r>
-              <a:rPr lang="fr-FR" err="1">
-                <a:ea typeface="Verdana"/>
-                <a:cs typeface="+mn-lt"/>
-              </a:rPr>
-              <a:t>accessed</a:t>
-            </a:r>
-            <a:r>
-              <a:rPr lang="fr-FR">
-                <a:ea typeface="Verdana"/>
-                <a:cs typeface="+mn-lt"/>
-              </a:rPr>
-              <a:t> via mobile browsers (HTML5/CSS).</a:t>
-            </a:r>
-          </a:p>
-          <a:p>
-            <a:endParaRPr lang="fr-FR">
-              <a:ea typeface="Verdana"/>
-              <a:cs typeface="+mn-lt"/>
-            </a:endParaRPr>
-          </a:p>
-          <a:p>
-            <a:r>
-              <a:rPr lang="fr-FR" b="1">
-                <a:ea typeface="Verdana"/>
-                <a:cs typeface="+mn-lt"/>
-              </a:rPr>
-              <a:t>• </a:t>
-            </a:r>
-            <a:r>
-              <a:rPr lang="fr-FR" b="1" err="1">
-                <a:ea typeface="Verdana"/>
-                <a:cs typeface="+mn-lt"/>
-              </a:rPr>
-              <a:t>Hybrid</a:t>
-            </a:r>
-            <a:r>
-              <a:rPr lang="fr-FR" b="1">
-                <a:ea typeface="Verdana"/>
-                <a:cs typeface="+mn-lt"/>
-              </a:rPr>
-              <a:t> Apps:</a:t>
-            </a:r>
-          </a:p>
-          <a:p>
-            <a:r>
-              <a:rPr lang="fr-FR">
-                <a:ea typeface="Verdana"/>
-                <a:cs typeface="+mn-lt"/>
-              </a:rPr>
-              <a:t> Web apps </a:t>
-            </a:r>
-            <a:r>
-              <a:rPr lang="fr-FR" err="1">
-                <a:ea typeface="Verdana"/>
-                <a:cs typeface="+mn-lt"/>
-              </a:rPr>
-              <a:t>wrapped</a:t>
-            </a:r>
-            <a:r>
-              <a:rPr lang="fr-FR">
-                <a:ea typeface="Verdana"/>
-                <a:cs typeface="+mn-lt"/>
-              </a:rPr>
-              <a:t> in a native container (</a:t>
-            </a:r>
-            <a:r>
-              <a:rPr lang="fr-FR" err="1">
-                <a:ea typeface="Verdana"/>
-                <a:cs typeface="+mn-lt"/>
-              </a:rPr>
-              <a:t>access</a:t>
-            </a:r>
-            <a:r>
-              <a:rPr lang="fr-FR">
-                <a:ea typeface="Verdana"/>
-                <a:cs typeface="+mn-lt"/>
-              </a:rPr>
-              <a:t> to </a:t>
-            </a:r>
-            <a:r>
-              <a:rPr lang="fr-FR" err="1">
-                <a:ea typeface="Verdana"/>
-                <a:cs typeface="+mn-lt"/>
-              </a:rPr>
-              <a:t>some</a:t>
-            </a:r>
-            <a:r>
-              <a:rPr lang="fr-FR">
-                <a:ea typeface="Verdana"/>
-                <a:cs typeface="+mn-lt"/>
-              </a:rPr>
-              <a:t> </a:t>
-            </a:r>
-            <a:r>
-              <a:rPr lang="fr-FR" err="1">
-                <a:ea typeface="Verdana"/>
-                <a:cs typeface="+mn-lt"/>
-              </a:rPr>
-              <a:t>device</a:t>
-            </a:r>
-            <a:r>
-              <a:rPr lang="fr-FR">
-                <a:ea typeface="Verdana"/>
-                <a:cs typeface="+mn-lt"/>
-              </a:rPr>
-              <a:t> </a:t>
-            </a:r>
-            <a:r>
-              <a:rPr lang="fr-FR" err="1">
-                <a:ea typeface="Verdana"/>
-                <a:cs typeface="+mn-lt"/>
-              </a:rPr>
-              <a:t>features</a:t>
-            </a:r>
-            <a:r>
-              <a:rPr lang="fr-FR">
-                <a:ea typeface="Verdana"/>
-                <a:cs typeface="+mn-lt"/>
-              </a:rPr>
-              <a:t>).</a:t>
-            </a:r>
-          </a:p>
-          <a:p>
-            <a:endParaRPr lang="fr-FR">
-              <a:ea typeface="Verdana"/>
-              <a:cs typeface="+mn-lt"/>
-            </a:endParaRPr>
-          </a:p>
-          <a:p>
-            <a:r>
-              <a:rPr lang="fr-FR" b="1">
-                <a:ea typeface="Verdana"/>
-                <a:cs typeface="+mn-lt"/>
-              </a:rPr>
-              <a:t>• Progressive Web Apps (</a:t>
-            </a:r>
-            <a:r>
-              <a:rPr lang="fr-FR" b="1" err="1">
-                <a:ea typeface="Verdana"/>
-                <a:cs typeface="+mn-lt"/>
-              </a:rPr>
-              <a:t>PWAs</a:t>
-            </a:r>
-            <a:r>
-              <a:rPr lang="fr-FR" b="1">
-                <a:ea typeface="Verdana"/>
-                <a:cs typeface="+mn-lt"/>
-              </a:rPr>
-              <a:t>):</a:t>
-            </a:r>
-          </a:p>
-          <a:p>
-            <a:r>
-              <a:rPr lang="fr-FR">
-                <a:ea typeface="Verdana"/>
-                <a:cs typeface="+mn-lt"/>
-              </a:rPr>
-              <a:t> Web apps </a:t>
-            </a:r>
-            <a:r>
-              <a:rPr lang="fr-FR" err="1">
-                <a:ea typeface="Verdana"/>
-                <a:cs typeface="+mn-lt"/>
-              </a:rPr>
-              <a:t>that</a:t>
-            </a:r>
-            <a:r>
-              <a:rPr lang="fr-FR">
-                <a:ea typeface="Verdana"/>
-                <a:cs typeface="+mn-lt"/>
-              </a:rPr>
-              <a:t> look and </a:t>
-            </a:r>
-            <a:r>
-              <a:rPr lang="fr-FR" err="1">
-                <a:ea typeface="Verdana"/>
-                <a:cs typeface="+mn-lt"/>
-              </a:rPr>
-              <a:t>feel</a:t>
-            </a:r>
-            <a:r>
-              <a:rPr lang="fr-FR">
-                <a:ea typeface="Verdana"/>
-                <a:cs typeface="+mn-lt"/>
-              </a:rPr>
-              <a:t> like native apps, capable of offline </a:t>
-            </a:r>
-            <a:r>
-              <a:rPr lang="fr-FR" err="1">
-                <a:ea typeface="Verdana"/>
-                <a:cs typeface="+mn-lt"/>
-              </a:rPr>
-              <a:t>work</a:t>
-            </a:r>
-            <a:r>
-              <a:rPr lang="fr-FR">
-                <a:ea typeface="Verdana"/>
-                <a:cs typeface="+mn-lt"/>
-              </a:rPr>
-              <a:t> and push notifications.</a:t>
-            </a:r>
-          </a:p>
-          <a:p>
-            <a:endParaRPr lang="fr-FR" b="1">
-              <a:ea typeface="Verdana"/>
-              <a:cs typeface="Arial"/>
+          </a:p>
+          <a:p>
+            <a:pPr marL="342900" indent="-342900">
+              <a:buAutoNum type="arabicPeriod"/>
+            </a:pPr>
+            <a:endParaRPr lang="en-CM" sz="2400" dirty="0">
+              <a:solidFill>
+                <a:schemeClr val="bg1"/>
+              </a:solidFill>
             </a:endParaRPr>
           </a:p>
         </p:txBody>
@@ -28893,6 +32218,161 @@
   <p:transition spd="slow">
     <p:wipe/>
   </p:transition>
+</p:sld>
+</file>
+
+<file path=ppt/slides/slide5.xml><?xml version="1.0" encoding="utf-8"?>
+<p:sld xmlns:a="http://schemas.openxmlformats.org/drawingml/2006/main" xmlns:r="http://schemas.openxmlformats.org/officeDocument/2006/relationships" xmlns:p="http://schemas.openxmlformats.org/presentationml/2006/main">
+  <p:cSld>
+    <p:spTree>
+      <p:nvGrpSpPr>
+        <p:cNvPr id="1" name="">
+          <a:extLst>
+            <a:ext uri="{FF2B5EF4-FFF2-40B4-BE49-F238E27FC236}">
+              <a16:creationId xmlns:a16="http://schemas.microsoft.com/office/drawing/2014/main" id="{3C557F63-78C6-4C4C-8CEC-6A56D5E38658}"/>
+            </a:ext>
+          </a:extLst>
+        </p:cNvPr>
+        <p:cNvGrpSpPr/>
+        <p:nvPr/>
+      </p:nvGrpSpPr>
+      <p:grpSpPr>
+        <a:xfrm>
+          <a:off x="0" y="0"/>
+          <a:ext cx="0" cy="0"/>
+          <a:chOff x="0" y="0"/>
+          <a:chExt cx="0" cy="0"/>
+        </a:xfrm>
+      </p:grpSpPr>
+      <p:sp>
+        <p:nvSpPr>
+          <p:cNvPr id="2" name="Title 1">
+            <a:extLst>
+              <a:ext uri="{FF2B5EF4-FFF2-40B4-BE49-F238E27FC236}">
+                <a16:creationId xmlns:a16="http://schemas.microsoft.com/office/drawing/2014/main" id="{C8FE19B6-C201-5618-3336-D0EBF7ED60C5}"/>
+              </a:ext>
+            </a:extLst>
+          </p:cNvPr>
+          <p:cNvSpPr>
+            <a:spLocks noGrp="1"/>
+          </p:cNvSpPr>
+          <p:nvPr>
+            <p:ph type="title"/>
+          </p:nvPr>
+        </p:nvSpPr>
+        <p:spPr>
+          <a:xfrm>
+            <a:off x="444500" y="542925"/>
+            <a:ext cx="11214100" cy="535531"/>
+          </a:xfrm>
+        </p:spPr>
+        <p:txBody>
+          <a:bodyPr/>
+          <a:lstStyle/>
+          <a:p>
+            <a:r>
+              <a:rPr lang="en-US" dirty="0"/>
+              <a:t>1. ⁠ ⁠Native Apps</a:t>
+            </a:r>
+            <a:endParaRPr lang="en-CM" dirty="0"/>
+          </a:p>
+        </p:txBody>
+      </p:sp>
+      <p:sp>
+        <p:nvSpPr>
+          <p:cNvPr id="3" name="Slide Number Placeholder 2">
+            <a:extLst>
+              <a:ext uri="{FF2B5EF4-FFF2-40B4-BE49-F238E27FC236}">
+                <a16:creationId xmlns:a16="http://schemas.microsoft.com/office/drawing/2014/main" id="{09EE6B92-D68F-7AAF-8E59-6E2E3747F13E}"/>
+              </a:ext>
+            </a:extLst>
+          </p:cNvPr>
+          <p:cNvSpPr>
+            <a:spLocks noGrp="1"/>
+          </p:cNvSpPr>
+          <p:nvPr>
+            <p:ph type="sldNum" sz="quarter" idx="12"/>
+          </p:nvPr>
+        </p:nvSpPr>
+        <p:spPr/>
+        <p:txBody>
+          <a:bodyPr/>
+          <a:lstStyle/>
+          <a:p>
+            <a:fld id="{C263D6C4-4840-40CC-AC84-17E24B3B7BDE}" type="slidenum">
+              <a:rPr lang="en-US" noProof="0" smtClean="0"/>
+              <a:pPr/>
+              <a:t>5</a:t>
+            </a:fld>
+            <a:endParaRPr lang="en-US" noProof="0"/>
+          </a:p>
+        </p:txBody>
+      </p:sp>
+      <p:sp>
+        <p:nvSpPr>
+          <p:cNvPr id="4" name="Text Placeholder 3">
+            <a:extLst>
+              <a:ext uri="{FF2B5EF4-FFF2-40B4-BE49-F238E27FC236}">
+                <a16:creationId xmlns:a16="http://schemas.microsoft.com/office/drawing/2014/main" id="{D65534BA-61CB-53D5-0038-7A9DF3E6EA6D}"/>
+              </a:ext>
+            </a:extLst>
+          </p:cNvPr>
+          <p:cNvSpPr>
+            <a:spLocks noGrp="1"/>
+          </p:cNvSpPr>
+          <p:nvPr>
+            <p:ph type="body" sz="quarter" idx="13"/>
+          </p:nvPr>
+        </p:nvSpPr>
+        <p:spPr/>
+        <p:txBody>
+          <a:bodyPr/>
+          <a:lstStyle/>
+          <a:p>
+            <a:endParaRPr lang="en-US" sz="2000" dirty="0"/>
+          </a:p>
+          <a:p>
+            <a:r>
+              <a:rPr lang="en-US" sz="2000" dirty="0"/>
+              <a:t>Built for one platform (Android or iOS)</a:t>
+            </a:r>
+          </a:p>
+          <a:p>
+            <a:endParaRPr lang="en-US" sz="2000" dirty="0"/>
+          </a:p>
+          <a:p>
+            <a:r>
+              <a:rPr lang="en-US" sz="2000" dirty="0"/>
+              <a:t>Very fast and reliable</a:t>
+            </a:r>
+          </a:p>
+          <a:p>
+            <a:endParaRPr lang="en-US" sz="2000" dirty="0"/>
+          </a:p>
+          <a:p>
+            <a:r>
+              <a:rPr lang="en-US" sz="2000" dirty="0"/>
+              <a:t>Expensive to develop</a:t>
+            </a:r>
+          </a:p>
+          <a:p>
+            <a:endParaRPr lang="en-US" sz="2000" dirty="0"/>
+          </a:p>
+          <a:p>
+            <a:endParaRPr lang="en-CM" sz="2000" dirty="0"/>
+          </a:p>
+        </p:txBody>
+      </p:sp>
+    </p:spTree>
+    <p:extLst>
+      <p:ext uri="{BB962C8B-B14F-4D97-AF65-F5344CB8AC3E}">
+        <p14:creationId xmlns:p14="http://schemas.microsoft.com/office/powerpoint/2010/main" val="4226804728"/>
+      </p:ext>
+    </p:extLst>
+  </p:cSld>
+  <p:clrMapOvr>
+    <a:masterClrMapping/>
+  </p:clrMapOvr>
 </p:sld>
 </file>
 
@@ -28915,1335 +32395,10 @@
       </p:grpSpPr>
       <p:sp>
         <p:nvSpPr>
-          <p:cNvPr id="7" name="Title 6">
-            <a:extLst>
-              <a:ext uri="{FF2B5EF4-FFF2-40B4-BE49-F238E27FC236}">
-                <a16:creationId xmlns:a16="http://schemas.microsoft.com/office/drawing/2014/main" id="{7875C19A-1AAE-476A-A316-A2CF92D763D3}"/>
-              </a:ext>
-            </a:extLst>
-          </p:cNvPr>
-          <p:cNvSpPr>
-            <a:spLocks noGrp="1"/>
-          </p:cNvSpPr>
-          <p:nvPr>
-            <p:ph type="title"/>
-          </p:nvPr>
-        </p:nvSpPr>
-        <p:spPr/>
-        <p:txBody>
-          <a:bodyPr/>
-          <a:lstStyle/>
-          <a:p>
-            <a:r>
-              <a:rPr lang="fr-FR">
-                <a:solidFill>
-                  <a:srgbClr val="63B7C6"/>
-                </a:solidFill>
-              </a:rPr>
-              <a:t>Key </a:t>
-            </a:r>
-            <a:r>
-              <a:rPr lang="fr-FR" err="1">
-                <a:solidFill>
-                  <a:srgbClr val="63B7C6"/>
-                </a:solidFill>
-              </a:rPr>
-              <a:t>Comparison</a:t>
-            </a:r>
-            <a:r>
-              <a:rPr lang="fr-FR">
-                <a:solidFill>
-                  <a:srgbClr val="63B7C6"/>
-                </a:solidFill>
-              </a:rPr>
-              <a:t> of App Types</a:t>
-            </a:r>
-            <a:endParaRPr lang="en-US">
-              <a:solidFill>
-                <a:srgbClr val="63B7C6"/>
-              </a:solidFill>
-            </a:endParaRPr>
-          </a:p>
-        </p:txBody>
-      </p:sp>
-      <p:sp>
-        <p:nvSpPr>
-          <p:cNvPr id="2" name="Slide Number Placeholder 1">
-            <a:extLst>
-              <a:ext uri="{FF2B5EF4-FFF2-40B4-BE49-F238E27FC236}">
-                <a16:creationId xmlns:a16="http://schemas.microsoft.com/office/drawing/2014/main" id="{BE9800F6-D571-48C4-8466-12AA1ADB6599}"/>
-              </a:ext>
-            </a:extLst>
-          </p:cNvPr>
-          <p:cNvSpPr>
-            <a:spLocks noGrp="1"/>
-          </p:cNvSpPr>
-          <p:nvPr>
-            <p:ph type="sldNum" sz="quarter" idx="12"/>
-          </p:nvPr>
-        </p:nvSpPr>
-        <p:spPr/>
-        <p:txBody>
-          <a:bodyPr/>
-          <a:lstStyle/>
-          <a:p>
-            <a:fld id="{C263D6C4-4840-40CC-AC84-17E24B3B7BDE}" type="slidenum">
-              <a:rPr lang="en-US" smtClean="0"/>
-              <a:pPr/>
-              <a:t>6</a:t>
-            </a:fld>
-            <a:endParaRPr lang="en-US"/>
-          </a:p>
-        </p:txBody>
-      </p:sp>
-      <p:sp>
-        <p:nvSpPr>
-          <p:cNvPr id="10" name="Text Placeholder 9">
-            <a:extLst>
-              <a:ext uri="{FF2B5EF4-FFF2-40B4-BE49-F238E27FC236}">
-                <a16:creationId xmlns:a16="http://schemas.microsoft.com/office/drawing/2014/main" id="{EF2BC084-E6DB-4DE7-B309-042A85EBA700}"/>
-              </a:ext>
-            </a:extLst>
-          </p:cNvPr>
-          <p:cNvSpPr>
-            <a:spLocks noGrp="1"/>
-          </p:cNvSpPr>
-          <p:nvPr>
-            <p:ph sz="half" idx="1"/>
-          </p:nvPr>
-        </p:nvSpPr>
-        <p:spPr/>
-        <p:txBody>
-          <a:bodyPr vert="horz" lIns="91440" tIns="45720" rIns="91440" bIns="45720" rtlCol="0" anchor="t">
-            <a:normAutofit/>
-          </a:bodyPr>
-          <a:lstStyle/>
-          <a:p>
-            <a:pPr marL="0" indent="0">
-              <a:buNone/>
-            </a:pPr>
-            <a:r>
-              <a:rPr lang="fr-FR" b="1" i="1"/>
-              <a:t>Native </a:t>
-            </a:r>
-            <a:r>
-              <a:rPr lang="fr-FR" b="1" i="1" err="1"/>
-              <a:t>apps</a:t>
-            </a:r>
-            <a:r>
-              <a:rPr lang="fr-FR"/>
-              <a:t> </a:t>
-            </a:r>
-            <a:r>
-              <a:rPr lang="fr-FR" err="1"/>
-              <a:t>offer</a:t>
-            </a:r>
-            <a:r>
-              <a:rPr lang="fr-FR"/>
-              <a:t> the best performance and full </a:t>
-            </a:r>
-            <a:r>
-              <a:rPr lang="fr-FR" err="1"/>
-              <a:t>device</a:t>
-            </a:r>
-            <a:r>
-              <a:rPr lang="fr-FR"/>
-              <a:t> </a:t>
-            </a:r>
-            <a:r>
-              <a:rPr lang="fr-FR" err="1"/>
-              <a:t>access</a:t>
-            </a:r>
-            <a:r>
-              <a:rPr lang="fr-FR"/>
-              <a:t>.</a:t>
-            </a:r>
-            <a:endParaRPr lang="en-US"/>
-          </a:p>
-          <a:p>
-            <a:pPr marL="0" indent="0">
-              <a:buNone/>
-            </a:pPr>
-            <a:r>
-              <a:rPr lang="fr-FR"/>
-              <a:t>
-</a:t>
-            </a:r>
-            <a:r>
-              <a:rPr lang="fr-FR" b="1" i="1"/>
-              <a:t>Web </a:t>
-            </a:r>
-            <a:r>
-              <a:rPr lang="fr-FR" b="1" i="1" err="1"/>
-              <a:t>apps</a:t>
-            </a:r>
-            <a:r>
-              <a:rPr lang="fr-FR"/>
-              <a:t> are </a:t>
-            </a:r>
-            <a:r>
-              <a:rPr lang="fr-FR" err="1"/>
-              <a:t>cheaper</a:t>
-            </a:r>
-            <a:r>
-              <a:rPr lang="fr-FR"/>
-              <a:t> and </a:t>
-            </a:r>
-            <a:r>
-              <a:rPr lang="fr-FR" err="1"/>
-              <a:t>easier</a:t>
-            </a:r>
-            <a:r>
-              <a:rPr lang="fr-FR"/>
-              <a:t> to </a:t>
-            </a:r>
-            <a:r>
-              <a:rPr lang="fr-FR" err="1"/>
-              <a:t>maintain</a:t>
-            </a:r>
-            <a:r>
-              <a:rPr lang="fr-FR"/>
-              <a:t>.</a:t>
-            </a:r>
-            <a:endParaRPr lang="en-US"/>
-          </a:p>
-          <a:p>
-            <a:pPr marL="0" indent="0">
-              <a:buNone/>
-            </a:pPr>
-            <a:r>
-              <a:rPr lang="fr-FR"/>
-              <a:t>
-</a:t>
-            </a:r>
-            <a:r>
-              <a:rPr lang="fr-FR" b="1" i="1" err="1"/>
-              <a:t>Hybrid</a:t>
-            </a:r>
-            <a:r>
-              <a:rPr lang="fr-FR" b="1" i="1"/>
-              <a:t> </a:t>
-            </a:r>
-            <a:r>
-              <a:rPr lang="fr-FR" b="1" i="1" err="1"/>
-              <a:t>apps</a:t>
-            </a:r>
-            <a:r>
-              <a:rPr lang="fr-FR"/>
-              <a:t> </a:t>
-            </a:r>
-            <a:r>
-              <a:rPr lang="fr-FR" err="1"/>
-              <a:t>reduce</a:t>
-            </a:r>
-            <a:r>
-              <a:rPr lang="fr-FR"/>
-              <a:t> </a:t>
-            </a:r>
-            <a:r>
-              <a:rPr lang="fr-FR" err="1"/>
-              <a:t>development</a:t>
-            </a:r>
-            <a:r>
-              <a:rPr lang="fr-FR"/>
-              <a:t> </a:t>
-            </a:r>
-            <a:r>
-              <a:rPr lang="fr-FR" err="1"/>
-              <a:t>cost.</a:t>
-            </a:r>
-            <a:r>
-              <a:rPr lang="fr-FR"/>
-              <a:t>
-</a:t>
-            </a:r>
-            <a:r>
-              <a:rPr lang="fr-FR" b="1" i="1"/>
-              <a:t>Cross-</a:t>
-            </a:r>
-            <a:r>
-              <a:rPr lang="fr-FR" b="1" i="1" err="1"/>
-              <a:t>platform</a:t>
-            </a:r>
-            <a:r>
-              <a:rPr lang="fr-FR" b="1" i="1"/>
-              <a:t> </a:t>
-            </a:r>
-            <a:r>
-              <a:rPr lang="fr-FR" b="1" i="1" err="1"/>
-              <a:t>apps</a:t>
-            </a:r>
-            <a:r>
-              <a:rPr lang="fr-FR"/>
-              <a:t> balance </a:t>
-            </a:r>
-            <a:r>
-              <a:rPr lang="fr-FR" err="1"/>
-              <a:t>cost</a:t>
-            </a:r>
-            <a:r>
-              <a:rPr lang="fr-FR"/>
-              <a:t> and performance.</a:t>
-            </a:r>
-            <a:endParaRPr lang="en-US"/>
-          </a:p>
-          <a:p>
-            <a:pPr marL="0" indent="0">
-              <a:buNone/>
-            </a:pPr>
-            <a:r>
-              <a:rPr lang="fr-FR"/>
-              <a:t>
-</a:t>
-            </a:r>
-            <a:r>
-              <a:rPr lang="fr-FR" b="1" i="1"/>
-              <a:t>PWA </a:t>
-            </a:r>
-            <a:r>
-              <a:rPr lang="fr-FR" err="1"/>
-              <a:t>provides</a:t>
-            </a:r>
-            <a:r>
-              <a:rPr lang="fr-FR"/>
-              <a:t> </a:t>
-            </a:r>
-            <a:r>
-              <a:rPr lang="fr-FR" err="1"/>
-              <a:t>lightweight</a:t>
-            </a:r>
-            <a:r>
-              <a:rPr lang="fr-FR"/>
-              <a:t> </a:t>
-            </a:r>
-            <a:r>
-              <a:rPr lang="fr-FR" err="1"/>
-              <a:t>app-like</a:t>
-            </a:r>
-            <a:r>
-              <a:rPr lang="fr-FR"/>
-              <a:t> </a:t>
-            </a:r>
-            <a:r>
-              <a:rPr lang="fr-FR" err="1"/>
-              <a:t>experiences</a:t>
-            </a:r>
-            <a:r>
-              <a:rPr lang="fr-FR"/>
-              <a:t>.</a:t>
-            </a:r>
-            <a:endParaRPr lang="en-US">
-              <a:cs typeface="Arial"/>
-            </a:endParaRPr>
-          </a:p>
-        </p:txBody>
-      </p:sp>
-      <p:sp>
-        <p:nvSpPr>
-          <p:cNvPr id="3" name="Espace réservé du contenu 2">
-            <a:extLst>
-              <a:ext uri="{FF2B5EF4-FFF2-40B4-BE49-F238E27FC236}">
-                <a16:creationId xmlns:a16="http://schemas.microsoft.com/office/drawing/2014/main" id="{2AC141D2-FEB6-6157-0178-F71C02FA665D}"/>
-              </a:ext>
-            </a:extLst>
-          </p:cNvPr>
-          <p:cNvSpPr>
-            <a:spLocks noGrp="1"/>
-          </p:cNvSpPr>
-          <p:nvPr>
-            <p:ph sz="half" idx="2"/>
-          </p:nvPr>
-        </p:nvSpPr>
-        <p:spPr>
-          <a:xfrm>
-            <a:off x="6474163" y="1517715"/>
-            <a:ext cx="5184437" cy="3042630"/>
-          </a:xfrm>
-        </p:spPr>
-        <p:txBody>
-          <a:bodyPr vert="horz" lIns="91440" tIns="45720" rIns="91440" bIns="45720" rtlCol="0" anchor="t">
-            <a:normAutofit fontScale="92500" lnSpcReduction="20000"/>
-          </a:bodyPr>
-          <a:lstStyle/>
-          <a:p>
-            <a:pPr marL="0" indent="0">
-              <a:buNone/>
-            </a:pPr>
-            <a:r>
-              <a:rPr lang="fr-FR"/>
-              <a:t>The </a:t>
-            </a:r>
-            <a:r>
-              <a:rPr lang="fr-FR" err="1"/>
-              <a:t>choice</a:t>
-            </a:r>
-            <a:r>
-              <a:rPr lang="fr-FR"/>
-              <a:t> </a:t>
-            </a:r>
-            <a:r>
-              <a:rPr lang="fr-FR" err="1"/>
-              <a:t>depends</a:t>
-            </a:r>
-            <a:r>
-              <a:rPr lang="fr-FR"/>
-              <a:t> on:</a:t>
-            </a:r>
-            <a:endParaRPr lang="en-US"/>
-          </a:p>
-          <a:p>
-            <a:pPr marL="0" indent="0">
-              <a:buNone/>
-            </a:pPr>
-            <a:r>
-              <a:rPr lang="fr-FR"/>
-              <a:t>
--Budget</a:t>
-            </a:r>
-          </a:p>
-          <a:p>
-            <a:pPr marL="0" indent="0">
-              <a:buNone/>
-            </a:pPr>
-            <a:r>
-              <a:rPr lang="fr-FR"/>
-              <a:t>
--Performance </a:t>
-            </a:r>
-            <a:r>
-              <a:rPr lang="fr-FR" err="1"/>
-              <a:t>needs</a:t>
-            </a:r>
-            <a:endParaRPr lang="fr-FR">
-              <a:cs typeface="Arial"/>
-            </a:endParaRPr>
-          </a:p>
-          <a:p>
-            <a:pPr marL="0" indent="0">
-              <a:buNone/>
-            </a:pPr>
-            <a:r>
-              <a:rPr lang="fr-FR"/>
-              <a:t>
--Target </a:t>
-            </a:r>
-            <a:r>
-              <a:rPr lang="fr-FR" err="1"/>
-              <a:t>devices</a:t>
-            </a:r>
-            <a:endParaRPr lang="fr-FR">
-              <a:cs typeface="Arial"/>
-            </a:endParaRPr>
-          </a:p>
-          <a:p>
-            <a:pPr marL="0" indent="0">
-              <a:buNone/>
-            </a:pPr>
-            <a:r>
-              <a:rPr lang="fr-FR"/>
-              <a:t>
--User </a:t>
-            </a:r>
-            <a:r>
-              <a:rPr lang="fr-FR" err="1"/>
-              <a:t>experience</a:t>
-            </a:r>
-            <a:endParaRPr lang="fr-FR">
-              <a:cs typeface="Arial"/>
-            </a:endParaRPr>
-          </a:p>
-        </p:txBody>
-      </p:sp>
-    </p:spTree>
-    <p:extLst>
-      <p:ext uri="{BB962C8B-B14F-4D97-AF65-F5344CB8AC3E}">
-        <p14:creationId xmlns:p14="http://schemas.microsoft.com/office/powerpoint/2010/main" val="3733486012"/>
-      </p:ext>
-    </p:extLst>
-  </p:cSld>
-  <p:clrMapOvr>
-    <a:masterClrMapping/>
-  </p:clrMapOvr>
-  <mc:AlternateContent xmlns:mc="http://schemas.openxmlformats.org/markup-compatibility/2006">
-    <mc:Choice xmlns:p14="http://schemas.microsoft.com/office/powerpoint/2010/main" Requires="p14">
-      <p:transition spd="med" p14:dur="700">
-        <p:fade/>
-      </p:transition>
-    </mc:Choice>
-    <mc:Fallback>
-      <p:transition spd="med">
-        <p:fade/>
-      </p:transition>
-    </mc:Fallback>
-  </mc:AlternateContent>
-</p:sld>
-</file>
-
-<file path=ppt/slides/slide7.xml><?xml version="1.0" encoding="utf-8"?>
-<p:sld xmlns:a="http://schemas.openxmlformats.org/drawingml/2006/main" xmlns:r="http://schemas.openxmlformats.org/officeDocument/2006/relationships" xmlns:p="http://schemas.openxmlformats.org/presentationml/2006/main">
-  <p:cSld>
-    <p:spTree>
-      <p:nvGrpSpPr>
-        <p:cNvPr id="1" name=""/>
-        <p:cNvGrpSpPr/>
-        <p:nvPr/>
-      </p:nvGrpSpPr>
-      <p:grpSpPr>
-        <a:xfrm>
-          <a:off x="0" y="0"/>
-          <a:ext cx="0" cy="0"/>
-          <a:chOff x="0" y="0"/>
-          <a:chExt cx="0" cy="0"/>
-        </a:xfrm>
-      </p:grpSpPr>
-      <p:sp>
-        <p:nvSpPr>
-          <p:cNvPr id="4" name="Title 3">
-            <a:extLst>
-              <a:ext uri="{FF2B5EF4-FFF2-40B4-BE49-F238E27FC236}">
-                <a16:creationId xmlns:a16="http://schemas.microsoft.com/office/drawing/2014/main" id="{315E3981-F0D7-482C-A8E0-6A57700BECA7}"/>
-              </a:ext>
-            </a:extLst>
-          </p:cNvPr>
-          <p:cNvSpPr>
-            <a:spLocks noGrp="1"/>
-          </p:cNvSpPr>
-          <p:nvPr>
-            <p:ph type="title"/>
-          </p:nvPr>
-        </p:nvSpPr>
-        <p:spPr/>
-        <p:txBody>
-          <a:bodyPr/>
-          <a:lstStyle/>
-          <a:p>
-            <a:r>
-              <a:rPr lang="fr-FR" err="1">
-                <a:solidFill>
-                  <a:srgbClr val="63B7C6"/>
-                </a:solidFill>
-              </a:rPr>
-              <a:t>Programming</a:t>
-            </a:r>
-            <a:r>
-              <a:rPr lang="fr-FR">
-                <a:solidFill>
-                  <a:srgbClr val="63B7C6"/>
-                </a:solidFill>
-              </a:rPr>
-              <a:t> </a:t>
-            </a:r>
-            <a:r>
-              <a:rPr lang="fr-FR" err="1">
-                <a:solidFill>
-                  <a:srgbClr val="63B7C6"/>
-                </a:solidFill>
-              </a:rPr>
-              <a:t>Languages</a:t>
-            </a:r>
-            <a:r>
-              <a:rPr lang="fr-FR">
-                <a:solidFill>
-                  <a:srgbClr val="63B7C6"/>
-                </a:solidFill>
-              </a:rPr>
-              <a:t> And </a:t>
-            </a:r>
-            <a:r>
-              <a:rPr lang="fr-FR" err="1">
-                <a:solidFill>
-                  <a:srgbClr val="63B7C6"/>
-                </a:solidFill>
-              </a:rPr>
-              <a:t>Frameworks</a:t>
-            </a:r>
-            <a:endParaRPr lang="en-US" err="1">
-              <a:solidFill>
-                <a:srgbClr val="63B7C6"/>
-              </a:solidFill>
-            </a:endParaRPr>
-          </a:p>
-        </p:txBody>
-      </p:sp>
-      <p:sp>
-        <p:nvSpPr>
-          <p:cNvPr id="2" name="Slide Number Placeholder 1">
-            <a:extLst>
-              <a:ext uri="{FF2B5EF4-FFF2-40B4-BE49-F238E27FC236}">
-                <a16:creationId xmlns:a16="http://schemas.microsoft.com/office/drawing/2014/main" id="{520FC4EE-F318-4344-9E3C-B950ADB63865}"/>
-              </a:ext>
-            </a:extLst>
-          </p:cNvPr>
-          <p:cNvSpPr>
-            <a:spLocks noGrp="1"/>
-          </p:cNvSpPr>
-          <p:nvPr>
-            <p:ph type="sldNum" sz="quarter" idx="12"/>
-          </p:nvPr>
-        </p:nvSpPr>
-        <p:spPr>
-          <a:xfrm>
-            <a:off x="11252200" y="6315075"/>
-            <a:ext cx="406400" cy="174626"/>
-          </a:xfrm>
-        </p:spPr>
-        <p:txBody>
-          <a:bodyPr/>
-          <a:lstStyle/>
-          <a:p>
-            <a:fld id="{C263D6C4-4840-40CC-AC84-17E24B3B7BDE}" type="slidenum">
-              <a:rPr lang="en-US" smtClean="0"/>
-              <a:pPr/>
-              <a:t>7</a:t>
-            </a:fld>
-            <a:endParaRPr lang="en-US"/>
-          </a:p>
-        </p:txBody>
-      </p:sp>
-      <p:sp>
-        <p:nvSpPr>
-          <p:cNvPr id="7" name="Text Placeholder 6">
-            <a:extLst>
-              <a:ext uri="{FF2B5EF4-FFF2-40B4-BE49-F238E27FC236}">
-                <a16:creationId xmlns:a16="http://schemas.microsoft.com/office/drawing/2014/main" id="{B74126B4-1E6C-4FFF-9282-40E18A85A07F}"/>
-              </a:ext>
-            </a:extLst>
-          </p:cNvPr>
-          <p:cNvSpPr>
-            <a:spLocks noGrp="1"/>
-          </p:cNvSpPr>
-          <p:nvPr>
-            <p:ph idx="1"/>
-          </p:nvPr>
-        </p:nvSpPr>
-        <p:spPr>
-          <a:xfrm>
-            <a:off x="561294" y="3606572"/>
-            <a:ext cx="4803549" cy="2420713"/>
-          </a:xfrm>
-        </p:spPr>
-        <p:txBody>
-          <a:bodyPr vert="horz" lIns="91440" tIns="45720" rIns="91440" bIns="45720" rtlCol="0" anchor="t">
-            <a:normAutofit lnSpcReduction="10000"/>
-          </a:bodyPr>
-          <a:lstStyle/>
-          <a:p>
-            <a:pPr marL="0" indent="0">
-              <a:buNone/>
-            </a:pPr>
-            <a:endParaRPr lang="fr-FR" sz="2000" b="1" i="1">
-              <a:solidFill>
-                <a:srgbClr val="63B7C6"/>
-              </a:solidFill>
-              <a:cs typeface="Arial"/>
-            </a:endParaRPr>
-          </a:p>
-          <a:p>
-            <a:pPr marL="0" indent="0">
-              <a:buNone/>
-            </a:pPr>
-            <a:endParaRPr lang="fr-FR" sz="2000" b="1" i="1">
-              <a:solidFill>
-                <a:srgbClr val="63B7C6"/>
-              </a:solidFill>
-              <a:cs typeface="Arial"/>
-            </a:endParaRPr>
-          </a:p>
-          <a:p>
-            <a:pPr marL="0" indent="0">
-              <a:buNone/>
-            </a:pPr>
-            <a:r>
-              <a:rPr lang="fr-FR" sz="2000" b="1" i="1">
-                <a:solidFill>
-                  <a:srgbClr val="63B7C6"/>
-                </a:solidFill>
-                <a:cs typeface="Arial"/>
-              </a:rPr>
-              <a:t>Android</a:t>
-            </a:r>
-            <a:r>
-              <a:rPr lang="fr-FR" sz="2000" b="1" i="1">
-                <a:solidFill>
-                  <a:srgbClr val="63B7C6"/>
-                </a:solidFill>
-              </a:rPr>
-              <a:t> </a:t>
-            </a:r>
-            <a:r>
-              <a:rPr lang="fr-FR" sz="2000" b="1" i="1" err="1">
-                <a:solidFill>
-                  <a:srgbClr val="63B7C6"/>
-                </a:solidFill>
-              </a:rPr>
-              <a:t>Languages</a:t>
-            </a:r>
-            <a:endParaRPr lang="en-US" sz="2000">
-              <a:solidFill>
-                <a:srgbClr val="63B7C6"/>
-              </a:solidFill>
-              <a:cs typeface="Arial"/>
-            </a:endParaRPr>
-          </a:p>
-          <a:p>
-            <a:pPr marL="0" indent="0">
-              <a:buNone/>
-            </a:pPr>
-            <a:br>
-              <a:rPr lang="en-US" sz="2000">
-                <a:solidFill>
-                  <a:srgbClr val="63B7C6"/>
-                </a:solidFill>
-              </a:rPr>
-            </a:br>
-            <a:r>
-              <a:rPr lang="fr-FR" sz="2000" b="1"/>
-              <a:t>Java</a:t>
-            </a:r>
-            <a:r>
-              <a:rPr lang="fr-FR" sz="2000"/>
-              <a:t> – </a:t>
-            </a:r>
-            <a:r>
-              <a:rPr lang="fr-FR" sz="2000" err="1"/>
-              <a:t>traditional</a:t>
-            </a:r>
-            <a:r>
-              <a:rPr lang="fr-FR" sz="2000"/>
-              <a:t> </a:t>
-            </a:r>
-            <a:r>
-              <a:rPr lang="fr-FR" sz="2000" err="1"/>
-              <a:t>language</a:t>
-            </a:r>
-            <a:endParaRPr lang="en-US" sz="2000" err="1">
-              <a:solidFill>
-                <a:srgbClr val="63B7C6"/>
-              </a:solidFill>
-              <a:cs typeface="Arial"/>
-            </a:endParaRPr>
-          </a:p>
-          <a:p>
-            <a:pPr marL="0" indent="0">
-              <a:buNone/>
-            </a:pPr>
-            <a:br>
-              <a:rPr lang="en-US" sz="2000">
-                <a:solidFill>
-                  <a:srgbClr val="63B7C6"/>
-                </a:solidFill>
-              </a:rPr>
-            </a:br>
-            <a:r>
-              <a:rPr lang="fr-FR" sz="2000" b="1" err="1"/>
-              <a:t>Kotlin</a:t>
-            </a:r>
-            <a:r>
-              <a:rPr lang="fr-FR" sz="2000"/>
-              <a:t> – official modern </a:t>
-            </a:r>
-            <a:r>
-              <a:rPr lang="fr-FR" sz="2000" err="1"/>
-              <a:t>language</a:t>
-            </a:r>
-            <a:endParaRPr lang="en-US" err="1"/>
-          </a:p>
-        </p:txBody>
-      </p:sp>
-      <p:sp>
-        <p:nvSpPr>
-          <p:cNvPr id="9" name="Text Placeholder 6">
-            <a:extLst>
-              <a:ext uri="{FF2B5EF4-FFF2-40B4-BE49-F238E27FC236}">
-                <a16:creationId xmlns:a16="http://schemas.microsoft.com/office/drawing/2014/main" id="{6194E170-7B56-ACC1-AA26-6E3BF46C45F0}"/>
-              </a:ext>
-            </a:extLst>
-          </p:cNvPr>
-          <p:cNvSpPr txBox="1">
-            <a:spLocks/>
-          </p:cNvSpPr>
-          <p:nvPr/>
-        </p:nvSpPr>
-        <p:spPr>
-          <a:xfrm>
-            <a:off x="559479" y="1713364"/>
-            <a:ext cx="4803549" cy="1894570"/>
-          </a:xfrm>
-          <a:prstGeom prst="rect">
-            <a:avLst/>
-          </a:prstGeom>
-        </p:spPr>
-        <p:txBody>
-          <a:bodyPr vert="horz" lIns="91440" tIns="45720" rIns="91440" bIns="45720" rtlCol="0" anchor="t">
-            <a:normAutofit fontScale="92500" lnSpcReduction="10000"/>
-          </a:bodyPr>
-          <a:lstStyle>
-            <a:lvl1pPr marL="228600" indent="-228600" algn="l" defTabSz="914400" rtl="0" eaLnBrk="1" latinLnBrk="0" hangingPunct="1">
-              <a:lnSpc>
-                <a:spcPct val="90000"/>
-              </a:lnSpc>
-              <a:spcBef>
-                <a:spcPts val="1000"/>
-              </a:spcBef>
-              <a:buClr>
-                <a:schemeClr val="accent2"/>
-              </a:buClr>
-              <a:buFont typeface="Arial" panose="020B0604020202020204" pitchFamily="34" charset="0"/>
-              <a:buChar char="•"/>
-              <a:defRPr sz="2800" kern="1200">
-                <a:solidFill>
-                  <a:schemeClr val="bg1"/>
-                </a:solidFill>
-                <a:latin typeface="+mn-lt"/>
-                <a:ea typeface="+mn-ea"/>
-                <a:cs typeface="+mn-cs"/>
-              </a:defRPr>
-            </a:lvl1pPr>
-            <a:lvl2pPr marL="685800" indent="-228600" algn="l" defTabSz="914400" rtl="0" eaLnBrk="1" latinLnBrk="0" hangingPunct="1">
-              <a:lnSpc>
-                <a:spcPct val="90000"/>
-              </a:lnSpc>
-              <a:spcBef>
-                <a:spcPts val="500"/>
-              </a:spcBef>
-              <a:buClr>
-                <a:schemeClr val="accent2"/>
-              </a:buClr>
-              <a:buFont typeface="Arial" panose="020B0604020202020204" pitchFamily="34" charset="0"/>
-              <a:buChar char="•"/>
-              <a:defRPr sz="2400" kern="1200">
-                <a:solidFill>
-                  <a:schemeClr val="bg1"/>
-                </a:solidFill>
-                <a:latin typeface="+mn-lt"/>
-                <a:ea typeface="+mn-ea"/>
-                <a:cs typeface="+mn-cs"/>
-              </a:defRPr>
-            </a:lvl2pPr>
-            <a:lvl3pPr marL="1143000" indent="-228600" algn="l" defTabSz="914400" rtl="0" eaLnBrk="1" latinLnBrk="0" hangingPunct="1">
-              <a:lnSpc>
-                <a:spcPct val="90000"/>
-              </a:lnSpc>
-              <a:spcBef>
-                <a:spcPts val="500"/>
-              </a:spcBef>
-              <a:buClr>
-                <a:schemeClr val="accent2"/>
-              </a:buClr>
-              <a:buFont typeface="Arial" panose="020B0604020202020204" pitchFamily="34" charset="0"/>
-              <a:buChar char="•"/>
-              <a:defRPr sz="2000" kern="1200">
-                <a:solidFill>
-                  <a:schemeClr val="bg1"/>
-                </a:solidFill>
-                <a:latin typeface="+mn-lt"/>
-                <a:ea typeface="+mn-ea"/>
-                <a:cs typeface="+mn-cs"/>
-              </a:defRPr>
-            </a:lvl3pPr>
-            <a:lvl4pPr marL="1600200" indent="-228600" algn="l" defTabSz="914400" rtl="0" eaLnBrk="1" latinLnBrk="0" hangingPunct="1">
-              <a:lnSpc>
-                <a:spcPct val="90000"/>
-              </a:lnSpc>
-              <a:spcBef>
-                <a:spcPts val="500"/>
-              </a:spcBef>
-              <a:buClr>
-                <a:schemeClr val="accent2"/>
-              </a:buClr>
-              <a:buFont typeface="Arial" panose="020B0604020202020204" pitchFamily="34" charset="0"/>
-              <a:buChar char="•"/>
-              <a:defRPr sz="1800" kern="1200">
-                <a:solidFill>
-                  <a:schemeClr val="bg1"/>
-                </a:solidFill>
-                <a:latin typeface="+mn-lt"/>
-                <a:ea typeface="+mn-ea"/>
-                <a:cs typeface="+mn-cs"/>
-              </a:defRPr>
-            </a:lvl4pPr>
-            <a:lvl5pPr marL="2057400" indent="-228600" algn="l" defTabSz="914400" rtl="0" eaLnBrk="1" latinLnBrk="0" hangingPunct="1">
-              <a:lnSpc>
-                <a:spcPct val="90000"/>
-              </a:lnSpc>
-              <a:spcBef>
-                <a:spcPts val="500"/>
-              </a:spcBef>
-              <a:buClr>
-                <a:schemeClr val="accent2"/>
-              </a:buClr>
-              <a:buFont typeface="Arial" panose="020B0604020202020204" pitchFamily="34" charset="0"/>
-              <a:buChar char="•"/>
-              <a:defRPr sz="1800" kern="1200">
-                <a:solidFill>
-                  <a:schemeClr val="bg1"/>
-                </a:solidFill>
-                <a:latin typeface="+mn-lt"/>
-                <a:ea typeface="+mn-ea"/>
-                <a:cs typeface="+mn-cs"/>
-              </a:defRPr>
-            </a:lvl5pPr>
-            <a:lvl6pPr marL="2514600" indent="-228600" algn="l" defTabSz="914400" rtl="0" eaLnBrk="1" latinLnBrk="0" hangingPunct="1">
-              <a:lnSpc>
-                <a:spcPct val="90000"/>
-              </a:lnSpc>
-              <a:spcBef>
-                <a:spcPts val="500"/>
-              </a:spcBef>
-              <a:buFont typeface="Arial" panose="020B0604020202020204" pitchFamily="34" charset="0"/>
-              <a:buChar char="•"/>
-              <a:defRPr sz="1800" kern="1200">
-                <a:solidFill>
-                  <a:schemeClr val="tx1"/>
-                </a:solidFill>
-                <a:latin typeface="+mn-lt"/>
-                <a:ea typeface="+mn-ea"/>
-                <a:cs typeface="+mn-cs"/>
-              </a:defRPr>
-            </a:lvl6pPr>
-            <a:lvl7pPr marL="2971800" indent="-228600" algn="l" defTabSz="914400" rtl="0" eaLnBrk="1" latinLnBrk="0" hangingPunct="1">
-              <a:lnSpc>
-                <a:spcPct val="90000"/>
-              </a:lnSpc>
-              <a:spcBef>
-                <a:spcPts val="500"/>
-              </a:spcBef>
-              <a:buFont typeface="Arial" panose="020B0604020202020204" pitchFamily="34" charset="0"/>
-              <a:buChar char="•"/>
-              <a:defRPr sz="1800" kern="1200">
-                <a:solidFill>
-                  <a:schemeClr val="tx1"/>
-                </a:solidFill>
-                <a:latin typeface="+mn-lt"/>
-                <a:ea typeface="+mn-ea"/>
-                <a:cs typeface="+mn-cs"/>
-              </a:defRPr>
-            </a:lvl7pPr>
-            <a:lvl8pPr marL="3429000" indent="-228600" algn="l" defTabSz="914400" rtl="0" eaLnBrk="1" latinLnBrk="0" hangingPunct="1">
-              <a:lnSpc>
-                <a:spcPct val="90000"/>
-              </a:lnSpc>
-              <a:spcBef>
-                <a:spcPts val="500"/>
-              </a:spcBef>
-              <a:buFont typeface="Arial" panose="020B0604020202020204" pitchFamily="34" charset="0"/>
-              <a:buChar char="•"/>
-              <a:defRPr sz="1800" kern="1200">
-                <a:solidFill>
-                  <a:schemeClr val="tx1"/>
-                </a:solidFill>
-                <a:latin typeface="+mn-lt"/>
-                <a:ea typeface="+mn-ea"/>
-                <a:cs typeface="+mn-cs"/>
-              </a:defRPr>
-            </a:lvl8pPr>
-            <a:lvl9pPr marL="3886200" indent="-228600" algn="l" defTabSz="914400" rtl="0" eaLnBrk="1" latinLnBrk="0" hangingPunct="1">
-              <a:lnSpc>
-                <a:spcPct val="90000"/>
-              </a:lnSpc>
-              <a:spcBef>
-                <a:spcPts val="500"/>
-              </a:spcBef>
-              <a:buFont typeface="Arial" panose="020B0604020202020204" pitchFamily="34" charset="0"/>
-              <a:buChar char="•"/>
-              <a:defRPr sz="1800" kern="1200">
-                <a:solidFill>
-                  <a:schemeClr val="tx1"/>
-                </a:solidFill>
-                <a:latin typeface="+mn-lt"/>
-                <a:ea typeface="+mn-ea"/>
-                <a:cs typeface="+mn-cs"/>
-              </a:defRPr>
-            </a:lvl9pPr>
-          </a:lstStyle>
-          <a:p>
-            <a:pPr marL="0" indent="0">
-              <a:buFont typeface="Arial" panose="020B0604020202020204" pitchFamily="34" charset="0"/>
-              <a:buNone/>
-            </a:pPr>
-            <a:r>
-              <a:rPr lang="fr-FR" sz="2000" b="1" i="1">
-                <a:solidFill>
-                  <a:srgbClr val="63B7C6"/>
-                </a:solidFill>
-              </a:rPr>
-              <a:t>iOS </a:t>
-            </a:r>
-            <a:r>
-              <a:rPr lang="fr-FR" sz="2000" b="1" i="1" err="1">
-                <a:solidFill>
-                  <a:srgbClr val="63B7C6"/>
-                </a:solidFill>
-              </a:rPr>
-              <a:t>Languages</a:t>
-            </a:r>
-            <a:endParaRPr lang="en-US" sz="2000">
-              <a:cs typeface="Arial"/>
-            </a:endParaRPr>
-          </a:p>
-          <a:p>
-            <a:pPr marL="0" indent="0">
-              <a:buFont typeface="Arial" panose="020B0604020202020204" pitchFamily="34" charset="0"/>
-              <a:buNone/>
-            </a:pPr>
-            <a:r>
-              <a:rPr lang="fr-FR" sz="2000"/>
-              <a:t>
-</a:t>
-            </a:r>
-            <a:r>
-              <a:rPr lang="fr-FR" sz="2000" b="1"/>
-              <a:t>Swift</a:t>
-            </a:r>
-            <a:r>
-              <a:rPr lang="fr-FR" sz="2000"/>
-              <a:t> – main modern </a:t>
-            </a:r>
-            <a:r>
-              <a:rPr lang="fr-FR" sz="2000" err="1"/>
-              <a:t>language</a:t>
-            </a:r>
-            <a:endParaRPr lang="en-US" sz="2000" err="1">
-              <a:cs typeface="Arial"/>
-            </a:endParaRPr>
-          </a:p>
-          <a:p>
-            <a:pPr marL="0" indent="0">
-              <a:buFont typeface="Arial" panose="020B0604020202020204" pitchFamily="34" charset="0"/>
-              <a:buNone/>
-            </a:pPr>
-            <a:r>
-              <a:rPr lang="fr-FR" sz="2000"/>
-              <a:t>
-</a:t>
-            </a:r>
-            <a:r>
-              <a:rPr lang="fr-FR" sz="2000" b="1"/>
-              <a:t>Objective-C</a:t>
-            </a:r>
-            <a:r>
-              <a:rPr lang="fr-FR" sz="2000"/>
-              <a:t> – </a:t>
-            </a:r>
-            <a:r>
-              <a:rPr lang="fr-FR" sz="2000" err="1"/>
-              <a:t>older</a:t>
-            </a:r>
-            <a:r>
-              <a:rPr lang="fr-FR" sz="2000"/>
-              <a:t> </a:t>
-            </a:r>
-            <a:r>
-              <a:rPr lang="fr-FR" sz="2000" err="1"/>
-              <a:t>language</a:t>
-            </a:r>
-            <a:endParaRPr lang="en-US" sz="2000">
-              <a:cs typeface="Arial"/>
-            </a:endParaRPr>
-          </a:p>
-        </p:txBody>
-      </p:sp>
-      <p:sp>
-        <p:nvSpPr>
-          <p:cNvPr id="10" name="TextBox 9">
-            <a:extLst>
-              <a:ext uri="{FF2B5EF4-FFF2-40B4-BE49-F238E27FC236}">
-                <a16:creationId xmlns:a16="http://schemas.microsoft.com/office/drawing/2014/main" id="{56DB35B2-9F41-CED6-7BFF-1F20B515D218}"/>
-              </a:ext>
-            </a:extLst>
-          </p:cNvPr>
-          <p:cNvSpPr txBox="1"/>
-          <p:nvPr/>
-        </p:nvSpPr>
-        <p:spPr>
-          <a:xfrm>
-            <a:off x="5750785" y="1467165"/>
-            <a:ext cx="6096000" cy="2554545"/>
-          </a:xfrm>
-          <a:prstGeom prst="rect">
-            <a:avLst/>
-          </a:prstGeom>
-          <a:noFill/>
-        </p:spPr>
-        <p:txBody>
-          <a:bodyPr rot="0" spcFirstLastPara="0" vertOverflow="overflow" horzOverflow="overflow" vert="horz" wrap="square" lIns="91440" tIns="45720" rIns="91440" bIns="45720" numCol="1" spcCol="0" rtlCol="0" fromWordArt="0" anchor="t" anchorCtr="0" forceAA="0" compatLnSpc="1">
-            <a:prstTxWarp prst="textNoShape">
-              <a:avLst/>
-            </a:prstTxWarp>
-            <a:spAutoFit/>
-          </a:bodyPr>
-          <a:lstStyle/>
-          <a:p>
-            <a:r>
-              <a:rPr lang="fr-FR" sz="2000">
-                <a:latin typeface="Arial"/>
-                <a:ea typeface="Arial"/>
-                <a:cs typeface="Arial"/>
-              </a:rPr>
-              <a:t>​</a:t>
-            </a:r>
-            <a:r>
-              <a:rPr lang="fr-FR" sz="1900" b="1" i="1" err="1">
-                <a:solidFill>
-                  <a:srgbClr val="63B7C6"/>
-                </a:solidFill>
-                <a:latin typeface="Arial"/>
-                <a:ea typeface="Arial"/>
-                <a:cs typeface="Arial"/>
-              </a:rPr>
-              <a:t>Frameworks</a:t>
-            </a:r>
-            <a:endParaRPr lang="en-US" err="1"/>
-          </a:p>
-          <a:p>
-            <a:br>
-              <a:rPr lang="fr-FR" sz="2000">
-                <a:solidFill>
-                  <a:schemeClr val="bg1"/>
-                </a:solidFill>
-                <a:latin typeface="Arial"/>
-                <a:ea typeface="Arial"/>
-                <a:cs typeface="Arial"/>
-              </a:rPr>
-            </a:br>
-            <a:r>
-              <a:rPr lang="fr-FR" sz="2000" baseline="0">
-                <a:solidFill>
-                  <a:schemeClr val="bg1"/>
-                </a:solidFill>
-                <a:latin typeface="Arial"/>
-              </a:rPr>
-              <a:t>- </a:t>
-            </a:r>
-            <a:r>
-              <a:rPr lang="fr-FR" sz="2000" baseline="0" err="1">
-                <a:solidFill>
-                  <a:schemeClr val="bg1"/>
-                </a:solidFill>
-                <a:latin typeface="Arial"/>
-              </a:rPr>
-              <a:t>React</a:t>
-            </a:r>
-            <a:r>
-              <a:rPr lang="fr-FR" sz="2000" baseline="0">
-                <a:solidFill>
-                  <a:schemeClr val="bg1"/>
-                </a:solidFill>
-                <a:latin typeface="Arial"/>
-              </a:rPr>
-              <a:t> Native</a:t>
-            </a:r>
-            <a:r>
-              <a:rPr lang="fr-FR" sz="2000">
-                <a:solidFill>
-                  <a:schemeClr val="bg1"/>
-                </a:solidFill>
-                <a:latin typeface="Arial"/>
-                <a:ea typeface="Arial"/>
-                <a:cs typeface="Arial"/>
-              </a:rPr>
-              <a:t>​ (JavaScript / </a:t>
-            </a:r>
-            <a:r>
-              <a:rPr lang="fr-FR" sz="2000" err="1">
-                <a:solidFill>
-                  <a:schemeClr val="bg1"/>
-                </a:solidFill>
-                <a:latin typeface="Arial"/>
-                <a:ea typeface="Arial"/>
-                <a:cs typeface="Arial"/>
-              </a:rPr>
-              <a:t>Typescript</a:t>
-            </a:r>
-            <a:r>
-              <a:rPr lang="fr-FR" sz="2000">
-                <a:solidFill>
-                  <a:schemeClr val="bg1"/>
-                </a:solidFill>
-                <a:latin typeface="Arial"/>
-                <a:ea typeface="Arial"/>
-                <a:cs typeface="Arial"/>
-              </a:rPr>
-              <a:t>)</a:t>
-            </a:r>
-            <a:endParaRPr lang="fr-FR" sz="2000">
-              <a:solidFill>
-                <a:schemeClr val="bg1"/>
-              </a:solidFill>
-              <a:cs typeface="Arial"/>
-            </a:endParaRPr>
-          </a:p>
-          <a:p>
-            <a:br>
-              <a:rPr lang="fr-FR" sz="2000">
-                <a:solidFill>
-                  <a:schemeClr val="bg1"/>
-                </a:solidFill>
-                <a:latin typeface="Arial"/>
-                <a:ea typeface="Arial"/>
-                <a:cs typeface="Arial"/>
-              </a:rPr>
-            </a:br>
-            <a:r>
-              <a:rPr lang="fr-FR" sz="2000" baseline="0">
-                <a:solidFill>
-                  <a:schemeClr val="bg1"/>
-                </a:solidFill>
-                <a:latin typeface="Arial"/>
-              </a:rPr>
-              <a:t>-</a:t>
-            </a:r>
-            <a:r>
-              <a:rPr lang="fr-FR" sz="2000">
-                <a:solidFill>
-                  <a:schemeClr val="bg1"/>
-                </a:solidFill>
-                <a:latin typeface="Arial"/>
-              </a:rPr>
-              <a:t> </a:t>
-            </a:r>
-            <a:r>
-              <a:rPr lang="fr-FR" sz="2000" baseline="0">
-                <a:solidFill>
-                  <a:schemeClr val="bg1"/>
-                </a:solidFill>
-                <a:latin typeface="Arial"/>
-              </a:rPr>
-              <a:t>Flutter</a:t>
-            </a:r>
-            <a:r>
-              <a:rPr lang="fr-FR" sz="2000">
-                <a:solidFill>
-                  <a:schemeClr val="bg1"/>
-                </a:solidFill>
-                <a:latin typeface="Arial"/>
-                <a:ea typeface="Arial"/>
-                <a:cs typeface="Arial"/>
-              </a:rPr>
-              <a:t>​  (</a:t>
-            </a:r>
-            <a:r>
-              <a:rPr lang="fr-FR" sz="2000" b="1">
-                <a:solidFill>
-                  <a:schemeClr val="bg1"/>
-                </a:solidFill>
-                <a:latin typeface="Arial"/>
-                <a:ea typeface="Arial"/>
-                <a:cs typeface="Arial"/>
-              </a:rPr>
-              <a:t>Dart</a:t>
-            </a:r>
-            <a:r>
-              <a:rPr lang="fr-FR" sz="2000">
-                <a:solidFill>
-                  <a:schemeClr val="bg1"/>
-                </a:solidFill>
-                <a:latin typeface="Arial"/>
-                <a:ea typeface="Arial"/>
-                <a:cs typeface="Arial"/>
-              </a:rPr>
-              <a:t> )</a:t>
-            </a:r>
-          </a:p>
-          <a:p>
-            <a:br>
-              <a:rPr lang="fr-FR" sz="2000">
-                <a:solidFill>
-                  <a:schemeClr val="bg1"/>
-                </a:solidFill>
-                <a:latin typeface="Arial"/>
-                <a:ea typeface="Arial"/>
-                <a:cs typeface="Arial"/>
-              </a:rPr>
-            </a:br>
-            <a:r>
-              <a:rPr lang="fr-FR" sz="2000" baseline="0">
-                <a:solidFill>
-                  <a:schemeClr val="bg1"/>
-                </a:solidFill>
-                <a:latin typeface="Arial"/>
-              </a:rPr>
-              <a:t>- Xamarin</a:t>
-            </a:r>
-            <a:r>
-              <a:rPr lang="fr-FR" sz="2000">
-                <a:solidFill>
-                  <a:schemeClr val="bg1"/>
-                </a:solidFill>
-                <a:latin typeface="Arial"/>
-                <a:ea typeface="Arial"/>
-                <a:cs typeface="Arial"/>
-              </a:rPr>
-              <a:t>​ (</a:t>
-            </a:r>
-            <a:r>
-              <a:rPr lang="fr-FR" sz="2000" b="1">
-                <a:solidFill>
-                  <a:schemeClr val="bg1"/>
-                </a:solidFill>
-                <a:latin typeface="Arial"/>
-                <a:ea typeface="Arial"/>
-                <a:cs typeface="Arial"/>
-              </a:rPr>
-              <a:t>C#)</a:t>
-            </a:r>
-          </a:p>
-          <a:p>
-            <a:pPr algn="ctr"/>
-            <a:endParaRPr lang="fr-FR" sz="2000">
-              <a:cs typeface="Arial"/>
-            </a:endParaRPr>
-          </a:p>
-        </p:txBody>
-      </p:sp>
-    </p:spTree>
-    <p:extLst>
-      <p:ext uri="{BB962C8B-B14F-4D97-AF65-F5344CB8AC3E}">
-        <p14:creationId xmlns:p14="http://schemas.microsoft.com/office/powerpoint/2010/main" val="3607270498"/>
-      </p:ext>
-    </p:extLst>
-  </p:cSld>
-  <p:clrMapOvr>
-    <a:masterClrMapping/>
-  </p:clrMapOvr>
-  <mc:AlternateContent xmlns:mc="http://schemas.openxmlformats.org/markup-compatibility/2006">
-    <mc:Choice xmlns:p14="http://schemas.microsoft.com/office/powerpoint/2010/main" Requires="p14">
-      <p:transition spd="med" p14:dur="700">
-        <p:fade/>
-      </p:transition>
-    </mc:Choice>
-    <mc:Fallback>
-      <p:transition spd="med">
-        <p:fade/>
-      </p:transition>
-    </mc:Fallback>
-  </mc:AlternateContent>
-</p:sld>
-</file>
-
-<file path=ppt/slides/slide8.xml><?xml version="1.0" encoding="utf-8"?>
-<p:sld xmlns:a="http://schemas.openxmlformats.org/drawingml/2006/main" xmlns:r="http://schemas.openxmlformats.org/officeDocument/2006/relationships" xmlns:p="http://schemas.openxmlformats.org/presentationml/2006/main">
-  <p:cSld>
-    <p:spTree>
-      <p:nvGrpSpPr>
-        <p:cNvPr id="1" name=""/>
-        <p:cNvGrpSpPr/>
-        <p:nvPr/>
-      </p:nvGrpSpPr>
-      <p:grpSpPr>
-        <a:xfrm>
-          <a:off x="0" y="0"/>
-          <a:ext cx="0" cy="0"/>
-          <a:chOff x="0" y="0"/>
-          <a:chExt cx="0" cy="0"/>
-        </a:xfrm>
-      </p:grpSpPr>
-      <p:sp>
-        <p:nvSpPr>
           <p:cNvPr id="2" name="Title 1">
             <a:extLst>
               <a:ext uri="{FF2B5EF4-FFF2-40B4-BE49-F238E27FC236}">
-                <a16:creationId xmlns:a16="http://schemas.microsoft.com/office/drawing/2014/main" id="{B3EA3691-21C2-7345-4D12-5EE8015B735F}"/>
+                <a16:creationId xmlns:a16="http://schemas.microsoft.com/office/drawing/2014/main" id="{B401D13A-B10A-E3CB-6DAC-C3A6474FA8FB}"/>
               </a:ext>
             </a:extLst>
           </p:cNvPr>
@@ -30265,13 +32420,10 @@
           <a:lstStyle/>
           <a:p>
             <a:r>
-              <a:rPr lang="en-US" b="0">
-                <a:ea typeface="+mj-lt"/>
-                <a:cs typeface="+mj-lt"/>
-              </a:rPr>
-              <a:t>Mobile App Architecture Patterns</a:t>
+              <a:rPr lang="en-US" dirty="0"/>
+              <a:t>2. ⁠ ⁠ ⁠Web Apps</a:t>
             </a:r>
-            <a:endParaRPr lang="en-US"/>
+            <a:endParaRPr lang="en-CM" dirty="0"/>
           </a:p>
         </p:txBody>
       </p:sp>
@@ -30280,7 +32432,7 @@
           <p:cNvPr id="3" name="Slide Number Placeholder 2">
             <a:extLst>
               <a:ext uri="{FF2B5EF4-FFF2-40B4-BE49-F238E27FC236}">
-                <a16:creationId xmlns:a16="http://schemas.microsoft.com/office/drawing/2014/main" id="{53E24542-3419-D0AE-8997-4CA00118378B}"/>
+                <a16:creationId xmlns:a16="http://schemas.microsoft.com/office/drawing/2014/main" id="{32F44AD5-E2AA-4E72-53F8-87A69B2D8049}"/>
               </a:ext>
             </a:extLst>
           </p:cNvPr>
@@ -30299,7 +32451,7 @@
             <a:fld id="{C263D6C4-4840-40CC-AC84-17E24B3B7BDE}" type="slidenum">
               <a:rPr lang="en-US" noProof="0" smtClean="0"/>
               <a:pPr/>
-              <a:t>8</a:t>
+              <a:t>6</a:t>
             </a:fld>
             <a:endParaRPr lang="en-US" noProof="0"/>
           </a:p>
@@ -30307,10 +32459,10 @@
       </p:sp>
       <p:sp>
         <p:nvSpPr>
-          <p:cNvPr id="4" name="Content Placeholder 3">
+          <p:cNvPr id="4" name="Text Placeholder 3">
             <a:extLst>
               <a:ext uri="{FF2B5EF4-FFF2-40B4-BE49-F238E27FC236}">
-                <a16:creationId xmlns:a16="http://schemas.microsoft.com/office/drawing/2014/main" id="{BC3C7601-E598-D895-A67B-BCE070B77069}"/>
+                <a16:creationId xmlns:a16="http://schemas.microsoft.com/office/drawing/2014/main" id="{7DF9EA5F-EF4A-9EA4-28E0-3F7E6FD34311}"/>
               </a:ext>
             </a:extLst>
           </p:cNvPr>
@@ -30318,129 +32470,46 @@
             <a:spLocks noGrp="1"/>
           </p:cNvSpPr>
           <p:nvPr>
-            <p:ph idx="1"/>
+            <p:ph type="body" sz="quarter" idx="13"/>
           </p:nvPr>
         </p:nvSpPr>
         <p:spPr/>
         <p:txBody>
-          <a:bodyPr vert="horz" lIns="91440" tIns="45720" rIns="91440" bIns="45720" rtlCol="0" anchor="t">
-            <a:normAutofit/>
-          </a:bodyPr>
+          <a:bodyPr/>
           <a:lstStyle/>
           <a:p>
-            <a:endParaRPr lang="en-US" sz="2000" b="1">
-              <a:ea typeface="+mn-lt"/>
-              <a:cs typeface="+mn-lt"/>
-            </a:endParaRPr>
+            <a:endParaRPr lang="en-US" sz="2000" dirty="0"/>
           </a:p>
           <a:p>
             <a:r>
-              <a:rPr lang="en-US" sz="2000" b="1">
-                <a:ea typeface="+mn-lt"/>
-                <a:cs typeface="+mn-lt"/>
-              </a:rPr>
-              <a:t>MVC (Model-View-Controller):</a:t>
+              <a:rPr lang="en-US" sz="2000" dirty="0"/>
+              <a:t>Run in a browser</a:t>
             </a:r>
+          </a:p>
+          <a:p>
+            <a:endParaRPr lang="en-US" sz="2000" dirty="0"/>
+          </a:p>
+          <a:p>
             <a:r>
-              <a:rPr lang="en-US" sz="2000">
-                <a:ea typeface="+mn-lt"/>
-                <a:cs typeface="+mn-lt"/>
-              </a:rPr>
-              <a:t> The classic separation. Simple but can lead to "Massive Controllers" in big apps.</a:t>
+              <a:rPr lang="en-US" sz="2000" dirty="0"/>
+              <a:t>No installation needed</a:t>
             </a:r>
-            <a:endParaRPr lang="en-US" sz="2000">
-              <a:cs typeface="Arial"/>
-            </a:endParaRPr>
-          </a:p>
-          <a:p>
-            <a:endParaRPr lang="en-US" sz="2000">
-              <a:ea typeface="+mn-lt"/>
-              <a:cs typeface="+mn-lt"/>
-            </a:endParaRPr>
+          </a:p>
+          <a:p>
+            <a:endParaRPr lang="en-US" sz="2000" dirty="0"/>
           </a:p>
           <a:p>
             <a:r>
-              <a:rPr lang="en-US" sz="2000" b="1">
-                <a:ea typeface="+mn-lt"/>
-                <a:cs typeface="+mn-lt"/>
-              </a:rPr>
-              <a:t>MVP (Model-View-Presenter):</a:t>
+              <a:rPr lang="en-US" sz="2000" dirty="0"/>
+              <a:t>Cheap but limited</a:t>
             </a:r>
-            <a:r>
-              <a:rPr lang="en-US" sz="2000">
-                <a:ea typeface="+mn-lt"/>
-                <a:cs typeface="+mn-lt"/>
-              </a:rPr>
-              <a:t> Presenter acts as a middleman; better for unit testing.</a:t>
-            </a:r>
-            <a:endParaRPr lang="en-US" sz="2000">
-              <a:cs typeface="Arial"/>
-            </a:endParaRPr>
-          </a:p>
-          <a:p>
-            <a:endParaRPr lang="en-US" sz="2000">
-              <a:ea typeface="+mn-lt"/>
-              <a:cs typeface="+mn-lt"/>
-            </a:endParaRPr>
-          </a:p>
-          <a:p>
-            <a:r>
-              <a:rPr lang="en-US" sz="2000" b="1">
-                <a:ea typeface="+mn-lt"/>
-                <a:cs typeface="+mn-lt"/>
-              </a:rPr>
-              <a:t>MVVM (Model-View-</a:t>
-            </a:r>
-            <a:r>
-              <a:rPr lang="en-US" sz="2000" b="1" err="1">
-                <a:ea typeface="+mn-lt"/>
-                <a:cs typeface="+mn-lt"/>
-              </a:rPr>
-              <a:t>ViewModel</a:t>
-            </a:r>
-            <a:r>
-              <a:rPr lang="en-US" sz="2000" b="1">
-                <a:ea typeface="+mn-lt"/>
-                <a:cs typeface="+mn-lt"/>
-              </a:rPr>
-              <a:t>):</a:t>
-            </a:r>
-            <a:r>
-              <a:rPr lang="en-US" sz="2000">
-                <a:ea typeface="+mn-lt"/>
-                <a:cs typeface="+mn-lt"/>
-              </a:rPr>
-              <a:t> Modern standard (Android Jetpack). Uses </a:t>
-            </a:r>
-            <a:r>
-              <a:rPr lang="en-US" sz="2000" b="1">
-                <a:ea typeface="+mn-lt"/>
-                <a:cs typeface="+mn-lt"/>
-              </a:rPr>
-              <a:t>Data Binding</a:t>
-            </a:r>
-            <a:r>
-              <a:rPr lang="en-US" sz="2000">
-                <a:ea typeface="+mn-lt"/>
-                <a:cs typeface="+mn-lt"/>
-              </a:rPr>
-              <a:t> to sync UI and Logic automatically.</a:t>
-            </a:r>
-            <a:endParaRPr lang="en-US" sz="2000">
-              <a:cs typeface="Arial"/>
-            </a:endParaRPr>
-          </a:p>
-          <a:p>
-            <a:endParaRPr lang="en-US" sz="2000">
-              <a:cs typeface="Arial"/>
-            </a:endParaRPr>
           </a:p>
         </p:txBody>
       </p:sp>
     </p:spTree>
     <p:extLst>
       <p:ext uri="{BB962C8B-B14F-4D97-AF65-F5344CB8AC3E}">
-        <p14:creationId xmlns:p14="http://schemas.microsoft.com/office/powerpoint/2010/main" val="3543692863"/>
+        <p14:creationId xmlns:p14="http://schemas.microsoft.com/office/powerpoint/2010/main" val="369509394"/>
       </p:ext>
     </p:extLst>
   </p:cSld>
@@ -30450,12 +32519,18 @@
 </p:sld>
 </file>
 
-<file path=ppt/slides/slide9.xml><?xml version="1.0" encoding="utf-8"?>
+<file path=ppt/slides/slide7.xml><?xml version="1.0" encoding="utf-8"?>
 <p:sld xmlns:a="http://schemas.openxmlformats.org/drawingml/2006/main" xmlns:r="http://schemas.openxmlformats.org/officeDocument/2006/relationships" xmlns:p="http://schemas.openxmlformats.org/presentationml/2006/main">
   <p:cSld>
     <p:spTree>
       <p:nvGrpSpPr>
-        <p:cNvPr id="1" name=""/>
+        <p:cNvPr id="1" name="">
+          <a:extLst>
+            <a:ext uri="{FF2B5EF4-FFF2-40B4-BE49-F238E27FC236}">
+              <a16:creationId xmlns:a16="http://schemas.microsoft.com/office/drawing/2014/main" id="{E9257C38-BE6F-3807-1FF8-2E1227B435AB}"/>
+            </a:ext>
+          </a:extLst>
+        </p:cNvPr>
         <p:cNvGrpSpPr/>
         <p:nvPr/>
       </p:nvGrpSpPr>
@@ -30472,7 +32547,7 @@
           <p:cNvPr id="2" name="Title 1">
             <a:extLst>
               <a:ext uri="{FF2B5EF4-FFF2-40B4-BE49-F238E27FC236}">
-                <a16:creationId xmlns:a16="http://schemas.microsoft.com/office/drawing/2014/main" id="{51348BA5-1584-F84E-2736-19E9659CCBDF}"/>
+                <a16:creationId xmlns:a16="http://schemas.microsoft.com/office/drawing/2014/main" id="{51CA8B2A-E003-4063-86A2-D38E31B09006}"/>
               </a:ext>
             </a:extLst>
           </p:cNvPr>
@@ -30486,7 +32561,7 @@
         <p:spPr>
           <a:xfrm>
             <a:off x="444500" y="542925"/>
-            <a:ext cx="11214100" cy="978729"/>
+            <a:ext cx="11214100" cy="535531"/>
           </a:xfrm>
         </p:spPr>
         <p:txBody>
@@ -30494,16 +32569,10 @@
           <a:lstStyle/>
           <a:p>
             <a:r>
-              <a:rPr lang="en-US" b="0">
-                <a:ea typeface="+mj-lt"/>
-                <a:cs typeface="+mj-lt"/>
-              </a:rPr>
-              <a:t>Requirement Engineering (The 5 Stages)</a:t>
+              <a:rPr lang="en-US" dirty="0"/>
+              <a:t>3. ⁠ ⁠ ⁠Hybrid Apps</a:t>
             </a:r>
-            <a:endParaRPr lang="en-US"/>
-          </a:p>
-          <a:p>
-            <a:endParaRPr lang="en-US"/>
+            <a:endParaRPr lang="en-CM" dirty="0"/>
           </a:p>
         </p:txBody>
       </p:sp>
@@ -30512,7 +32581,7 @@
           <p:cNvPr id="3" name="Slide Number Placeholder 2">
             <a:extLst>
               <a:ext uri="{FF2B5EF4-FFF2-40B4-BE49-F238E27FC236}">
-                <a16:creationId xmlns:a16="http://schemas.microsoft.com/office/drawing/2014/main" id="{8EFDEAFD-DADB-8F7F-B368-210124ED4C0D}"/>
+                <a16:creationId xmlns:a16="http://schemas.microsoft.com/office/drawing/2014/main" id="{8D7D7973-E67B-BE7F-5284-75EA9A38A33C}"/>
               </a:ext>
             </a:extLst>
           </p:cNvPr>
@@ -30531,7 +32600,7 @@
             <a:fld id="{C263D6C4-4840-40CC-AC84-17E24B3B7BDE}" type="slidenum">
               <a:rPr lang="en-US" noProof="0" smtClean="0"/>
               <a:pPr/>
-              <a:t>9</a:t>
+              <a:t>7</a:t>
             </a:fld>
             <a:endParaRPr lang="en-US" noProof="0"/>
           </a:p>
@@ -30539,10 +32608,10 @@
       </p:sp>
       <p:sp>
         <p:nvSpPr>
-          <p:cNvPr id="4" name="Content Placeholder 3">
+          <p:cNvPr id="4" name="Text Placeholder 3">
             <a:extLst>
               <a:ext uri="{FF2B5EF4-FFF2-40B4-BE49-F238E27FC236}">
-                <a16:creationId xmlns:a16="http://schemas.microsoft.com/office/drawing/2014/main" id="{0C4045AE-80EC-6677-1C76-45869F186E5E}"/>
+                <a16:creationId xmlns:a16="http://schemas.microsoft.com/office/drawing/2014/main" id="{47F72E73-B326-1AFA-1336-573DBDC879AC}"/>
               </a:ext>
             </a:extLst>
           </p:cNvPr>
@@ -30550,159 +32619,374 @@
             <a:spLocks noGrp="1"/>
           </p:cNvSpPr>
           <p:nvPr>
-            <p:ph idx="1"/>
+            <p:ph type="body" sz="quarter" idx="13"/>
           </p:nvPr>
         </p:nvSpPr>
         <p:spPr/>
         <p:txBody>
-          <a:bodyPr vert="horz" lIns="91440" tIns="45720" rIns="91440" bIns="45720" rtlCol="0" anchor="t">
-            <a:normAutofit/>
-          </a:bodyPr>
+          <a:bodyPr/>
           <a:lstStyle/>
           <a:p>
+            <a:endParaRPr lang="en-US" sz="2000" dirty="0"/>
+          </a:p>
+          <a:p>
             <a:r>
-              <a:rPr lang="en-US" sz="2000" b="1">
-                <a:ea typeface="+mn-lt"/>
-                <a:cs typeface="+mn-lt"/>
-              </a:rPr>
-              <a:t>Elicitation:</a:t>
+              <a:rPr lang="en-US" sz="2000" dirty="0"/>
+              <a:t>- Combination of web and native</a:t>
             </a:r>
+          </a:p>
+          <a:p>
+            <a:endParaRPr lang="en-US" sz="2000" dirty="0"/>
+          </a:p>
+          <a:p>
             <a:r>
-              <a:rPr lang="en-US" sz="2000">
-                <a:ea typeface="+mn-lt"/>
-                <a:cs typeface="+mn-lt"/>
-              </a:rPr>
-              <a:t> Interviews and user research.</a:t>
+              <a:rPr lang="en-US" sz="2000" dirty="0"/>
+              <a:t>- One codebase</a:t>
             </a:r>
-            <a:endParaRPr lang="en-US" sz="2000">
-              <a:cs typeface="Arial"/>
-            </a:endParaRPr>
-          </a:p>
-          <a:p>
-            <a:endParaRPr lang="en-US" sz="2000">
-              <a:ea typeface="+mn-lt"/>
-              <a:cs typeface="+mn-lt"/>
-            </a:endParaRPr>
+          </a:p>
+          <a:p>
+            <a:endParaRPr lang="en-US" sz="2000" dirty="0"/>
           </a:p>
           <a:p>
             <a:r>
-              <a:rPr lang="en-US" sz="2000" b="1">
-                <a:ea typeface="+mn-lt"/>
-                <a:cs typeface="+mn-lt"/>
-              </a:rPr>
-              <a:t>Analysis:</a:t>
+              <a:rPr lang="en-US" sz="2000" dirty="0"/>
+              <a:t>- Moderate performance</a:t>
             </a:r>
-            <a:r>
-              <a:rPr lang="en-US" sz="2000">
-                <a:ea typeface="+mn-lt"/>
-                <a:cs typeface="+mn-lt"/>
-              </a:rPr>
-              <a:t> Feasibility studies and "Must-have" vs. "Nice-to-have" (MVP).</a:t>
-            </a:r>
-            <a:endParaRPr lang="en-US" sz="2000">
-              <a:cs typeface="Arial"/>
-            </a:endParaRPr>
-          </a:p>
-          <a:p>
-            <a:endParaRPr lang="en-US" sz="2000">
-              <a:ea typeface="+mn-lt"/>
-              <a:cs typeface="+mn-lt"/>
-            </a:endParaRPr>
-          </a:p>
-          <a:p>
-            <a:r>
-              <a:rPr lang="en-US" sz="2000" b="1">
-                <a:ea typeface="+mn-lt"/>
-                <a:cs typeface="+mn-lt"/>
-              </a:rPr>
-              <a:t>Specification:</a:t>
-            </a:r>
-            <a:r>
-              <a:rPr lang="en-US" sz="2000">
-                <a:ea typeface="+mn-lt"/>
-                <a:cs typeface="+mn-lt"/>
-              </a:rPr>
-              <a:t> Documenting User Stories and Functional requirements.</a:t>
-            </a:r>
-            <a:endParaRPr lang="en-US" sz="2000">
-              <a:cs typeface="Arial"/>
-            </a:endParaRPr>
-          </a:p>
-          <a:p>
-            <a:endParaRPr lang="en-US" sz="2000">
-              <a:ea typeface="+mn-lt"/>
-              <a:cs typeface="+mn-lt"/>
-            </a:endParaRPr>
-          </a:p>
-          <a:p>
-            <a:r>
-              <a:rPr lang="en-US" sz="2000" b="1">
-                <a:ea typeface="+mn-lt"/>
-                <a:cs typeface="+mn-lt"/>
-              </a:rPr>
-              <a:t>Validation:</a:t>
-            </a:r>
-            <a:r>
-              <a:rPr lang="en-US" sz="2000">
-                <a:ea typeface="+mn-lt"/>
-                <a:cs typeface="+mn-lt"/>
-              </a:rPr>
-              <a:t> Prototyping in </a:t>
-            </a:r>
-            <a:r>
-              <a:rPr lang="en-US" sz="2000" b="1">
-                <a:ea typeface="+mn-lt"/>
-                <a:cs typeface="+mn-lt"/>
-              </a:rPr>
-              <a:t>Figma</a:t>
-            </a:r>
-            <a:r>
-              <a:rPr lang="en-US" sz="2000">
-                <a:ea typeface="+mn-lt"/>
-                <a:cs typeface="+mn-lt"/>
-              </a:rPr>
-              <a:t> before coding.</a:t>
-            </a:r>
-            <a:endParaRPr lang="en-US" sz="2000">
-              <a:cs typeface="Arial"/>
-            </a:endParaRPr>
-          </a:p>
-          <a:p>
-            <a:endParaRPr lang="en-US" sz="2000">
-              <a:ea typeface="+mn-lt"/>
-              <a:cs typeface="+mn-lt"/>
-            </a:endParaRPr>
-          </a:p>
-          <a:p>
-            <a:r>
-              <a:rPr lang="en-US" sz="2000" b="1">
-                <a:ea typeface="+mn-lt"/>
-                <a:cs typeface="+mn-lt"/>
-              </a:rPr>
-              <a:t>Management:</a:t>
-            </a:r>
-            <a:r>
-              <a:rPr lang="en-US" sz="2000">
-                <a:ea typeface="+mn-lt"/>
-                <a:cs typeface="+mn-lt"/>
-              </a:rPr>
-              <a:t> Handling "Scope Creep" and change requests.</a:t>
-            </a:r>
-            <a:endParaRPr lang="en-US" sz="2000">
-              <a:cs typeface="Arial"/>
-            </a:endParaRPr>
-          </a:p>
-          <a:p>
-            <a:endParaRPr lang="en-US" sz="2000">
-              <a:cs typeface="Arial"/>
-            </a:endParaRPr>
+          </a:p>
+          <a:p>
+            <a:endParaRPr lang="en-US" sz="2000" dirty="0"/>
           </a:p>
         </p:txBody>
       </p:sp>
     </p:spTree>
     <p:extLst>
       <p:ext uri="{BB962C8B-B14F-4D97-AF65-F5344CB8AC3E}">
-        <p14:creationId xmlns:p14="http://schemas.microsoft.com/office/powerpoint/2010/main" val="3626490682"/>
+        <p14:creationId xmlns:p14="http://schemas.microsoft.com/office/powerpoint/2010/main" val="3109930219"/>
+      </p:ext>
+    </p:extLst>
+  </p:cSld>
+  <p:clrMapOvr>
+    <a:masterClrMapping/>
+  </p:clrMapOvr>
+</p:sld>
+</file>
+
+<file path=ppt/slides/slide8.xml><?xml version="1.0" encoding="utf-8"?>
+<p:sld xmlns:a="http://schemas.openxmlformats.org/drawingml/2006/main" xmlns:r="http://schemas.openxmlformats.org/officeDocument/2006/relationships" xmlns:p="http://schemas.openxmlformats.org/presentationml/2006/main">
+  <p:cSld>
+    <p:spTree>
+      <p:nvGrpSpPr>
+        <p:cNvPr id="1" name="">
+          <a:extLst>
+            <a:ext uri="{FF2B5EF4-FFF2-40B4-BE49-F238E27FC236}">
+              <a16:creationId xmlns:a16="http://schemas.microsoft.com/office/drawing/2014/main" id="{8CC315A2-469F-4662-EEFF-5254B064EC74}"/>
+            </a:ext>
+          </a:extLst>
+        </p:cNvPr>
+        <p:cNvGrpSpPr/>
+        <p:nvPr/>
+      </p:nvGrpSpPr>
+      <p:grpSpPr>
+        <a:xfrm>
+          <a:off x="0" y="0"/>
+          <a:ext cx="0" cy="0"/>
+          <a:chOff x="0" y="0"/>
+          <a:chExt cx="0" cy="0"/>
+        </a:xfrm>
+      </p:grpSpPr>
+      <p:sp>
+        <p:nvSpPr>
+          <p:cNvPr id="2" name="Title 1">
+            <a:extLst>
+              <a:ext uri="{FF2B5EF4-FFF2-40B4-BE49-F238E27FC236}">
+                <a16:creationId xmlns:a16="http://schemas.microsoft.com/office/drawing/2014/main" id="{564F39AE-1580-76CC-86AE-85ED2E24119B}"/>
+              </a:ext>
+            </a:extLst>
+          </p:cNvPr>
+          <p:cNvSpPr>
+            <a:spLocks noGrp="1"/>
+          </p:cNvSpPr>
+          <p:nvPr>
+            <p:ph type="title"/>
+          </p:nvPr>
+        </p:nvSpPr>
+        <p:spPr>
+          <a:xfrm>
+            <a:off x="444500" y="542925"/>
+            <a:ext cx="11214100" cy="535531"/>
+          </a:xfrm>
+        </p:spPr>
+        <p:txBody>
+          <a:bodyPr/>
+          <a:lstStyle/>
+          <a:p>
+            <a:r>
+              <a:rPr lang="en-US" dirty="0"/>
+              <a:t>4. ⁠ ⁠ ⁠Cross-Platform Apps</a:t>
+            </a:r>
+            <a:endParaRPr lang="en-CM" dirty="0"/>
+          </a:p>
+        </p:txBody>
+      </p:sp>
+      <p:sp>
+        <p:nvSpPr>
+          <p:cNvPr id="3" name="Slide Number Placeholder 2">
+            <a:extLst>
+              <a:ext uri="{FF2B5EF4-FFF2-40B4-BE49-F238E27FC236}">
+                <a16:creationId xmlns:a16="http://schemas.microsoft.com/office/drawing/2014/main" id="{1AEA1F8D-7AE2-FD34-A340-B3FFB7BC3669}"/>
+              </a:ext>
+            </a:extLst>
+          </p:cNvPr>
+          <p:cNvSpPr>
+            <a:spLocks noGrp="1"/>
+          </p:cNvSpPr>
+          <p:nvPr>
+            <p:ph type="sldNum" sz="quarter" idx="12"/>
+          </p:nvPr>
+        </p:nvSpPr>
+        <p:spPr/>
+        <p:txBody>
+          <a:bodyPr/>
+          <a:lstStyle/>
+          <a:p>
+            <a:fld id="{C263D6C4-4840-40CC-AC84-17E24B3B7BDE}" type="slidenum">
+              <a:rPr lang="en-US" noProof="0" smtClean="0"/>
+              <a:pPr/>
+              <a:t>8</a:t>
+            </a:fld>
+            <a:endParaRPr lang="en-US" noProof="0"/>
+          </a:p>
+        </p:txBody>
+      </p:sp>
+      <p:sp>
+        <p:nvSpPr>
+          <p:cNvPr id="4" name="Text Placeholder 3">
+            <a:extLst>
+              <a:ext uri="{FF2B5EF4-FFF2-40B4-BE49-F238E27FC236}">
+                <a16:creationId xmlns:a16="http://schemas.microsoft.com/office/drawing/2014/main" id="{DEC4B010-4F46-3336-AD80-FF639D298F94}"/>
+              </a:ext>
+            </a:extLst>
+          </p:cNvPr>
+          <p:cNvSpPr>
+            <a:spLocks noGrp="1"/>
+          </p:cNvSpPr>
+          <p:nvPr>
+            <p:ph type="body" sz="quarter" idx="13"/>
+          </p:nvPr>
+        </p:nvSpPr>
+        <p:spPr/>
+        <p:txBody>
+          <a:bodyPr/>
+          <a:lstStyle/>
+          <a:p>
+            <a:endParaRPr lang="en-US" sz="2000" dirty="0"/>
+          </a:p>
+          <a:p>
+            <a:r>
+              <a:rPr lang="en-US" sz="2000" dirty="0"/>
+              <a:t> One app works on multiple platforms</a:t>
+            </a:r>
+          </a:p>
+          <a:p>
+            <a:endParaRPr lang="en-US" sz="2000" dirty="0"/>
+          </a:p>
+          <a:p>
+            <a:pPr marL="285750" indent="-285750">
+              <a:buFontTx/>
+              <a:buChar char="-"/>
+            </a:pPr>
+            <a:r>
+              <a:rPr lang="en-US" sz="2000" dirty="0"/>
+              <a:t>Saves time and cost</a:t>
+            </a:r>
+          </a:p>
+          <a:p>
+            <a:pPr marL="285750" indent="-285750">
+              <a:buFontTx/>
+              <a:buChar char="-"/>
+            </a:pPr>
+            <a:endParaRPr lang="en-US" sz="2000" dirty="0"/>
+          </a:p>
+          <a:p>
+            <a:r>
+              <a:rPr lang="en-US" sz="2000" dirty="0"/>
+              <a:t> Very popular today</a:t>
+            </a:r>
+          </a:p>
+          <a:p>
+            <a:endParaRPr lang="en-US" sz="2000" dirty="0"/>
+          </a:p>
+        </p:txBody>
+      </p:sp>
+    </p:spTree>
+    <p:extLst>
+      <p:ext uri="{BB962C8B-B14F-4D97-AF65-F5344CB8AC3E}">
+        <p14:creationId xmlns:p14="http://schemas.microsoft.com/office/powerpoint/2010/main" val="13045685"/>
+      </p:ext>
+    </p:extLst>
+  </p:cSld>
+  <p:clrMapOvr>
+    <a:masterClrMapping/>
+  </p:clrMapOvr>
+</p:sld>
+</file>
+
+<file path=ppt/slides/slide9.xml><?xml version="1.0" encoding="utf-8"?>
+<p:sld xmlns:a="http://schemas.openxmlformats.org/drawingml/2006/main" xmlns:r="http://schemas.openxmlformats.org/officeDocument/2006/relationships" xmlns:p="http://schemas.openxmlformats.org/presentationml/2006/main">
+  <p:cSld>
+    <p:spTree>
+      <p:nvGrpSpPr>
+        <p:cNvPr id="1" name="">
+          <a:extLst>
+            <a:ext uri="{FF2B5EF4-FFF2-40B4-BE49-F238E27FC236}">
+              <a16:creationId xmlns:a16="http://schemas.microsoft.com/office/drawing/2014/main" id="{EBB7C8E5-EF24-8BE6-E69C-1F5E5BA093BB}"/>
+            </a:ext>
+          </a:extLst>
+        </p:cNvPr>
+        <p:cNvGrpSpPr/>
+        <p:nvPr/>
+      </p:nvGrpSpPr>
+      <p:grpSpPr>
+        <a:xfrm>
+          <a:off x="0" y="0"/>
+          <a:ext cx="0" cy="0"/>
+          <a:chOff x="0" y="0"/>
+          <a:chExt cx="0" cy="0"/>
+        </a:xfrm>
+      </p:grpSpPr>
+      <p:sp>
+        <p:nvSpPr>
+          <p:cNvPr id="2" name="Title 1">
+            <a:extLst>
+              <a:ext uri="{FF2B5EF4-FFF2-40B4-BE49-F238E27FC236}">
+                <a16:creationId xmlns:a16="http://schemas.microsoft.com/office/drawing/2014/main" id="{364D651A-DAB6-674D-B9A2-293D7F2306CC}"/>
+              </a:ext>
+            </a:extLst>
+          </p:cNvPr>
+          <p:cNvSpPr>
+            <a:spLocks noGrp="1"/>
+          </p:cNvSpPr>
+          <p:nvPr>
+            <p:ph type="title"/>
+          </p:nvPr>
+        </p:nvSpPr>
+        <p:spPr>
+          <a:xfrm>
+            <a:off x="444500" y="542925"/>
+            <a:ext cx="11214100" cy="535531"/>
+          </a:xfrm>
+        </p:spPr>
+        <p:txBody>
+          <a:bodyPr/>
+          <a:lstStyle/>
+          <a:p>
+            <a:r>
+              <a:rPr lang="en-US" dirty="0"/>
+              <a:t>5. ⁠ ⁠ ⁠Progressive Web Apps (PWA)</a:t>
+            </a:r>
+            <a:endParaRPr lang="en-CM" dirty="0"/>
+          </a:p>
+        </p:txBody>
+      </p:sp>
+      <p:sp>
+        <p:nvSpPr>
+          <p:cNvPr id="3" name="Slide Number Placeholder 2">
+            <a:extLst>
+              <a:ext uri="{FF2B5EF4-FFF2-40B4-BE49-F238E27FC236}">
+                <a16:creationId xmlns:a16="http://schemas.microsoft.com/office/drawing/2014/main" id="{0FFEDE1D-726B-BA3F-4209-BFE1AF7E5F0B}"/>
+              </a:ext>
+            </a:extLst>
+          </p:cNvPr>
+          <p:cNvSpPr>
+            <a:spLocks noGrp="1"/>
+          </p:cNvSpPr>
+          <p:nvPr>
+            <p:ph type="sldNum" sz="quarter" idx="12"/>
+          </p:nvPr>
+        </p:nvSpPr>
+        <p:spPr/>
+        <p:txBody>
+          <a:bodyPr/>
+          <a:lstStyle/>
+          <a:p>
+            <a:fld id="{C263D6C4-4840-40CC-AC84-17E24B3B7BDE}" type="slidenum">
+              <a:rPr lang="en-US" noProof="0" smtClean="0"/>
+              <a:pPr/>
+              <a:t>9</a:t>
+            </a:fld>
+            <a:endParaRPr lang="en-US" noProof="0"/>
+          </a:p>
+        </p:txBody>
+      </p:sp>
+      <p:sp>
+        <p:nvSpPr>
+          <p:cNvPr id="4" name="Text Placeholder 3">
+            <a:extLst>
+              <a:ext uri="{FF2B5EF4-FFF2-40B4-BE49-F238E27FC236}">
+                <a16:creationId xmlns:a16="http://schemas.microsoft.com/office/drawing/2014/main" id="{C5AE1958-D788-1AA6-85B8-F0534B8C6D73}"/>
+              </a:ext>
+            </a:extLst>
+          </p:cNvPr>
+          <p:cNvSpPr>
+            <a:spLocks noGrp="1"/>
+          </p:cNvSpPr>
+          <p:nvPr>
+            <p:ph type="body" sz="quarter" idx="13"/>
+          </p:nvPr>
+        </p:nvSpPr>
+        <p:spPr/>
+        <p:txBody>
+          <a:bodyPr/>
+          <a:lstStyle/>
+          <a:p>
+            <a:endParaRPr lang="en-US" sz="2000" dirty="0"/>
+          </a:p>
+          <a:p>
+            <a:pPr marL="285750" indent="-285750">
+              <a:buFontTx/>
+              <a:buChar char="-"/>
+            </a:pPr>
+            <a:r>
+              <a:rPr lang="en-US" sz="2000" dirty="0"/>
+              <a:t>Web apps that act like mobile apps</a:t>
+            </a:r>
+          </a:p>
+          <a:p>
+            <a:pPr marL="285750" indent="-285750">
+              <a:buFontTx/>
+              <a:buChar char="-"/>
+            </a:pPr>
+            <a:endParaRPr lang="en-US" sz="2000" dirty="0"/>
+          </a:p>
+          <a:p>
+            <a:pPr marL="285750" indent="-285750">
+              <a:buFontTx/>
+              <a:buChar char="-"/>
+            </a:pPr>
+            <a:r>
+              <a:rPr lang="en-US" sz="2000" dirty="0"/>
+              <a:t>Can work offline</a:t>
+            </a:r>
+          </a:p>
+          <a:p>
+            <a:pPr marL="285750" indent="-285750">
+              <a:buFontTx/>
+              <a:buChar char="-"/>
+            </a:pPr>
+            <a:endParaRPr lang="en-US" sz="2000" dirty="0"/>
+          </a:p>
+          <a:p>
+            <a:r>
+              <a:rPr lang="en-US" sz="2000" dirty="0"/>
+              <a:t> Lightweight but limited features</a:t>
+            </a:r>
+          </a:p>
+        </p:txBody>
+      </p:sp>
+    </p:spTree>
+    <p:extLst>
+      <p:ext uri="{BB962C8B-B14F-4D97-AF65-F5344CB8AC3E}">
+        <p14:creationId xmlns:p14="http://schemas.microsoft.com/office/powerpoint/2010/main" val="1825930208"/>
       </p:ext>
     </p:extLst>
   </p:cSld>
@@ -31512,15 +33796,6 @@
 </file>
 
 <file path=customXml/item2.xml><?xml version="1.0" encoding="utf-8"?>
-<?mso-contentType ?>
-<FormTemplates xmlns="http://schemas.microsoft.com/sharepoint/v3/contenttype/forms">
-  <Display>DocumentLibraryForm</Display>
-  <Edit>DocumentLibraryForm</Edit>
-  <New>DocumentLibraryForm</New>
-</FormTemplates>
-</file>
-
-<file path=customXml/item3.xml><?xml version="1.0" encoding="utf-8"?>
 <ct:contentTypeSchema xmlns:ct="http://schemas.microsoft.com/office/2006/metadata/contentType" xmlns:ma="http://schemas.microsoft.com/office/2006/metadata/properties/metaAttributes" ct:_="" ma:_="" ma:contentTypeName="Document" ma:contentTypeID="0x01010079F111ED35F8CC479449609E8A0923A6" ma:contentTypeVersion="11" ma:contentTypeDescription="Create a new document." ma:contentTypeScope="" ma:versionID="96291512c1ee715ab617f4c07df79fc1">
   <xsd:schema xmlns:xsd="http://www.w3.org/2001/XMLSchema" xmlns:xs="http://www.w3.org/2001/XMLSchema" xmlns:p="http://schemas.microsoft.com/office/2006/metadata/properties" xmlns:ns2="71af3243-3dd4-4a8d-8c0d-dd76da1f02a5" xmlns:ns3="16c05727-aa75-4e4a-9b5f-8a80a1165891" targetNamespace="http://schemas.microsoft.com/office/2006/metadata/properties" ma:root="true" ma:fieldsID="8256c27c40ca5c40ce1cf6c44f0205df" ns2:_="" ns3:_="">
     <xsd:import namespace="71af3243-3dd4-4a8d-8c0d-dd76da1f02a5"/>
@@ -31731,6 +34006,15 @@
 </ct:contentTypeSchema>
 </file>
 
+<file path=customXml/item3.xml><?xml version="1.0" encoding="utf-8"?>
+<?mso-contentType ?>
+<FormTemplates xmlns="http://schemas.microsoft.com/sharepoint/v3/contenttype/forms">
+  <Display>DocumentLibraryForm</Display>
+  <Edit>DocumentLibraryForm</Edit>
+  <New>DocumentLibraryForm</New>
+</FormTemplates>
+</file>
+
 <file path=customXml/itemProps1.xml><?xml version="1.0" encoding="utf-8"?>
 <ds:datastoreItem xmlns:ds="http://schemas.openxmlformats.org/officeDocument/2006/customXml" ds:itemID="{F5757914-1161-4661-9696-421FD6935CDD}">
   <ds:schemaRefs>
@@ -31744,14 +34028,6 @@
 </file>
 
 <file path=customXml/itemProps2.xml><?xml version="1.0" encoding="utf-8"?>
-<ds:datastoreItem xmlns:ds="http://schemas.openxmlformats.org/officeDocument/2006/customXml" ds:itemID="{5B26E0C9-B2AA-42E6-97B6-E1B7D9EAF129}">
-  <ds:schemaRefs>
-    <ds:schemaRef ds:uri="http://schemas.microsoft.com/sharepoint/v3/contenttype/forms"/>
-  </ds:schemaRefs>
-</ds:datastoreItem>
-</file>
-
-<file path=customXml/itemProps3.xml><?xml version="1.0" encoding="utf-8"?>
 <ds:datastoreItem xmlns:ds="http://schemas.openxmlformats.org/officeDocument/2006/customXml" ds:itemID="{4C103400-4A22-4E35-B588-4C4D42638959}">
   <ds:schemaRefs>
     <ds:schemaRef ds:uri="16c05727-aa75-4e4a-9b5f-8a80a1165891"/>
@@ -31769,4 +34045,12 @@
     <ds:schemaRef ds:uri="http://www.w3.org/2001/XMLSchema"/>
   </ds:schemaRefs>
 </ds:datastoreItem>
+</file>
+
+<file path=customXml/itemProps3.xml><?xml version="1.0" encoding="utf-8"?>
+<ds:datastoreItem xmlns:ds="http://schemas.openxmlformats.org/officeDocument/2006/customXml" ds:itemID="{5B26E0C9-B2AA-42E6-97B6-E1B7D9EAF129}">
+  <ds:schemaRefs>
+    <ds:schemaRef ds:uri="http://schemas.microsoft.com/sharepoint/v3/contenttype/forms"/>
+  </ds:schemaRefs>
+</ds:datastoreItem>
 </file>